--- a/Material Campus/Proyecto Final/Proyecto/Entrega/Presentación TP Final Parte 1 - Dulxelitos.pptx
+++ b/Material Campus/Proyecto Final/Proyecto/Entrega/Presentación TP Final Parte 1 - Dulxelitos.pptx
@@ -13,10 +13,9 @@
     <p:sldId id="261" r:id="rId7"/>
     <p:sldId id="262" r:id="rId8"/>
     <p:sldId id="263" r:id="rId9"/>
-    <p:sldId id="264" r:id="rId10"/>
   </p:sldIdLst>
   <p:notesMasterIdLst>
-    <p:notesMasterId r:id="rId11"/>
+    <p:notesMasterId r:id="rId10"/>
   </p:notesMasterIdLst>
   <p:sldSz cx="12192000" cy="6858000"/>
   <p:notesSz cx="6858000" cy="12192000"/>
@@ -950,7 +949,7 @@
           <a:p>
             <a:r>
               <a:rPr lang="en-US" dirty="0"/>
-              <a:t>El canvas completo, igual que el póster que entregamos. El bloque oscuro del centro es la clave: le vende rentabilidad al canal. Abajo a la izquierda, en rojo, está el problema de fondo.</a:t>
+              <a:t>El canvas dividido en cuatro preguntas. EL CEREBRO es cómo lo hace: socios, actividades y recursos. EL CORAZÓN, el bloque oscuro del centro, es qué ofrece: rentabilidad al que revende. LOS CLIENTES es a quién le vende: segmentos, relación y canales. Y LA ECONOMÍA, abajo, es cuánto entra y cuánto sale.</a:t>
             </a:r>
             <a:endParaRPr lang="en-US" dirty="0"/>
           </a:p>
@@ -1038,7 +1037,7 @@
           <a:p>
             <a:r>
               <a:rPr lang="en-US" dirty="0"/>
-              <a:t>Los tres salen directamente del canvas: el bloque de propuesta de valor, el de recursos clave y el de estructura de costos.</a:t>
+              <a:t>Tres dimensiones llegan a Básico: Procesos, Tecnología y Clientes. El piso está en Estrategia y Gobierno. Agregamos Gobierno como séptima dimensión porque el enunciado pide siete y el modelo trae seis. Nivel Inicial no quiere decir mal gestionada: quiere decir que decide sin instrumentos.</a:t>
             </a:r>
             <a:endParaRPr lang="en-US" dirty="0"/>
           </a:p>
@@ -1126,7 +1125,7 @@
           <a:p>
             <a:r>
               <a:rPr lang="en-US" dirty="0"/>
-              <a:t>Tres dimensiones llegan a Básico: Procesos, Tecnología y Clientes. El piso está en Estrategia y Gobierno. Agregamos Gobierno como séptima dimensión porque el enunciado pide siete y el modelo trae seis. Nivel Inicial no quiere decir mal gestionada: quiere decir que decide sin instrumentos.</a:t>
+              <a:t>Cerrar acá. Los tres puntos salen de cruzar el FODA, el canvas y la madurez: las tres herramientas apuntan al mismo lado. Con esto queda armado el terreno para el problema gerencial priorizado, que es la parte 2.</a:t>
             </a:r>
             <a:endParaRPr lang="en-US" dirty="0"/>
           </a:p>
@@ -1150,94 +1149,6 @@
             <a:fld id="{F7021451-1387-4CA6-816F-3879F97B5CBC}" type="slidenum">
               <a:rPr lang="en-US"/>
               <a:t>8</a:t>
-            </a:fld>
-            <a:endParaRPr lang="en-US"/>
-          </a:p>
-        </p:txBody>
-      </p:sp>
-    </p:spTree>
-    <p:extLst>
-      <p:ext uri="{BB962C8B-B14F-4D97-AF65-F5344CB8AC3E}">
-        <p14:creationId xmlns:p14="http://schemas.microsoft.com/office/powerpoint/2010/main" val="1024086991"/>
-      </p:ext>
-    </p:extLst>
-  </p:cSld>
-  <p:clrMapOvr>
-    <a:masterClrMapping/>
-  </p:clrMapOvr>
-</p:notes>
-</file>
-
-<file path=ppt/notesSlides/notesSlide9.xml><?xml version="1.0" encoding="utf-8"?>
-<p:notes xmlns:a="http://schemas.openxmlformats.org/drawingml/2006/main" xmlns:r="http://schemas.openxmlformats.org/officeDocument/2006/relationships" xmlns:p="http://schemas.openxmlformats.org/presentationml/2006/main">
-  <p:cSld>
-    <p:spTree>
-      <p:nvGrpSpPr>
-        <p:cNvPr id="1" name=""/>
-        <p:cNvGrpSpPr/>
-        <p:nvPr/>
-      </p:nvGrpSpPr>
-      <p:grpSpPr>
-        <a:xfrm>
-          <a:off x="0" y="0"/>
-          <a:ext cx="0" cy="0"/>
-          <a:chOff x="0" y="0"/>
-          <a:chExt cx="0" cy="0"/>
-        </a:xfrm>
-      </p:grpSpPr>
-      <p:sp>
-        <p:nvSpPr>
-          <p:cNvPr id="2" name="Slide Image Placeholder 1"/>
-          <p:cNvSpPr>
-            <a:spLocks noGrp="1" noRot="1" noChangeAspect="1"/>
-          </p:cNvSpPr>
-          <p:nvPr>
-            <p:ph type="sldImg"/>
-          </p:nvPr>
-        </p:nvSpPr>
-        <p:spPr/>
-      </p:sp>
-      <p:sp>
-        <p:nvSpPr>
-          <p:cNvPr id="3" name="Notes Placeholder 2"/>
-          <p:cNvSpPr>
-            <a:spLocks noGrp="1"/>
-          </p:cNvSpPr>
-          <p:nvPr>
-            <p:ph type="body" idx="1"/>
-          </p:nvPr>
-        </p:nvSpPr>
-        <p:spPr/>
-        <p:txBody>
-          <a:bodyPr/>
-          <a:lstStyle/>
-          <a:p>
-            <a:r>
-              <a:rPr lang="en-US" dirty="0"/>
-              <a:t>Cerrar acá. Los tres puntos salen de cruzar el FODA, el canvas y la madurez: las tres herramientas apuntan al mismo lado. Con esto queda armado el terreno para el problema gerencial priorizado, que es la parte 2.</a:t>
-            </a:r>
-            <a:endParaRPr lang="en-US" dirty="0"/>
-          </a:p>
-        </p:txBody>
-      </p:sp>
-      <p:sp>
-        <p:nvSpPr>
-          <p:cNvPr id="4" name="Slide Number Placeholder 3"/>
-          <p:cNvSpPr>
-            <a:spLocks noGrp="1"/>
-          </p:cNvSpPr>
-          <p:nvPr>
-            <p:ph type="sldNum" sz="quarter" idx="10"/>
-          </p:nvPr>
-        </p:nvSpPr>
-        <p:spPr/>
-        <p:txBody>
-          <a:bodyPr/>
-          <a:lstStyle/>
-          <a:p>
-            <a:fld id="{F7021451-1387-4CA6-816F-3879F97B5CBC}" type="slidenum">
-              <a:rPr lang="en-US"/>
-              <a:t>9</a:t>
             </a:fld>
             <a:endParaRPr lang="en-US"/>
           </a:p>
@@ -1634,7 +1545,7 @@
         </p:nvSpPr>
         <p:spPr>
           <a:xfrm>
-            <a:off x="594360" y="1737360"/>
+            <a:off x="594360" y="2011680"/>
             <a:ext cx="10972800" cy="1371600"/>
           </a:xfrm>
           <a:prstGeom prst="rect">
@@ -1673,8 +1584,8 @@
         </p:nvSpPr>
         <p:spPr>
           <a:xfrm>
-            <a:off x="594360" y="3200400"/>
-            <a:ext cx="10972800" cy="457200"/>
+            <a:off x="594360" y="3474720"/>
+            <a:ext cx="10972800" cy="411480"/>
           </a:xfrm>
           <a:prstGeom prst="rect">
             <a:avLst/>
@@ -1690,7 +1601,7 @@
               <a:buNone/>
             </a:pPr>
             <a:r>
-              <a:rPr lang="en-US" sz="2400" dirty="0">
+              <a:rPr lang="en-US" sz="2000" dirty="0">
                 <a:solidFill>
                   <a:srgbClr val="C3D0D4"/>
                 </a:solidFill>
@@ -1698,54 +1609,15 @@
                 <a:ea typeface="Calibri" pitchFamily="34" charset="-122"/>
                 <a:cs typeface="Calibri" pitchFamily="34" charset="-120"/>
               </a:rPr>
-              <a:t>Diagnóstico gerencial de una PyME de San Rafael</a:t>
-            </a:r>
-            <a:endParaRPr lang="en-US" sz="2400" dirty="0"/>
+              <a:t>Trabajo Práctico Final · Parte 1 · Modelo de negocio actual</a:t>
+            </a:r>
+            <a:endParaRPr lang="en-US" sz="2000" dirty="0"/>
           </a:p>
         </p:txBody>
       </p:sp>
       <p:sp>
         <p:nvSpPr>
           <p:cNvPr id="5" name="Text 3"/>
-          <p:cNvSpPr txBox="1"/>
-          <p:nvPr/>
-        </p:nvSpPr>
-        <p:spPr>
-          <a:xfrm>
-            <a:off x="594360" y="3703320"/>
-            <a:ext cx="10972800" cy="365760"/>
-          </a:xfrm>
-          <a:prstGeom prst="rect">
-            <a:avLst/>
-          </a:prstGeom>
-          <a:noFill/>
-          <a:ln/>
-        </p:spPr>
-        <p:txBody>
-          <a:bodyPr wrap="square" lIns="0" tIns="0" rIns="0" bIns="0" rtlCol="0" anchor="ctr"/>
-          <a:lstStyle/>
-          <a:p>
-            <a:pPr indent="0" marL="0">
-              <a:buNone/>
-            </a:pPr>
-            <a:r>
-              <a:rPr lang="en-US" sz="1500" dirty="0">
-                <a:solidFill>
-                  <a:srgbClr val="8FA3AB"/>
-                </a:solidFill>
-                <a:latin typeface="Calibri" pitchFamily="34" charset="0"/>
-                <a:ea typeface="Calibri" pitchFamily="34" charset="-122"/>
-                <a:cs typeface="Calibri" pitchFamily="34" charset="-120"/>
-              </a:rPr>
-              <a:t>Trabajo Práctico Final · Parte 1 · Modelo de negocio actual</a:t>
-            </a:r>
-            <a:endParaRPr lang="en-US" sz="1500" dirty="0"/>
-          </a:p>
-        </p:txBody>
-      </p:sp>
-      <p:sp>
-        <p:nvSpPr>
-          <p:cNvPr id="6" name="Text 4"/>
           <p:cNvSpPr txBox="1"/>
           <p:nvPr/>
         </p:nvSpPr>
@@ -1776,7 +1648,7 @@
                 <a:ea typeface="Calibri" pitchFamily="34" charset="-122"/>
                 <a:cs typeface="Calibri" pitchFamily="34" charset="-120"/>
               </a:rPr>
-              <a:t>Lepez Joaquín · Geyer Juan José · Lopez Juan · Sorato Emiliano</a:t>
+              <a:t>Lepez Joaquín · Geyer Juan José · Lopez Juan · Sorato Emiliano · Olivares Manuel</a:t>
             </a:r>
             <a:endParaRPr lang="en-US" sz="1400" dirty="0"/>
           </a:p>
@@ -1900,8 +1772,8 @@
         </p:nvSpPr>
         <p:spPr>
           <a:xfrm>
-            <a:off x="594360" y="1645920"/>
-            <a:ext cx="3352800" cy="731520"/>
+            <a:off x="594360" y="2011680"/>
+            <a:ext cx="2400300" cy="822960"/>
           </a:xfrm>
           <a:prstGeom prst="rect">
             <a:avLst/>
@@ -1917,7 +1789,7 @@
               <a:buNone/>
             </a:pPr>
             <a:r>
-              <a:rPr lang="en-US" sz="4600" b="1" dirty="0">
+              <a:rPr lang="en-US" sz="5400" b="1" dirty="0">
                 <a:solidFill>
                   <a:srgbClr val="C8791E"/>
                 </a:solidFill>
@@ -1927,7 +1799,7 @@
               </a:rPr>
               <a:t>1973</a:t>
             </a:r>
-            <a:endParaRPr lang="en-US" sz="4600" dirty="0"/>
+            <a:endParaRPr lang="en-US" sz="5400" dirty="0"/>
           </a:p>
         </p:txBody>
       </p:sp>
@@ -1939,8 +1811,8 @@
         </p:nvSpPr>
         <p:spPr>
           <a:xfrm>
-            <a:off x="594360" y="2404872"/>
-            <a:ext cx="3352800" cy="502920"/>
+            <a:off x="594360" y="2880360"/>
+            <a:ext cx="2400300" cy="548640"/>
           </a:xfrm>
           <a:prstGeom prst="rect">
             <a:avLst/>
@@ -1956,7 +1828,7 @@
               <a:buNone/>
             </a:pPr>
             <a:r>
-              <a:rPr lang="en-US" sz="1300" dirty="0">
+              <a:rPr lang="en-US" sz="1400" dirty="0">
                 <a:solidFill>
                   <a:srgbClr val="55636B"/>
                 </a:solidFill>
@@ -1966,7 +1838,7 @@
               </a:rPr>
               <a:t>53 años fabricando snacks</a:t>
             </a:r>
-            <a:endParaRPr lang="en-US" sz="1300" dirty="0"/>
+            <a:endParaRPr lang="en-US" sz="1400" dirty="0"/>
           </a:p>
         </p:txBody>
       </p:sp>
@@ -1978,8 +1850,8 @@
         </p:nvSpPr>
         <p:spPr>
           <a:xfrm>
-            <a:off x="4404360" y="1645920"/>
-            <a:ext cx="3352800" cy="731520"/>
+            <a:off x="3451860" y="2011680"/>
+            <a:ext cx="2400300" cy="822960"/>
           </a:xfrm>
           <a:prstGeom prst="rect">
             <a:avLst/>
@@ -1995,7 +1867,7 @@
               <a:buNone/>
             </a:pPr>
             <a:r>
-              <a:rPr lang="en-US" sz="4600" b="1" dirty="0">
+              <a:rPr lang="en-US" sz="5400" b="1" dirty="0">
                 <a:solidFill>
                   <a:srgbClr val="C8791E"/>
                 </a:solidFill>
@@ -2005,7 +1877,7 @@
               </a:rPr>
               <a:t>15-20</a:t>
             </a:r>
-            <a:endParaRPr lang="en-US" sz="4600" dirty="0"/>
+            <a:endParaRPr lang="en-US" sz="5400" dirty="0"/>
           </a:p>
         </p:txBody>
       </p:sp>
@@ -2017,8 +1889,8 @@
         </p:nvSpPr>
         <p:spPr>
           <a:xfrm>
-            <a:off x="4404360" y="2404872"/>
-            <a:ext cx="3352800" cy="502920"/>
+            <a:off x="3451860" y="2880360"/>
+            <a:ext cx="2400300" cy="548640"/>
           </a:xfrm>
           <a:prstGeom prst="rect">
             <a:avLst/>
@@ -2034,7 +1906,7 @@
               <a:buNone/>
             </a:pPr>
             <a:r>
-              <a:rPr lang="en-US" sz="1300" dirty="0">
+              <a:rPr lang="en-US" sz="1400" dirty="0">
                 <a:solidFill>
                   <a:srgbClr val="55636B"/>
                 </a:solidFill>
@@ -2044,7 +1916,7 @@
               </a:rPr>
               <a:t>personas, empresa familiar</a:t>
             </a:r>
-            <a:endParaRPr lang="en-US" sz="1300" dirty="0"/>
+            <a:endParaRPr lang="en-US" sz="1400" dirty="0"/>
           </a:p>
         </p:txBody>
       </p:sp>
@@ -2056,8 +1928,8 @@
         </p:nvSpPr>
         <p:spPr>
           <a:xfrm>
-            <a:off x="8214360" y="1645920"/>
-            <a:ext cx="3352800" cy="731520"/>
+            <a:off x="6309360" y="2011680"/>
+            <a:ext cx="2400300" cy="822960"/>
           </a:xfrm>
           <a:prstGeom prst="rect">
             <a:avLst/>
@@ -2073,17 +1945,17 @@
               <a:buNone/>
             </a:pPr>
             <a:r>
-              <a:rPr lang="en-US" sz="4600" b="1" dirty="0">
-                <a:solidFill>
-                  <a:srgbClr val="C8791E"/>
+              <a:rPr lang="en-US" sz="5400" b="1" dirty="0">
+                <a:solidFill>
+                  <a:srgbClr val="1B2B34"/>
                 </a:solidFill>
                 <a:latin typeface="Arial" pitchFamily="34" charset="0"/>
                 <a:ea typeface="Arial" pitchFamily="34" charset="-122"/>
                 <a:cs typeface="Arial" pitchFamily="34" charset="-120"/>
               </a:rPr>
-              <a:t>1</a:t>
-            </a:r>
-            <a:endParaRPr lang="en-US" sz="4600" dirty="0"/>
+              <a:t>3</a:t>
+            </a:r>
+            <a:endParaRPr lang="en-US" sz="5400" dirty="0"/>
           </a:p>
         </p:txBody>
       </p:sp>
@@ -2095,8 +1967,8 @@
         </p:nvSpPr>
         <p:spPr>
           <a:xfrm>
-            <a:off x="8214360" y="2404872"/>
-            <a:ext cx="3352800" cy="502920"/>
+            <a:off x="6309360" y="2880360"/>
+            <a:ext cx="2400300" cy="548640"/>
           </a:xfrm>
           <a:prstGeom prst="rect">
             <a:avLst/>
@@ -2112,7 +1984,7 @@
               <a:buNone/>
             </a:pPr>
             <a:r>
-              <a:rPr lang="en-US" sz="1300" dirty="0">
+              <a:rPr lang="en-US" sz="1400" dirty="0">
                 <a:solidFill>
                   <a:srgbClr val="55636B"/>
                 </a:solidFill>
@@ -2120,9 +1992,9 @@
                 <a:ea typeface="Calibri" pitchFamily="34" charset="-122"/>
                 <a:cs typeface="Calibri" pitchFamily="34" charset="-120"/>
               </a:rPr>
-              <a:t>predio: fábrica, depósito y oficina</a:t>
-            </a:r>
-            <a:endParaRPr lang="en-US" sz="1300" dirty="0"/>
+              <a:t>líneas: salados, dulces, repostería</a:t>
+            </a:r>
+            <a:endParaRPr lang="en-US" sz="1400" dirty="0"/>
           </a:p>
         </p:txBody>
       </p:sp>
@@ -2134,8 +2006,8 @@
         </p:nvSpPr>
         <p:spPr>
           <a:xfrm>
-            <a:off x="594360" y="3200400"/>
-            <a:ext cx="3352800" cy="731520"/>
+            <a:off x="9166860" y="2011680"/>
+            <a:ext cx="2400300" cy="822960"/>
           </a:xfrm>
           <a:prstGeom prst="rect">
             <a:avLst/>
@@ -2151,7 +2023,7 @@
               <a:buNone/>
             </a:pPr>
             <a:r>
-              <a:rPr lang="en-US" sz="4600" b="1" dirty="0">
+              <a:rPr lang="en-US" sz="5400" b="1" dirty="0">
                 <a:solidFill>
                   <a:srgbClr val="1B2B34"/>
                 </a:solidFill>
@@ -2159,9 +2031,9 @@
                 <a:ea typeface="Arial" pitchFamily="34" charset="-122"/>
                 <a:cs typeface="Arial" pitchFamily="34" charset="-120"/>
               </a:rPr>
-              <a:t>3</a:t>
-            </a:r>
-            <a:endParaRPr lang="en-US" sz="4600" dirty="0"/>
+              <a:t>+50</a:t>
+            </a:r>
+            <a:endParaRPr lang="en-US" sz="5400" dirty="0"/>
           </a:p>
         </p:txBody>
       </p:sp>
@@ -2173,8 +2045,8 @@
         </p:nvSpPr>
         <p:spPr>
           <a:xfrm>
-            <a:off x="594360" y="3959352"/>
-            <a:ext cx="3352800" cy="502920"/>
+            <a:off x="9166860" y="2880360"/>
+            <a:ext cx="2400300" cy="548640"/>
           </a:xfrm>
           <a:prstGeom prst="rect">
             <a:avLst/>
@@ -2190,7 +2062,7 @@
               <a:buNone/>
             </a:pPr>
             <a:r>
-              <a:rPr lang="en-US" sz="1300" dirty="0">
+              <a:rPr lang="en-US" sz="1400" dirty="0">
                 <a:solidFill>
                   <a:srgbClr val="55636B"/>
                 </a:solidFill>
@@ -2198,182 +2070,26 @@
                 <a:ea typeface="Calibri" pitchFamily="34" charset="-122"/>
                 <a:cs typeface="Calibri" pitchFamily="34" charset="-120"/>
               </a:rPr>
-              <a:t>líneas: salados, dulces, repostería</a:t>
-            </a:r>
-            <a:endParaRPr lang="en-US" sz="1300" dirty="0"/>
-          </a:p>
-        </p:txBody>
-      </p:sp>
-      <p:sp>
-        <p:nvSpPr>
-          <p:cNvPr id="12" name="Text 10"/>
-          <p:cNvSpPr txBox="1"/>
-          <p:nvPr/>
-        </p:nvSpPr>
-        <p:spPr>
-          <a:xfrm>
-            <a:off x="4404360" y="3200400"/>
-            <a:ext cx="3352800" cy="731520"/>
-          </a:xfrm>
-          <a:prstGeom prst="rect">
-            <a:avLst/>
-          </a:prstGeom>
-          <a:noFill/>
-          <a:ln/>
-        </p:spPr>
-        <p:txBody>
-          <a:bodyPr wrap="square" lIns="0" tIns="0" rIns="0" bIns="0" rtlCol="0" anchor="b"/>
-          <a:lstStyle/>
-          <a:p>
-            <a:pPr indent="0" marL="0">
-              <a:buNone/>
-            </a:pPr>
-            <a:r>
-              <a:rPr lang="en-US" sz="4600" b="1" dirty="0">
-                <a:solidFill>
-                  <a:srgbClr val="1B2B34"/>
-                </a:solidFill>
-                <a:latin typeface="Arial" pitchFamily="34" charset="0"/>
-                <a:ea typeface="Arial" pitchFamily="34" charset="-122"/>
-                <a:cs typeface="Arial" pitchFamily="34" charset="-120"/>
-              </a:rPr>
-              <a:t>+25</a:t>
-            </a:r>
-            <a:endParaRPr lang="en-US" sz="4600" dirty="0"/>
-          </a:p>
-        </p:txBody>
-      </p:sp>
-      <p:sp>
-        <p:nvSpPr>
-          <p:cNvPr id="13" name="Text 11"/>
-          <p:cNvSpPr txBox="1"/>
-          <p:nvPr/>
-        </p:nvSpPr>
-        <p:spPr>
-          <a:xfrm>
-            <a:off x="4404360" y="3959352"/>
-            <a:ext cx="3352800" cy="502920"/>
-          </a:xfrm>
-          <a:prstGeom prst="rect">
-            <a:avLst/>
-          </a:prstGeom>
-          <a:noFill/>
-          <a:ln/>
-        </p:spPr>
-        <p:txBody>
-          <a:bodyPr wrap="square" lIns="0" tIns="0" rIns="0" bIns="0" rtlCol="0" anchor="t"/>
-          <a:lstStyle/>
-          <a:p>
-            <a:pPr indent="0" marL="0">
-              <a:buNone/>
-            </a:pPr>
-            <a:r>
-              <a:rPr lang="en-US" sz="1300" dirty="0">
-                <a:solidFill>
-                  <a:srgbClr val="55636B"/>
-                </a:solidFill>
-                <a:latin typeface="Calibri" pitchFamily="34" charset="0"/>
-                <a:ea typeface="Calibri" pitchFamily="34" charset="-122"/>
-                <a:cs typeface="Calibri" pitchFamily="34" charset="-120"/>
-              </a:rPr>
-              <a:t>presentaciones, de 20 g a 2 Kg</a:t>
-            </a:r>
-            <a:endParaRPr lang="en-US" sz="1300" dirty="0"/>
-          </a:p>
-        </p:txBody>
-      </p:sp>
-      <p:sp>
-        <p:nvSpPr>
-          <p:cNvPr id="14" name="Text 12"/>
-          <p:cNvSpPr txBox="1"/>
-          <p:nvPr/>
-        </p:nvSpPr>
-        <p:spPr>
-          <a:xfrm>
-            <a:off x="8214360" y="3200400"/>
-            <a:ext cx="3352800" cy="731520"/>
-          </a:xfrm>
-          <a:prstGeom prst="rect">
-            <a:avLst/>
-          </a:prstGeom>
-          <a:noFill/>
-          <a:ln/>
-        </p:spPr>
-        <p:txBody>
-          <a:bodyPr wrap="square" lIns="0" tIns="0" rIns="0" bIns="0" rtlCol="0" anchor="b"/>
-          <a:lstStyle/>
-          <a:p>
-            <a:pPr indent="0" marL="0">
-              <a:buNone/>
-            </a:pPr>
-            <a:r>
-              <a:rPr lang="en-US" sz="4600" b="1" dirty="0">
-                <a:solidFill>
-                  <a:srgbClr val="1B2B34"/>
-                </a:solidFill>
-                <a:latin typeface="Arial" pitchFamily="34" charset="0"/>
-                <a:ea typeface="Arial" pitchFamily="34" charset="-122"/>
-                <a:cs typeface="Arial" pitchFamily="34" charset="-120"/>
-              </a:rPr>
-              <a:t>RNE</a:t>
-            </a:r>
-            <a:endParaRPr lang="en-US" sz="4600" dirty="0"/>
-          </a:p>
-        </p:txBody>
-      </p:sp>
-      <p:sp>
-        <p:nvSpPr>
-          <p:cNvPr id="15" name="Text 13"/>
-          <p:cNvSpPr txBox="1"/>
-          <p:nvPr/>
-        </p:nvSpPr>
-        <p:spPr>
-          <a:xfrm>
-            <a:off x="8214360" y="3959352"/>
-            <a:ext cx="3352800" cy="502920"/>
-          </a:xfrm>
-          <a:prstGeom prst="rect">
-            <a:avLst/>
-          </a:prstGeom>
-          <a:noFill/>
-          <a:ln/>
-        </p:spPr>
-        <p:txBody>
-          <a:bodyPr wrap="square" lIns="0" tIns="0" rIns="0" bIns="0" rtlCol="0" anchor="t"/>
-          <a:lstStyle/>
-          <a:p>
-            <a:pPr indent="0" marL="0">
-              <a:buNone/>
-            </a:pPr>
-            <a:r>
-              <a:rPr lang="en-US" sz="1300" dirty="0">
-                <a:solidFill>
-                  <a:srgbClr val="55636B"/>
-                </a:solidFill>
-                <a:latin typeface="Calibri" pitchFamily="34" charset="0"/>
-                <a:ea typeface="Calibri" pitchFamily="34" charset="-122"/>
-                <a:cs typeface="Calibri" pitchFamily="34" charset="-120"/>
-              </a:rPr>
-              <a:t>y RNPA: barrera frente a informales</a:t>
-            </a:r>
-            <a:endParaRPr lang="en-US" sz="1300" dirty="0"/>
-          </a:p>
-        </p:txBody>
-      </p:sp>
-      <p:sp>
-        <p:nvSpPr>
-          <p:cNvPr id="16" name="Shape 14"/>
+              <a:t>tipos de productos</a:t>
+            </a:r>
+            <a:endParaRPr lang="en-US" sz="1400" dirty="0"/>
+          </a:p>
+        </p:txBody>
+      </p:sp>
+      <p:sp>
+        <p:nvSpPr>
+          <p:cNvPr id="12" name="Shape 10"/>
           <p:cNvSpPr/>
           <p:nvPr/>
         </p:nvSpPr>
         <p:spPr>
           <a:xfrm>
-            <a:off x="594360" y="4754880"/>
-            <a:ext cx="10972800" cy="1234440"/>
+            <a:off x="594360" y="4480560"/>
+            <a:ext cx="10972800" cy="1097280"/>
           </a:xfrm>
           <a:prstGeom prst="roundRect">
             <a:avLst>
-              <a:gd name="adj" fmla="val 5926"/>
+              <a:gd name="adj" fmla="val 6667"/>
             </a:avLst>
           </a:prstGeom>
           <a:solidFill>
@@ -2384,14 +2100,14 @@
       </p:sp>
       <p:sp>
         <p:nvSpPr>
-          <p:cNvPr id="17" name="Text 15"/>
-          <p:cNvSpPr txBox="1"/>
-          <p:nvPr/>
-        </p:nvSpPr>
-        <p:spPr>
-          <a:xfrm>
-            <a:off x="850392" y="4992624"/>
-            <a:ext cx="10460736" cy="813816"/>
+          <p:cNvPr id="13" name="Text 11"/>
+          <p:cNvSpPr txBox="1"/>
+          <p:nvPr/>
+        </p:nvSpPr>
+        <p:spPr>
+          <a:xfrm>
+            <a:off x="850392" y="4718304"/>
+            <a:ext cx="10460736" cy="676656"/>
           </a:xfrm>
           <a:prstGeom prst="rect">
             <a:avLst/>
@@ -2407,7 +2123,7 @@
               <a:buNone/>
             </a:pPr>
             <a:r>
-              <a:rPr lang="en-US" sz="1600" dirty="0">
+              <a:rPr lang="en-US" sz="1700" dirty="0">
                 <a:solidFill>
                   <a:srgbClr val="1B2B34"/>
                 </a:solidFill>
@@ -2415,15 +2131,15 @@
                 <a:ea typeface="Calibri" pitchFamily="34" charset="-122"/>
                 <a:cs typeface="Calibri" pitchFamily="34" charset="-120"/>
               </a:rPr>
-              <a:t>Fabrica sus líneas propias y además fracciona y envasa producto de terceros con su marca. Ese fraccionamiento es una línea de negocio declarada, no un agregado: le permite ofrecer un portafolio amplio sin agrandar la planta.</a:t>
-            </a:r>
-            <a:endParaRPr lang="en-US" sz="1600" dirty="0"/>
-          </a:p>
-        </p:txBody>
-      </p:sp>
-      <p:sp>
-        <p:nvSpPr>
-          <p:cNvPr id="18" name="Text 16"/>
+              <a:t>Fabrica sus líneas propias y además fracciona y envasa producto de terceros con su marca.</a:t>
+            </a:r>
+            <a:endParaRPr lang="en-US" sz="1700" dirty="0"/>
+          </a:p>
+        </p:txBody>
+      </p:sp>
+      <p:sp>
+        <p:nvSpPr>
+          <p:cNvPr id="14" name="Text 12"/>
           <p:cNvSpPr txBox="1"/>
           <p:nvPr/>
         </p:nvSpPr>
@@ -2525,7 +2241,7 @@
                 <a:ea typeface="Arial" pitchFamily="34" charset="-122"/>
                 <a:cs typeface="Arial" pitchFamily="34" charset="-120"/>
               </a:rPr>
-              <a:t>LE VENDE AL CANAL</a:t>
+              <a:t>LE VENDE AL DISTRIBUIDOR</a:t>
             </a:r>
             <a:endParaRPr lang="en-US" sz="3400" dirty="0"/>
           </a:p>
@@ -2564,7 +2280,7 @@
                 <a:ea typeface="Calibri" pitchFamily="34" charset="-122"/>
                 <a:cs typeface="Calibri" pitchFamily="34" charset="-120"/>
               </a:rPr>
-              <a:t>Nunca al consumidor final: el dato que ordena todo el análisis</a:t>
+              <a:t>Nunca al consumidor final</a:t>
             </a:r>
             <a:endParaRPr lang="en-US" sz="1500" dirty="0"/>
           </a:p>
@@ -2672,46 +2388,7 @@
       </p:sp>
       <p:sp>
         <p:nvSpPr>
-          <p:cNvPr id="7" name="Text 5"/>
-          <p:cNvSpPr txBox="1"/>
-          <p:nvPr/>
-        </p:nvSpPr>
-        <p:spPr>
-          <a:xfrm>
-            <a:off x="914400" y="3822192"/>
-            <a:ext cx="2773680" cy="640080"/>
-          </a:xfrm>
-          <a:prstGeom prst="rect">
-            <a:avLst/>
-          </a:prstGeom>
-          <a:noFill/>
-          <a:ln/>
-        </p:spPr>
-        <p:txBody>
-          <a:bodyPr wrap="square" lIns="0" tIns="0" rIns="0" bIns="0" rtlCol="0" anchor="t"/>
-          <a:lstStyle/>
-          <a:p>
-            <a:pPr indent="0" marL="0">
-              <a:buNone/>
-            </a:pPr>
-            <a:r>
-              <a:rPr lang="en-US" sz="1400" dirty="0">
-                <a:solidFill>
-                  <a:srgbClr val="C3D0D4"/>
-                </a:solidFill>
-                <a:latin typeface="Calibri" pitchFamily="34" charset="0"/>
-                <a:ea typeface="Calibri" pitchFamily="34" charset="-122"/>
-                <a:cs typeface="Calibri" pitchFamily="34" charset="-120"/>
-              </a:rPr>
-              <a:t>Exclusividad territorial en 7 provincias</a:t>
-            </a:r>
-            <a:endParaRPr lang="en-US" sz="1400" dirty="0"/>
-          </a:p>
-        </p:txBody>
-      </p:sp>
-      <p:sp>
-        <p:nvSpPr>
-          <p:cNvPr id="8" name="Shape 6"/>
+          <p:cNvPr id="7" name="Shape 5"/>
           <p:cNvSpPr/>
           <p:nvPr/>
         </p:nvSpPr>
@@ -2733,7 +2410,7 @@
       </p:sp>
       <p:sp>
         <p:nvSpPr>
-          <p:cNvPr id="9" name="Text 7"/>
+          <p:cNvPr id="8" name="Text 6"/>
           <p:cNvSpPr txBox="1"/>
           <p:nvPr/>
         </p:nvSpPr>
@@ -2772,7 +2449,7 @@
       </p:sp>
       <p:sp>
         <p:nvSpPr>
-          <p:cNvPr id="10" name="Text 8"/>
+          <p:cNvPr id="9" name="Text 7"/>
           <p:cNvSpPr txBox="1"/>
           <p:nvPr/>
         </p:nvSpPr>
@@ -2811,7 +2488,7 @@
       </p:sp>
       <p:sp>
         <p:nvSpPr>
-          <p:cNvPr id="11" name="Text 9"/>
+          <p:cNvPr id="10" name="Text 8"/>
           <p:cNvSpPr txBox="1"/>
           <p:nvPr/>
         </p:nvSpPr>
@@ -2850,7 +2527,7 @@
       </p:sp>
       <p:sp>
         <p:nvSpPr>
-          <p:cNvPr id="12" name="Shape 10"/>
+          <p:cNvPr id="11" name="Shape 9"/>
           <p:cNvSpPr/>
           <p:nvPr/>
         </p:nvSpPr>
@@ -2872,7 +2549,7 @@
       </p:sp>
       <p:sp>
         <p:nvSpPr>
-          <p:cNvPr id="13" name="Text 11"/>
+          <p:cNvPr id="12" name="Text 10"/>
           <p:cNvSpPr txBox="1"/>
           <p:nvPr/>
         </p:nvSpPr>
@@ -2911,7 +2588,7 @@
       </p:sp>
       <p:sp>
         <p:nvSpPr>
-          <p:cNvPr id="14" name="Text 12"/>
+          <p:cNvPr id="13" name="Text 11"/>
           <p:cNvSpPr txBox="1"/>
           <p:nvPr/>
         </p:nvSpPr>
@@ -2950,7 +2627,7 @@
       </p:sp>
       <p:sp>
         <p:nvSpPr>
-          <p:cNvPr id="15" name="Text 13"/>
+          <p:cNvPr id="14" name="Text 12"/>
           <p:cNvSpPr txBox="1"/>
           <p:nvPr/>
         </p:nvSpPr>
@@ -2989,7 +2666,7 @@
       </p:sp>
       <p:sp>
         <p:nvSpPr>
-          <p:cNvPr id="16" name="Text 14"/>
+          <p:cNvPr id="15" name="Text 13"/>
           <p:cNvSpPr txBox="1"/>
           <p:nvPr/>
         </p:nvSpPr>
@@ -3012,20 +2689,6 @@
               <a:buNone/>
             </a:pPr>
             <a:r>
-              <a:rPr lang="en-US" sz="1900" b="1" dirty="0">
-                <a:solidFill>
-                  <a:srgbClr val="C8791E"/>
-                </a:solidFill>
-                <a:latin typeface="Calibri" pitchFamily="34" charset="0"/>
-                <a:ea typeface="Calibri" pitchFamily="34" charset="-122"/>
-                <a:cs typeface="Calibri" pitchFamily="34" charset="-120"/>
-              </a:rPr>
-              <a:t>La Patagonia concentra el 61% de la red</a:t>
-            </a:r>
-            <a:pPr indent="0" marL="0">
-              <a:buNone/>
-            </a:pPr>
-            <a:r>
               <a:rPr lang="en-US" sz="1900" dirty="0">
                 <a:solidFill>
                   <a:srgbClr val="F7F4EC"/>
@@ -3034,7 +2697,7 @@
                 <a:ea typeface="Calibri" pitchFamily="34" charset="-122"/>
                 <a:cs typeface="Calibri" pitchFamily="34" charset="-120"/>
               </a:rPr>
-              <a:t>: 35 de 57. Mendoza, la provincia de origen, apenas el 10%.</a:t>
+              <a:t>Mendoza concentra el 35% de la red</a:t>
             </a:r>
             <a:endParaRPr lang="en-US" sz="1900" dirty="0"/>
           </a:p>
@@ -3042,7 +2705,7 @@
       </p:sp>
       <p:sp>
         <p:nvSpPr>
-          <p:cNvPr id="17" name="Text 15"/>
+          <p:cNvPr id="16" name="Text 14"/>
           <p:cNvSpPr txBox="1"/>
           <p:nvPr/>
         </p:nvSpPr>
@@ -3119,7 +2782,7 @@
         </p:nvSpPr>
         <p:spPr>
           <a:xfrm>
-            <a:off x="594360" y="640080"/>
+            <a:off x="594360" y="822960"/>
             <a:ext cx="10972800" cy="822960"/>
           </a:xfrm>
           <a:prstGeom prst="rect">
@@ -3158,7 +2821,7 @@
         </p:nvSpPr>
         <p:spPr>
           <a:xfrm>
-            <a:off x="594360" y="1463040"/>
+            <a:off x="594360" y="1645920"/>
             <a:ext cx="10972800" cy="411480"/>
           </a:xfrm>
           <a:prstGeom prst="rect">
@@ -3197,12 +2860,12 @@
         </p:nvSpPr>
         <p:spPr>
           <a:xfrm>
-            <a:off x="594360" y="2148840"/>
-            <a:ext cx="3413760" cy="2331720"/>
+            <a:off x="594360" y="2468880"/>
+            <a:ext cx="3413760" cy="2194560"/>
           </a:xfrm>
           <a:prstGeom prst="roundRect">
             <a:avLst>
-              <a:gd name="adj" fmla="val 3922"/>
+              <a:gd name="adj" fmla="val 4167"/>
             </a:avLst>
           </a:prstGeom>
           <a:solidFill>
@@ -3219,7 +2882,7 @@
         </p:nvSpPr>
         <p:spPr>
           <a:xfrm>
-            <a:off x="914400" y="2377440"/>
+            <a:off x="914400" y="2697480"/>
             <a:ext cx="548640" cy="548640"/>
           </a:xfrm>
           <a:prstGeom prst="ellipse">
@@ -3239,7 +2902,7 @@
         </p:nvSpPr>
         <p:spPr>
           <a:xfrm>
-            <a:off x="914400" y="2377440"/>
+            <a:off x="914400" y="2697480"/>
             <a:ext cx="548640" cy="548640"/>
           </a:xfrm>
           <a:prstGeom prst="rect">
@@ -3278,8 +2941,8 @@
         </p:nvSpPr>
         <p:spPr>
           <a:xfrm>
-            <a:off x="914400" y="3108960"/>
-            <a:ext cx="2773680" cy="731520"/>
+            <a:off x="914400" y="3474720"/>
+            <a:ext cx="2773680" cy="914400"/>
           </a:xfrm>
           <a:prstGeom prst="rect">
             <a:avLst/>
@@ -3295,7 +2958,7 @@
               <a:buNone/>
             </a:pPr>
             <a:r>
-              <a:rPr lang="en-US" sz="2100" b="1" dirty="0">
+              <a:rPr lang="en-US" sz="2200" b="1" dirty="0">
                 <a:solidFill>
                   <a:srgbClr val="1B2B34"/>
                 </a:solidFill>
@@ -3305,63 +2968,24 @@
               </a:rPr>
               <a:t>FODA</a:t>
             </a:r>
-            <a:endParaRPr lang="en-US" sz="2100" dirty="0"/>
-          </a:p>
-        </p:txBody>
-      </p:sp>
-      <p:sp>
-        <p:nvSpPr>
-          <p:cNvPr id="8" name="Text 6"/>
-          <p:cNvSpPr txBox="1"/>
-          <p:nvPr/>
-        </p:nvSpPr>
-        <p:spPr>
-          <a:xfrm>
-            <a:off x="914400" y="3840480"/>
-            <a:ext cx="2773680" cy="502920"/>
-          </a:xfrm>
-          <a:prstGeom prst="rect">
-            <a:avLst/>
-          </a:prstGeom>
-          <a:noFill/>
-          <a:ln/>
-        </p:spPr>
-        <p:txBody>
-          <a:bodyPr wrap="square" lIns="0" tIns="0" rIns="0" bIns="0" rtlCol="0" anchor="t"/>
-          <a:lstStyle/>
-          <a:p>
-            <a:pPr indent="0" marL="0">
-              <a:buNone/>
-            </a:pPr>
-            <a:r>
-              <a:rPr lang="en-US" sz="1400" dirty="0">
-                <a:solidFill>
-                  <a:srgbClr val="55636B"/>
-                </a:solidFill>
-                <a:latin typeface="Calibri" pitchFamily="34" charset="0"/>
-                <a:ea typeface="Calibri" pitchFamily="34" charset="-122"/>
-                <a:cs typeface="Calibri" pitchFamily="34" charset="-120"/>
-              </a:rPr>
-              <a:t>Ordena lo interno contra lo externo</a:t>
-            </a:r>
-            <a:endParaRPr lang="en-US" sz="1400" dirty="0"/>
-          </a:p>
-        </p:txBody>
-      </p:sp>
-      <p:sp>
-        <p:nvSpPr>
-          <p:cNvPr id="9" name="Shape 7"/>
+            <a:endParaRPr lang="en-US" sz="2200" dirty="0"/>
+          </a:p>
+        </p:txBody>
+      </p:sp>
+      <p:sp>
+        <p:nvSpPr>
+          <p:cNvPr id="8" name="Shape 6"/>
           <p:cNvSpPr/>
           <p:nvPr/>
         </p:nvSpPr>
         <p:spPr>
           <a:xfrm>
-            <a:off x="4373880" y="2148840"/>
-            <a:ext cx="3413760" cy="2331720"/>
+            <a:off x="4373880" y="2468880"/>
+            <a:ext cx="3413760" cy="2194560"/>
           </a:xfrm>
           <a:prstGeom prst="roundRect">
             <a:avLst>
-              <a:gd name="adj" fmla="val 3922"/>
+              <a:gd name="adj" fmla="val 4167"/>
             </a:avLst>
           </a:prstGeom>
           <a:solidFill>
@@ -3372,13 +2996,13 @@
       </p:sp>
       <p:sp>
         <p:nvSpPr>
-          <p:cNvPr id="10" name="Shape 8"/>
+          <p:cNvPr id="9" name="Shape 7"/>
           <p:cNvSpPr/>
           <p:nvPr/>
         </p:nvSpPr>
         <p:spPr>
           <a:xfrm>
-            <a:off x="4693920" y="2377440"/>
+            <a:off x="4693920" y="2697480"/>
             <a:ext cx="548640" cy="548640"/>
           </a:xfrm>
           <a:prstGeom prst="ellipse">
@@ -3392,13 +3016,13 @@
       </p:sp>
       <p:sp>
         <p:nvSpPr>
-          <p:cNvPr id="11" name="Text 9"/>
-          <p:cNvSpPr txBox="1"/>
-          <p:nvPr/>
-        </p:nvSpPr>
-        <p:spPr>
-          <a:xfrm>
-            <a:off x="4693920" y="2377440"/>
+          <p:cNvPr id="10" name="Text 8"/>
+          <p:cNvSpPr txBox="1"/>
+          <p:nvPr/>
+        </p:nvSpPr>
+        <p:spPr>
+          <a:xfrm>
+            <a:off x="4693920" y="2697480"/>
             <a:ext cx="548640" cy="548640"/>
           </a:xfrm>
           <a:prstGeom prst="rect">
@@ -3431,14 +3055,14 @@
       </p:sp>
       <p:sp>
         <p:nvSpPr>
-          <p:cNvPr id="12" name="Text 10"/>
-          <p:cNvSpPr txBox="1"/>
-          <p:nvPr/>
-        </p:nvSpPr>
-        <p:spPr>
-          <a:xfrm>
-            <a:off x="4693920" y="3108960"/>
-            <a:ext cx="2773680" cy="731520"/>
+          <p:cNvPr id="11" name="Text 9"/>
+          <p:cNvSpPr txBox="1"/>
+          <p:nvPr/>
+        </p:nvSpPr>
+        <p:spPr>
+          <a:xfrm>
+            <a:off x="4693920" y="3474720"/>
+            <a:ext cx="2773680" cy="914400"/>
           </a:xfrm>
           <a:prstGeom prst="rect">
             <a:avLst/>
@@ -3454,7 +3078,7 @@
               <a:buNone/>
             </a:pPr>
             <a:r>
-              <a:rPr lang="en-US" sz="2100" b="1" dirty="0">
+              <a:rPr lang="en-US" sz="2200" b="1" dirty="0">
                 <a:solidFill>
                   <a:srgbClr val="1B2B34"/>
                 </a:solidFill>
@@ -3464,63 +3088,24 @@
               </a:rPr>
               <a:t>BUSINESS MODEL CANVAS</a:t>
             </a:r>
-            <a:endParaRPr lang="en-US" sz="2100" dirty="0"/>
-          </a:p>
-        </p:txBody>
-      </p:sp>
-      <p:sp>
-        <p:nvSpPr>
-          <p:cNvPr id="13" name="Text 11"/>
-          <p:cNvSpPr txBox="1"/>
-          <p:nvPr/>
-        </p:nvSpPr>
-        <p:spPr>
-          <a:xfrm>
-            <a:off x="4693920" y="3840480"/>
-            <a:ext cx="2773680" cy="502920"/>
-          </a:xfrm>
-          <a:prstGeom prst="rect">
-            <a:avLst/>
-          </a:prstGeom>
-          <a:noFill/>
-          <a:ln/>
-        </p:spPr>
-        <p:txBody>
-          <a:bodyPr wrap="square" lIns="0" tIns="0" rIns="0" bIns="0" rtlCol="0" anchor="t"/>
-          <a:lstStyle/>
-          <a:p>
-            <a:pPr indent="0" marL="0">
-              <a:buNone/>
-            </a:pPr>
-            <a:r>
-              <a:rPr lang="en-US" sz="1400" dirty="0">
-                <a:solidFill>
-                  <a:srgbClr val="55636B"/>
-                </a:solidFill>
-                <a:latin typeface="Calibri" pitchFamily="34" charset="0"/>
-                <a:ea typeface="Calibri" pitchFamily="34" charset="-122"/>
-                <a:cs typeface="Calibri" pitchFamily="34" charset="-120"/>
-              </a:rPr>
-              <a:t>Muestra cómo gana plata hoy</a:t>
-            </a:r>
-            <a:endParaRPr lang="en-US" sz="1400" dirty="0"/>
-          </a:p>
-        </p:txBody>
-      </p:sp>
-      <p:sp>
-        <p:nvSpPr>
-          <p:cNvPr id="14" name="Shape 12"/>
+            <a:endParaRPr lang="en-US" sz="2200" dirty="0"/>
+          </a:p>
+        </p:txBody>
+      </p:sp>
+      <p:sp>
+        <p:nvSpPr>
+          <p:cNvPr id="12" name="Shape 10"/>
           <p:cNvSpPr/>
           <p:nvPr/>
         </p:nvSpPr>
         <p:spPr>
           <a:xfrm>
-            <a:off x="8153400" y="2148840"/>
-            <a:ext cx="3413760" cy="2331720"/>
+            <a:off x="8153400" y="2468880"/>
+            <a:ext cx="3413760" cy="2194560"/>
           </a:xfrm>
           <a:prstGeom prst="roundRect">
             <a:avLst>
-              <a:gd name="adj" fmla="val 3922"/>
+              <a:gd name="adj" fmla="val 4167"/>
             </a:avLst>
           </a:prstGeom>
           <a:solidFill>
@@ -3531,13 +3116,13 @@
       </p:sp>
       <p:sp>
         <p:nvSpPr>
-          <p:cNvPr id="15" name="Shape 13"/>
+          <p:cNvPr id="13" name="Shape 11"/>
           <p:cNvSpPr/>
           <p:nvPr/>
         </p:nvSpPr>
         <p:spPr>
           <a:xfrm>
-            <a:off x="8473440" y="2377440"/>
+            <a:off x="8473440" y="2697480"/>
             <a:ext cx="548640" cy="548640"/>
           </a:xfrm>
           <a:prstGeom prst="ellipse">
@@ -3551,13 +3136,13 @@
       </p:sp>
       <p:sp>
         <p:nvSpPr>
-          <p:cNvPr id="16" name="Text 14"/>
-          <p:cNvSpPr txBox="1"/>
-          <p:nvPr/>
-        </p:nvSpPr>
-        <p:spPr>
-          <a:xfrm>
-            <a:off x="8473440" y="2377440"/>
+          <p:cNvPr id="14" name="Text 12"/>
+          <p:cNvSpPr txBox="1"/>
+          <p:nvPr/>
+        </p:nvSpPr>
+        <p:spPr>
+          <a:xfrm>
+            <a:off x="8473440" y="2697480"/>
             <a:ext cx="548640" cy="548640"/>
           </a:xfrm>
           <a:prstGeom prst="rect">
@@ -3590,14 +3175,14 @@
       </p:sp>
       <p:sp>
         <p:nvSpPr>
-          <p:cNvPr id="17" name="Text 15"/>
-          <p:cNvSpPr txBox="1"/>
-          <p:nvPr/>
-        </p:nvSpPr>
-        <p:spPr>
-          <a:xfrm>
-            <a:off x="8473440" y="3108960"/>
-            <a:ext cx="2773680" cy="731520"/>
+          <p:cNvPr id="15" name="Text 13"/>
+          <p:cNvSpPr txBox="1"/>
+          <p:nvPr/>
+        </p:nvSpPr>
+        <p:spPr>
+          <a:xfrm>
+            <a:off x="8473440" y="3474720"/>
+            <a:ext cx="2773680" cy="914400"/>
           </a:xfrm>
           <a:prstGeom prst="rect">
             <a:avLst/>
@@ -3613,7 +3198,7 @@
               <a:buNone/>
             </a:pPr>
             <a:r>
-              <a:rPr lang="en-US" sz="2100" b="1" dirty="0">
+              <a:rPr lang="en-US" sz="2200" b="1" dirty="0">
                 <a:solidFill>
                   <a:srgbClr val="1B2B34"/>
                 </a:solidFill>
@@ -3623,85 +3208,7 @@
               </a:rPr>
               <a:t>MADUREZ DIGITAL</a:t>
             </a:r>
-            <a:endParaRPr lang="en-US" sz="2100" dirty="0"/>
-          </a:p>
-        </p:txBody>
-      </p:sp>
-      <p:sp>
-        <p:nvSpPr>
-          <p:cNvPr id="18" name="Text 16"/>
-          <p:cNvSpPr txBox="1"/>
-          <p:nvPr/>
-        </p:nvSpPr>
-        <p:spPr>
-          <a:xfrm>
-            <a:off x="8473440" y="3840480"/>
-            <a:ext cx="2773680" cy="502920"/>
-          </a:xfrm>
-          <a:prstGeom prst="rect">
-            <a:avLst/>
-          </a:prstGeom>
-          <a:noFill/>
-          <a:ln/>
-        </p:spPr>
-        <p:txBody>
-          <a:bodyPr wrap="square" lIns="0" tIns="0" rIns="0" bIns="0" rtlCol="0" anchor="t"/>
-          <a:lstStyle/>
-          <a:p>
-            <a:pPr indent="0" marL="0">
-              <a:buNone/>
-            </a:pPr>
-            <a:r>
-              <a:rPr lang="en-US" sz="1400" dirty="0">
-                <a:solidFill>
-                  <a:srgbClr val="55636B"/>
-                </a:solidFill>
-                <a:latin typeface="Calibri" pitchFamily="34" charset="0"/>
-                <a:ea typeface="Calibri" pitchFamily="34" charset="-122"/>
-                <a:cs typeface="Calibri" pitchFamily="34" charset="-120"/>
-              </a:rPr>
-              <a:t>Mide qué tan preparada está para cambiar</a:t>
-            </a:r>
-            <a:endParaRPr lang="en-US" sz="1400" dirty="0"/>
-          </a:p>
-        </p:txBody>
-      </p:sp>
-      <p:sp>
-        <p:nvSpPr>
-          <p:cNvPr id="19" name="Text 17"/>
-          <p:cNvSpPr txBox="1"/>
-          <p:nvPr/>
-        </p:nvSpPr>
-        <p:spPr>
-          <a:xfrm>
-            <a:off x="594360" y="4800600"/>
-            <a:ext cx="10972800" cy="1280160"/>
-          </a:xfrm>
-          <a:prstGeom prst="rect">
-            <a:avLst/>
-          </a:prstGeom>
-          <a:noFill/>
-          <a:ln/>
-        </p:spPr>
-        <p:txBody>
-          <a:bodyPr wrap="square" lIns="0" tIns="0" rIns="0" bIns="0" rtlCol="0" anchor="t"/>
-          <a:lstStyle/>
-          <a:p>
-            <a:pPr indent="0" marL="0">
-              <a:buNone/>
-            </a:pPr>
-            <a:r>
-              <a:rPr lang="en-US" sz="1500" dirty="0">
-                <a:solidFill>
-                  <a:srgbClr val="1B2B34"/>
-                </a:solidFill>
-                <a:latin typeface="Calibri" pitchFamily="34" charset="0"/>
-                <a:ea typeface="Calibri" pitchFamily="34" charset="-122"/>
-                <a:cs typeface="Calibri" pitchFamily="34" charset="-120"/>
-              </a:rPr>
-              <a:t>Qué dejamos afuera y por qué: PESTEL completo y FODA cruzado. El primero devolvía casilleros vacíos para una pyme regional de snacks; el segundo deriva iniciativas, y esta entrega es diagnóstico. Cadena de valor y cinco fuerzas las usamos como insumo del FODA, no como lámina aparte.</a:t>
-            </a:r>
-            <a:endParaRPr lang="en-US" sz="1500" dirty="0"/>
+            <a:endParaRPr lang="en-US" sz="2200" dirty="0"/>
           </a:p>
         </p:txBody>
       </p:sp>
@@ -3905,7 +3412,7 @@
               <a:buChar char="•"/>
             </a:pPr>
             <a:r>
-              <a:rPr lang="en-US" sz="1400" dirty="0">
+              <a:rPr lang="en-US" sz="1500" dirty="0">
                 <a:solidFill>
                   <a:srgbClr val="1B2B34"/>
                 </a:solidFill>
@@ -3915,7 +3422,7 @@
               </a:rPr>
               <a:t>57 distribuidores construidos en 53 años</a:t>
             </a:r>
-            <a:endParaRPr lang="en-US" sz="1400" dirty="0"/>
+            <a:endParaRPr lang="en-US" sz="1500" dirty="0"/>
           </a:p>
           <a:p>
             <a:pPr marL="342900" indent="-342900">
@@ -3926,7 +3433,7 @@
               <a:buChar char="•"/>
             </a:pPr>
             <a:r>
-              <a:rPr lang="en-US" sz="1400" dirty="0">
+              <a:rPr lang="en-US" sz="1500" dirty="0">
                 <a:solidFill>
                   <a:srgbClr val="1B2B34"/>
                 </a:solidFill>
@@ -3936,7 +3443,7 @@
               </a:rPr>
               <a:t>Logística propia más transporte tercerizado</a:t>
             </a:r>
-            <a:endParaRPr lang="en-US" sz="1400" dirty="0"/>
+            <a:endParaRPr lang="en-US" sz="1500" dirty="0"/>
           </a:p>
           <a:p>
             <a:pPr marL="342900" indent="-342900">
@@ -3947,7 +3454,7 @@
               <a:buChar char="•"/>
             </a:pPr>
             <a:r>
-              <a:rPr lang="en-US" sz="1400" dirty="0">
+              <a:rPr lang="en-US" sz="1500" dirty="0">
                 <a:solidFill>
                   <a:srgbClr val="1B2B34"/>
                 </a:solidFill>
@@ -3957,8 +3464,91 @@
               </a:rPr>
               <a:t>Habilitaciones RNE y RNPA vigentes</a:t>
             </a:r>
-            <a:endParaRPr lang="en-US" sz="1400" dirty="0"/>
-          </a:p>
+            <a:endParaRPr lang="en-US" sz="1500" dirty="0"/>
+          </a:p>
+        </p:txBody>
+      </p:sp>
+      <p:sp>
+        <p:nvSpPr>
+          <p:cNvPr id="7" name="Shape 5"/>
+          <p:cNvSpPr/>
+          <p:nvPr/>
+        </p:nvSpPr>
+        <p:spPr>
+          <a:xfrm>
+            <a:off x="6240780" y="1600200"/>
+            <a:ext cx="5326380" cy="2148840"/>
+          </a:xfrm>
+          <a:prstGeom prst="roundRect">
+            <a:avLst>
+              <a:gd name="adj" fmla="val 3404"/>
+            </a:avLst>
+          </a:prstGeom>
+          <a:solidFill>
+            <a:srgbClr val="F3DFD9"/>
+          </a:solidFill>
+          <a:ln/>
+        </p:spPr>
+      </p:sp>
+      <p:sp>
+        <p:nvSpPr>
+          <p:cNvPr id="8" name="Text 6"/>
+          <p:cNvSpPr txBox="1"/>
+          <p:nvPr/>
+        </p:nvSpPr>
+        <p:spPr>
+          <a:xfrm>
+            <a:off x="6496812" y="1837944"/>
+            <a:ext cx="4814316" cy="310896"/>
+          </a:xfrm>
+          <a:prstGeom prst="rect">
+            <a:avLst/>
+          </a:prstGeom>
+          <a:noFill/>
+          <a:ln/>
+        </p:spPr>
+        <p:txBody>
+          <a:bodyPr wrap="square" lIns="0" tIns="0" rIns="0" bIns="0" rtlCol="0" anchor="ctr"/>
+          <a:lstStyle/>
+          <a:p>
+            <a:pPr indent="0" marL="0">
+              <a:buNone/>
+            </a:pPr>
+            <a:r>
+              <a:rPr lang="en-US" sz="1500" b="1" spc="80" kern="0" dirty="0">
+                <a:solidFill>
+                  <a:srgbClr val="A33B22"/>
+                </a:solidFill>
+                <a:latin typeface="Arial" pitchFamily="34" charset="0"/>
+                <a:ea typeface="Arial" pitchFamily="34" charset="-122"/>
+                <a:cs typeface="Arial" pitchFamily="34" charset="-120"/>
+              </a:rPr>
+              <a:t>DEBILIDADES</a:t>
+            </a:r>
+            <a:endParaRPr lang="en-US" sz="1500" dirty="0"/>
+          </a:p>
+        </p:txBody>
+      </p:sp>
+      <p:sp>
+        <p:nvSpPr>
+          <p:cNvPr id="9" name="Text 7"/>
+          <p:cNvSpPr txBox="1"/>
+          <p:nvPr/>
+        </p:nvSpPr>
+        <p:spPr>
+          <a:xfrm>
+            <a:off x="6496812" y="2240280"/>
+            <a:ext cx="4814316" cy="1325880"/>
+          </a:xfrm>
+          <a:prstGeom prst="rect">
+            <a:avLst/>
+          </a:prstGeom>
+          <a:noFill/>
+          <a:ln/>
+        </p:spPr>
+        <p:txBody>
+          <a:bodyPr wrap="square" lIns="0" tIns="0" rIns="0" bIns="0" rtlCol="0" anchor="t"/>
+          <a:lstStyle/>
           <a:p>
             <a:pPr marL="342900" indent="-342900">
               <a:spcAft>
@@ -3968,7 +3558,7 @@
               <a:buChar char="•"/>
             </a:pPr>
             <a:r>
-              <a:rPr lang="en-US" sz="1400" dirty="0">
+              <a:rPr lang="en-US" sz="1500" dirty="0">
                 <a:solidFill>
                   <a:srgbClr val="1B2B34"/>
                 </a:solidFill>
@@ -3976,93 +3566,10 @@
                 <a:ea typeface="Calibri" pitchFamily="34" charset="-122"/>
                 <a:cs typeface="Calibri" pitchFamily="34" charset="-120"/>
               </a:rPr>
-              <a:t>El canal está conforme: el único reclamo es rotura</a:t>
-            </a:r>
-            <a:endParaRPr lang="en-US" sz="1400" dirty="0"/>
-          </a:p>
-        </p:txBody>
-      </p:sp>
-      <p:sp>
-        <p:nvSpPr>
-          <p:cNvPr id="7" name="Shape 5"/>
-          <p:cNvSpPr/>
-          <p:nvPr/>
-        </p:nvSpPr>
-        <p:spPr>
-          <a:xfrm>
-            <a:off x="6240780" y="1600200"/>
-            <a:ext cx="5326380" cy="2148840"/>
-          </a:xfrm>
-          <a:prstGeom prst="roundRect">
-            <a:avLst>
-              <a:gd name="adj" fmla="val 3404"/>
-            </a:avLst>
-          </a:prstGeom>
-          <a:solidFill>
-            <a:srgbClr val="F3DFD9"/>
-          </a:solidFill>
-          <a:ln/>
-        </p:spPr>
-      </p:sp>
-      <p:sp>
-        <p:nvSpPr>
-          <p:cNvPr id="8" name="Text 6"/>
-          <p:cNvSpPr txBox="1"/>
-          <p:nvPr/>
-        </p:nvSpPr>
-        <p:spPr>
-          <a:xfrm>
-            <a:off x="6496812" y="1837944"/>
-            <a:ext cx="4814316" cy="310896"/>
-          </a:xfrm>
-          <a:prstGeom prst="rect">
-            <a:avLst/>
-          </a:prstGeom>
-          <a:noFill/>
-          <a:ln/>
-        </p:spPr>
-        <p:txBody>
-          <a:bodyPr wrap="square" lIns="0" tIns="0" rIns="0" bIns="0" rtlCol="0" anchor="ctr"/>
-          <a:lstStyle/>
-          <a:p>
-            <a:pPr indent="0" marL="0">
-              <a:buNone/>
-            </a:pPr>
-            <a:r>
-              <a:rPr lang="en-US" sz="1500" b="1" spc="80" kern="0" dirty="0">
-                <a:solidFill>
-                  <a:srgbClr val="A33B22"/>
-                </a:solidFill>
-                <a:latin typeface="Arial" pitchFamily="34" charset="0"/>
-                <a:ea typeface="Arial" pitchFamily="34" charset="-122"/>
-                <a:cs typeface="Arial" pitchFamily="34" charset="-120"/>
-              </a:rPr>
-              <a:t>DEBILIDADES</a:t>
+              <a:t>No conocen el costo real por producto</a:t>
             </a:r>
             <a:endParaRPr lang="en-US" sz="1500" dirty="0"/>
           </a:p>
-        </p:txBody>
-      </p:sp>
-      <p:sp>
-        <p:nvSpPr>
-          <p:cNvPr id="9" name="Text 7"/>
-          <p:cNvSpPr txBox="1"/>
-          <p:nvPr/>
-        </p:nvSpPr>
-        <p:spPr>
-          <a:xfrm>
-            <a:off x="6496812" y="2240280"/>
-            <a:ext cx="4814316" cy="1325880"/>
-          </a:xfrm>
-          <a:prstGeom prst="rect">
-            <a:avLst/>
-          </a:prstGeom>
-          <a:noFill/>
-          <a:ln/>
-        </p:spPr>
-        <p:txBody>
-          <a:bodyPr wrap="square" lIns="0" tIns="0" rIns="0" bIns="0" rtlCol="0" anchor="t"/>
-          <a:lstStyle/>
           <a:p>
             <a:pPr marL="342900" indent="-342900">
               <a:spcAft>
@@ -4072,7 +3579,7 @@
               <a:buChar char="•"/>
             </a:pPr>
             <a:r>
-              <a:rPr lang="en-US" sz="1400" dirty="0">
+              <a:rPr lang="en-US" sz="1500" dirty="0">
                 <a:solidFill>
                   <a:srgbClr val="1B2B34"/>
                 </a:solidFill>
@@ -4080,9 +3587,9 @@
                 <a:ea typeface="Calibri" pitchFamily="34" charset="-122"/>
                 <a:cs typeface="Calibri" pitchFamily="34" charset="-120"/>
               </a:rPr>
-              <a:t>No conocen el costo real por producto</a:t>
-            </a:r>
-            <a:endParaRPr lang="en-US" sz="1400" dirty="0"/>
+              <a:t>Planta saturada, tapada con horas extras</a:t>
+            </a:r>
+            <a:endParaRPr lang="en-US" sz="1500" dirty="0"/>
           </a:p>
           <a:p>
             <a:pPr marL="342900" indent="-342900">
@@ -4093,7 +3600,7 @@
               <a:buChar char="•"/>
             </a:pPr>
             <a:r>
-              <a:rPr lang="en-US" sz="1400" dirty="0">
+              <a:rPr lang="en-US" sz="1500" dirty="0">
                 <a:solidFill>
                   <a:srgbClr val="1B2B34"/>
                 </a:solidFill>
@@ -4101,10 +3608,93 @@
                 <a:ea typeface="Calibri" pitchFamily="34" charset="-122"/>
                 <a:cs typeface="Calibri" pitchFamily="34" charset="-120"/>
               </a:rPr>
-              <a:t>Planta saturada, tapada con horas extras</a:t>
-            </a:r>
-            <a:endParaRPr lang="en-US" sz="1400" dirty="0"/>
-          </a:p>
+              <a:t>El saber del negocio está en los dueños</a:t>
+            </a:r>
+            <a:endParaRPr lang="en-US" sz="1500" dirty="0"/>
+          </a:p>
+        </p:txBody>
+      </p:sp>
+      <p:sp>
+        <p:nvSpPr>
+          <p:cNvPr id="10" name="Shape 8"/>
+          <p:cNvSpPr/>
+          <p:nvPr/>
+        </p:nvSpPr>
+        <p:spPr>
+          <a:xfrm>
+            <a:off x="594360" y="3886200"/>
+            <a:ext cx="5326380" cy="2148840"/>
+          </a:xfrm>
+          <a:prstGeom prst="roundRect">
+            <a:avLst>
+              <a:gd name="adj" fmla="val 3404"/>
+            </a:avLst>
+          </a:prstGeom>
+          <a:solidFill>
+            <a:srgbClr val="DDE8EF"/>
+          </a:solidFill>
+          <a:ln/>
+        </p:spPr>
+      </p:sp>
+      <p:sp>
+        <p:nvSpPr>
+          <p:cNvPr id="11" name="Text 9"/>
+          <p:cNvSpPr txBox="1"/>
+          <p:nvPr/>
+        </p:nvSpPr>
+        <p:spPr>
+          <a:xfrm>
+            <a:off x="850392" y="4123944"/>
+            <a:ext cx="4814316" cy="310896"/>
+          </a:xfrm>
+          <a:prstGeom prst="rect">
+            <a:avLst/>
+          </a:prstGeom>
+          <a:noFill/>
+          <a:ln/>
+        </p:spPr>
+        <p:txBody>
+          <a:bodyPr wrap="square" lIns="0" tIns="0" rIns="0" bIns="0" rtlCol="0" anchor="ctr"/>
+          <a:lstStyle/>
+          <a:p>
+            <a:pPr indent="0" marL="0">
+              <a:buNone/>
+            </a:pPr>
+            <a:r>
+              <a:rPr lang="en-US" sz="1500" b="1" spc="80" kern="0" dirty="0">
+                <a:solidFill>
+                  <a:srgbClr val="1E5C85"/>
+                </a:solidFill>
+                <a:latin typeface="Arial" pitchFamily="34" charset="0"/>
+                <a:ea typeface="Arial" pitchFamily="34" charset="-122"/>
+                <a:cs typeface="Arial" pitchFamily="34" charset="-120"/>
+              </a:rPr>
+              <a:t>OPORTUNIDADES</a:t>
+            </a:r>
+            <a:endParaRPr lang="en-US" sz="1500" dirty="0"/>
+          </a:p>
+        </p:txBody>
+      </p:sp>
+      <p:sp>
+        <p:nvSpPr>
+          <p:cNvPr id="12" name="Text 10"/>
+          <p:cNvSpPr txBox="1"/>
+          <p:nvPr/>
+        </p:nvSpPr>
+        <p:spPr>
+          <a:xfrm>
+            <a:off x="850392" y="4526280"/>
+            <a:ext cx="4814316" cy="1325880"/>
+          </a:xfrm>
+          <a:prstGeom prst="rect">
+            <a:avLst/>
+          </a:prstGeom>
+          <a:noFill/>
+          <a:ln/>
+        </p:spPr>
+        <p:txBody>
+          <a:bodyPr wrap="square" lIns="0" tIns="0" rIns="0" bIns="0" rtlCol="0" anchor="t"/>
+          <a:lstStyle/>
           <a:p>
             <a:pPr marL="342900" indent="-342900">
               <a:spcAft>
@@ -4114,7 +3704,7 @@
               <a:buChar char="•"/>
             </a:pPr>
             <a:r>
-              <a:rPr lang="en-US" sz="1400" dirty="0">
+              <a:rPr lang="en-US" sz="1500" dirty="0">
                 <a:solidFill>
                   <a:srgbClr val="1B2B34"/>
                 </a:solidFill>
@@ -4122,9 +3712,9 @@
                 <a:ea typeface="Calibri" pitchFamily="34" charset="-122"/>
                 <a:cs typeface="Calibri" pitchFamily="34" charset="-120"/>
               </a:rPr>
-              <a:t>El saber del negocio está en los dueños</a:t>
-            </a:r>
-            <a:endParaRPr lang="en-US" sz="1400" dirty="0"/>
+              <a:t>Crecer por fraccionamiento sin ampliar planta</a:t>
+            </a:r>
+            <a:endParaRPr lang="en-US" sz="1500" dirty="0"/>
           </a:p>
           <a:p>
             <a:pPr marL="342900" indent="-342900">
@@ -4135,7 +3725,7 @@
               <a:buChar char="•"/>
             </a:pPr>
             <a:r>
-              <a:rPr lang="en-US" sz="1400" dirty="0">
+              <a:rPr lang="en-US" sz="1500" dirty="0">
                 <a:solidFill>
                   <a:srgbClr val="1B2B34"/>
                 </a:solidFill>
@@ -4143,93 +3733,10 @@
                 <a:ea typeface="Calibri" pitchFamily="34" charset="-122"/>
                 <a:cs typeface="Calibri" pitchFamily="34" charset="-120"/>
               </a:rPr>
-              <a:t>Sistema sin integrar y sin CRM</a:t>
-            </a:r>
-            <a:endParaRPr lang="en-US" sz="1400" dirty="0"/>
-          </a:p>
-        </p:txBody>
-      </p:sp>
-      <p:sp>
-        <p:nvSpPr>
-          <p:cNvPr id="10" name="Shape 8"/>
-          <p:cNvSpPr/>
-          <p:nvPr/>
-        </p:nvSpPr>
-        <p:spPr>
-          <a:xfrm>
-            <a:off x="594360" y="3886200"/>
-            <a:ext cx="5326380" cy="2148840"/>
-          </a:xfrm>
-          <a:prstGeom prst="roundRect">
-            <a:avLst>
-              <a:gd name="adj" fmla="val 3404"/>
-            </a:avLst>
-          </a:prstGeom>
-          <a:solidFill>
-            <a:srgbClr val="DDE8EF"/>
-          </a:solidFill>
-          <a:ln/>
-        </p:spPr>
-      </p:sp>
-      <p:sp>
-        <p:nvSpPr>
-          <p:cNvPr id="11" name="Text 9"/>
-          <p:cNvSpPr txBox="1"/>
-          <p:nvPr/>
-        </p:nvSpPr>
-        <p:spPr>
-          <a:xfrm>
-            <a:off x="850392" y="4123944"/>
-            <a:ext cx="4814316" cy="310896"/>
-          </a:xfrm>
-          <a:prstGeom prst="rect">
-            <a:avLst/>
-          </a:prstGeom>
-          <a:noFill/>
-          <a:ln/>
-        </p:spPr>
-        <p:txBody>
-          <a:bodyPr wrap="square" lIns="0" tIns="0" rIns="0" bIns="0" rtlCol="0" anchor="ctr"/>
-          <a:lstStyle/>
-          <a:p>
-            <a:pPr indent="0" marL="0">
-              <a:buNone/>
-            </a:pPr>
-            <a:r>
-              <a:rPr lang="en-US" sz="1500" b="1" spc="80" kern="0" dirty="0">
-                <a:solidFill>
-                  <a:srgbClr val="1E5C85"/>
-                </a:solidFill>
-                <a:latin typeface="Arial" pitchFamily="34" charset="0"/>
-                <a:ea typeface="Arial" pitchFamily="34" charset="-122"/>
-                <a:cs typeface="Arial" pitchFamily="34" charset="-120"/>
-              </a:rPr>
-              <a:t>OPORTUNIDADES</a:t>
+              <a:t>Aiello como modelo de cadena repetible</a:t>
             </a:r>
             <a:endParaRPr lang="en-US" sz="1500" dirty="0"/>
           </a:p>
-        </p:txBody>
-      </p:sp>
-      <p:sp>
-        <p:nvSpPr>
-          <p:cNvPr id="12" name="Text 10"/>
-          <p:cNvSpPr txBox="1"/>
-          <p:nvPr/>
-        </p:nvSpPr>
-        <p:spPr>
-          <a:xfrm>
-            <a:off x="850392" y="4526280"/>
-            <a:ext cx="4814316" cy="1325880"/>
-          </a:xfrm>
-          <a:prstGeom prst="rect">
-            <a:avLst/>
-          </a:prstGeom>
-          <a:noFill/>
-          <a:ln/>
-        </p:spPr>
-        <p:txBody>
-          <a:bodyPr wrap="square" lIns="0" tIns="0" rIns="0" bIns="0" rtlCol="0" anchor="t"/>
-          <a:lstStyle/>
           <a:p>
             <a:pPr marL="342900" indent="-342900">
               <a:spcAft>
@@ -4239,7 +3746,7 @@
               <a:buChar char="•"/>
             </a:pPr>
             <a:r>
-              <a:rPr lang="en-US" sz="1400" dirty="0">
+              <a:rPr lang="en-US" sz="1500" dirty="0">
                 <a:solidFill>
                   <a:srgbClr val="1B2B34"/>
                 </a:solidFill>
@@ -4247,10 +3754,93 @@
                 <a:ea typeface="Calibri" pitchFamily="34" charset="-122"/>
                 <a:cs typeface="Calibri" pitchFamily="34" charset="-120"/>
               </a:rPr>
-              <a:t>El sitio ya está armado como tienda</a:t>
-            </a:r>
-            <a:endParaRPr lang="en-US" sz="1400" dirty="0"/>
-          </a:p>
+              <a:t>El equipo tiene ganas de capacitarse</a:t>
+            </a:r>
+            <a:endParaRPr lang="en-US" sz="1500" dirty="0"/>
+          </a:p>
+        </p:txBody>
+      </p:sp>
+      <p:sp>
+        <p:nvSpPr>
+          <p:cNvPr id="13" name="Shape 11"/>
+          <p:cNvSpPr/>
+          <p:nvPr/>
+        </p:nvSpPr>
+        <p:spPr>
+          <a:xfrm>
+            <a:off x="6240780" y="3886200"/>
+            <a:ext cx="5326380" cy="2148840"/>
+          </a:xfrm>
+          <a:prstGeom prst="roundRect">
+            <a:avLst>
+              <a:gd name="adj" fmla="val 3404"/>
+            </a:avLst>
+          </a:prstGeom>
+          <a:solidFill>
+            <a:srgbClr val="F6EBD8"/>
+          </a:solidFill>
+          <a:ln/>
+        </p:spPr>
+      </p:sp>
+      <p:sp>
+        <p:nvSpPr>
+          <p:cNvPr id="14" name="Text 12"/>
+          <p:cNvSpPr txBox="1"/>
+          <p:nvPr/>
+        </p:nvSpPr>
+        <p:spPr>
+          <a:xfrm>
+            <a:off x="6496812" y="4123944"/>
+            <a:ext cx="4814316" cy="310896"/>
+          </a:xfrm>
+          <a:prstGeom prst="rect">
+            <a:avLst/>
+          </a:prstGeom>
+          <a:noFill/>
+          <a:ln/>
+        </p:spPr>
+        <p:txBody>
+          <a:bodyPr wrap="square" lIns="0" tIns="0" rIns="0" bIns="0" rtlCol="0" anchor="ctr"/>
+          <a:lstStyle/>
+          <a:p>
+            <a:pPr indent="0" marL="0">
+              <a:buNone/>
+            </a:pPr>
+            <a:r>
+              <a:rPr lang="en-US" sz="1500" b="1" spc="80" kern="0" dirty="0">
+                <a:solidFill>
+                  <a:srgbClr val="8A5714"/>
+                </a:solidFill>
+                <a:latin typeface="Arial" pitchFamily="34" charset="0"/>
+                <a:ea typeface="Arial" pitchFamily="34" charset="-122"/>
+                <a:cs typeface="Arial" pitchFamily="34" charset="-120"/>
+              </a:rPr>
+              <a:t>AMENAZAS</a:t>
+            </a:r>
+            <a:endParaRPr lang="en-US" sz="1500" dirty="0"/>
+          </a:p>
+        </p:txBody>
+      </p:sp>
+      <p:sp>
+        <p:nvSpPr>
+          <p:cNvPr id="15" name="Text 13"/>
+          <p:cNvSpPr txBox="1"/>
+          <p:nvPr/>
+        </p:nvSpPr>
+        <p:spPr>
+          <a:xfrm>
+            <a:off x="6496812" y="4526280"/>
+            <a:ext cx="4814316" cy="1325880"/>
+          </a:xfrm>
+          <a:prstGeom prst="rect">
+            <a:avLst/>
+          </a:prstGeom>
+          <a:noFill/>
+          <a:ln/>
+        </p:spPr>
+        <p:txBody>
+          <a:bodyPr wrap="square" lIns="0" tIns="0" rIns="0" bIns="0" rtlCol="0" anchor="t"/>
+          <a:lstStyle/>
           <a:p>
             <a:pPr marL="342900" indent="-342900">
               <a:spcAft>
@@ -4260,7 +3850,7 @@
               <a:buChar char="•"/>
             </a:pPr>
             <a:r>
-              <a:rPr lang="en-US" sz="1400" dirty="0">
+              <a:rPr lang="en-US" sz="1500" dirty="0">
                 <a:solidFill>
                   <a:srgbClr val="1B2B34"/>
                 </a:solidFill>
@@ -4268,9 +3858,9 @@
                 <a:ea typeface="Calibri" pitchFamily="34" charset="-122"/>
                 <a:cs typeface="Calibri" pitchFamily="34" charset="-120"/>
               </a:rPr>
-              <a:t>Crecer por fraccionamiento sin ampliar planta</a:t>
-            </a:r>
-            <a:endParaRPr lang="en-US" sz="1400" dirty="0"/>
+              <a:t>Un solo proveedor de cada insumo</a:t>
+            </a:r>
+            <a:endParaRPr lang="en-US" sz="1500" dirty="0"/>
           </a:p>
           <a:p>
             <a:pPr marL="342900" indent="-342900">
@@ -4281,7 +3871,7 @@
               <a:buChar char="•"/>
             </a:pPr>
             <a:r>
-              <a:rPr lang="en-US" sz="1400" dirty="0">
+              <a:rPr lang="en-US" sz="1500" dirty="0">
                 <a:solidFill>
                   <a:srgbClr val="1B2B34"/>
                 </a:solidFill>
@@ -4289,9 +3879,9 @@
                 <a:ea typeface="Calibri" pitchFamily="34" charset="-122"/>
                 <a:cs typeface="Calibri" pitchFamily="34" charset="-120"/>
               </a:rPr>
-              <a:t>Aiello como modelo de cadena repetible</a:t>
-            </a:r>
-            <a:endParaRPr lang="en-US" sz="1400" dirty="0"/>
+              <a:t>Sin margen de planta si sube la demanda</a:t>
+            </a:r>
+            <a:endParaRPr lang="en-US" sz="1500" dirty="0"/>
           </a:p>
           <a:p>
             <a:pPr marL="342900" indent="-342900">
@@ -4302,7 +3892,7 @@
               <a:buChar char="•"/>
             </a:pPr>
             <a:r>
-              <a:rPr lang="en-US" sz="1400" dirty="0">
+              <a:rPr lang="en-US" sz="1500" dirty="0">
                 <a:solidFill>
                   <a:srgbClr val="1B2B34"/>
                 </a:solidFill>
@@ -4310,176 +3900,9 @@
                 <a:ea typeface="Calibri" pitchFamily="34" charset="-122"/>
                 <a:cs typeface="Calibri" pitchFamily="34" charset="-120"/>
               </a:rPr>
-              <a:t>El equipo tiene ganas de capacitarse</a:t>
-            </a:r>
-            <a:endParaRPr lang="en-US" sz="1400" dirty="0"/>
-          </a:p>
-        </p:txBody>
-      </p:sp>
-      <p:sp>
-        <p:nvSpPr>
-          <p:cNvPr id="13" name="Shape 11"/>
-          <p:cNvSpPr/>
-          <p:nvPr/>
-        </p:nvSpPr>
-        <p:spPr>
-          <a:xfrm>
-            <a:off x="6240780" y="3886200"/>
-            <a:ext cx="5326380" cy="2148840"/>
-          </a:xfrm>
-          <a:prstGeom prst="roundRect">
-            <a:avLst>
-              <a:gd name="adj" fmla="val 3404"/>
-            </a:avLst>
-          </a:prstGeom>
-          <a:solidFill>
-            <a:srgbClr val="F6EBD8"/>
-          </a:solidFill>
-          <a:ln/>
-        </p:spPr>
-      </p:sp>
-      <p:sp>
-        <p:nvSpPr>
-          <p:cNvPr id="14" name="Text 12"/>
-          <p:cNvSpPr txBox="1"/>
-          <p:nvPr/>
-        </p:nvSpPr>
-        <p:spPr>
-          <a:xfrm>
-            <a:off x="6496812" y="4123944"/>
-            <a:ext cx="4814316" cy="310896"/>
-          </a:xfrm>
-          <a:prstGeom prst="rect">
-            <a:avLst/>
-          </a:prstGeom>
-          <a:noFill/>
-          <a:ln/>
-        </p:spPr>
-        <p:txBody>
-          <a:bodyPr wrap="square" lIns="0" tIns="0" rIns="0" bIns="0" rtlCol="0" anchor="ctr"/>
-          <a:lstStyle/>
-          <a:p>
-            <a:pPr indent="0" marL="0">
-              <a:buNone/>
-            </a:pPr>
-            <a:r>
-              <a:rPr lang="en-US" sz="1500" b="1" spc="80" kern="0" dirty="0">
-                <a:solidFill>
-                  <a:srgbClr val="8A5714"/>
-                </a:solidFill>
-                <a:latin typeface="Arial" pitchFamily="34" charset="0"/>
-                <a:ea typeface="Arial" pitchFamily="34" charset="-122"/>
-                <a:cs typeface="Arial" pitchFamily="34" charset="-120"/>
-              </a:rPr>
-              <a:t>AMENAZAS</a:t>
+              <a:t>Perder un cliente sin llegar a enterarse</a:t>
             </a:r>
             <a:endParaRPr lang="en-US" sz="1500" dirty="0"/>
-          </a:p>
-        </p:txBody>
-      </p:sp>
-      <p:sp>
-        <p:nvSpPr>
-          <p:cNvPr id="15" name="Text 13"/>
-          <p:cNvSpPr txBox="1"/>
-          <p:nvPr/>
-        </p:nvSpPr>
-        <p:spPr>
-          <a:xfrm>
-            <a:off x="6496812" y="4526280"/>
-            <a:ext cx="4814316" cy="1325880"/>
-          </a:xfrm>
-          <a:prstGeom prst="rect">
-            <a:avLst/>
-          </a:prstGeom>
-          <a:noFill/>
-          <a:ln/>
-        </p:spPr>
-        <p:txBody>
-          <a:bodyPr wrap="square" lIns="0" tIns="0" rIns="0" bIns="0" rtlCol="0" anchor="t"/>
-          <a:lstStyle/>
-          <a:p>
-            <a:pPr marL="342900" indent="-342900">
-              <a:spcAft>
-                <a:spcPts val="600"/>
-              </a:spcAft>
-              <a:buSzPct val="100000"/>
-              <a:buChar char="•"/>
-            </a:pPr>
-            <a:r>
-              <a:rPr lang="en-US" sz="1400" dirty="0">
-                <a:solidFill>
-                  <a:srgbClr val="1B2B34"/>
-                </a:solidFill>
-                <a:latin typeface="Calibri" pitchFamily="34" charset="0"/>
-                <a:ea typeface="Calibri" pitchFamily="34" charset="-122"/>
-                <a:cs typeface="Calibri" pitchFamily="34" charset="-120"/>
-              </a:rPr>
-              <a:t>Inflación sobre un modelo que compite por precio</a:t>
-            </a:r>
-            <a:endParaRPr lang="en-US" sz="1400" dirty="0"/>
-          </a:p>
-          <a:p>
-            <a:pPr marL="342900" indent="-342900">
-              <a:spcAft>
-                <a:spcPts val="600"/>
-              </a:spcAft>
-              <a:buSzPct val="100000"/>
-              <a:buChar char="•"/>
-            </a:pPr>
-            <a:r>
-              <a:rPr lang="en-US" sz="1400" dirty="0">
-                <a:solidFill>
-                  <a:srgbClr val="1B2B34"/>
-                </a:solidFill>
-                <a:latin typeface="Calibri" pitchFamily="34" charset="0"/>
-                <a:ea typeface="Calibri" pitchFamily="34" charset="-122"/>
-                <a:cs typeface="Calibri" pitchFamily="34" charset="-120"/>
-              </a:rPr>
-              <a:t>Un solo proveedor de film impreso</a:t>
-            </a:r>
-            <a:endParaRPr lang="en-US" sz="1400" dirty="0"/>
-          </a:p>
-          <a:p>
-            <a:pPr marL="342900" indent="-342900">
-              <a:spcAft>
-                <a:spcPts val="600"/>
-              </a:spcAft>
-              <a:buSzPct val="100000"/>
-              <a:buChar char="•"/>
-            </a:pPr>
-            <a:r>
-              <a:rPr lang="en-US" sz="1400" dirty="0">
-                <a:solidFill>
-                  <a:srgbClr val="1B2B34"/>
-                </a:solidFill>
-                <a:latin typeface="Calibri" pitchFamily="34" charset="0"/>
-                <a:ea typeface="Calibri" pitchFamily="34" charset="-122"/>
-                <a:cs typeface="Calibri" pitchFamily="34" charset="-120"/>
-              </a:rPr>
-              <a:t>Sin margen de planta si sube la demanda</a:t>
-            </a:r>
-            <a:endParaRPr lang="en-US" sz="1400" dirty="0"/>
-          </a:p>
-          <a:p>
-            <a:pPr marL="342900" indent="-342900">
-              <a:spcAft>
-                <a:spcPts val="600"/>
-              </a:spcAft>
-              <a:buSzPct val="100000"/>
-              <a:buChar char="•"/>
-            </a:pPr>
-            <a:r>
-              <a:rPr lang="en-US" sz="1400" dirty="0">
-                <a:solidFill>
-                  <a:srgbClr val="1B2B34"/>
-                </a:solidFill>
-                <a:latin typeface="Calibri" pitchFamily="34" charset="0"/>
-                <a:ea typeface="Calibri" pitchFamily="34" charset="-122"/>
-                <a:cs typeface="Calibri" pitchFamily="34" charset="-120"/>
-              </a:rPr>
-              <a:t>Perder un cliente sin llegar a enterarse</a:t>
-            </a:r>
-            <a:endParaRPr lang="en-US" sz="1400" dirty="0"/>
           </a:p>
         </p:txBody>
       </p:sp>
@@ -4523,8 +3946,8 @@
         </p:nvSpPr>
         <p:spPr>
           <a:xfrm>
-            <a:off x="411480" y="384048"/>
-            <a:ext cx="11338560" cy="502920"/>
+            <a:off x="411480" y="310896"/>
+            <a:ext cx="11338560" cy="475488"/>
           </a:xfrm>
           <a:prstGeom prst="rect">
             <a:avLst/>
@@ -4562,8 +3985,8 @@
         </p:nvSpPr>
         <p:spPr>
           <a:xfrm>
-            <a:off x="411480" y="896112"/>
-            <a:ext cx="11338560" cy="292608"/>
+            <a:off x="411480" y="786384"/>
+            <a:ext cx="11338560" cy="274320"/>
           </a:xfrm>
           <a:prstGeom prst="rect">
             <a:avLst/>
@@ -4587,7 +4010,7 @@
                 <a:ea typeface="Calibri" pitchFamily="34" charset="-122"/>
                 <a:cs typeface="Calibri" pitchFamily="34" charset="-120"/>
               </a:rPr>
-              <a:t>Estado actual · los nueve bloques</a:t>
+              <a:t>Los nueve bloques, agrupados en cuatro preguntas</a:t>
             </a:r>
             <a:endParaRPr lang="en-US" sz="1300" dirty="0"/>
           </a:p>
@@ -4595,14 +4018,306 @@
       </p:sp>
       <p:sp>
         <p:nvSpPr>
-          <p:cNvPr id="4" name="Shape 2"/>
+          <p:cNvPr id="4" name="Text 2"/>
+          <p:cNvSpPr txBox="1"/>
+          <p:nvPr/>
+        </p:nvSpPr>
+        <p:spPr>
+          <a:xfrm>
+            <a:off x="411480" y="1133856"/>
+            <a:ext cx="4486046" cy="256032"/>
+          </a:xfrm>
+          <a:prstGeom prst="rect">
+            <a:avLst/>
+          </a:prstGeom>
+          <a:noFill/>
+          <a:ln/>
+        </p:spPr>
+        <p:txBody>
+          <a:bodyPr wrap="square" lIns="0" tIns="0" rIns="0" bIns="0" rtlCol="0" anchor="ctr"/>
+          <a:lstStyle/>
+          <a:p>
+            <a:pPr indent="0" marL="0">
+              <a:buNone/>
+            </a:pPr>
+            <a:r>
+              <a:rPr lang="en-US" sz="1200" b="1" spc="90" kern="0" dirty="0">
+                <a:solidFill>
+                  <a:srgbClr val="55636B"/>
+                </a:solidFill>
+                <a:latin typeface="Arial" pitchFamily="34" charset="0"/>
+                <a:ea typeface="Arial" pitchFamily="34" charset="-122"/>
+                <a:cs typeface="Arial" pitchFamily="34" charset="-120"/>
+              </a:rPr>
+              <a:t>EL CEREBRO</a:t>
+            </a:r>
+            <a:pPr indent="0" marL="0">
+              <a:buNone/>
+            </a:pPr>
+            <a:r>
+              <a:rPr lang="en-US" sz="1200" spc="90" kern="0" dirty="0">
+                <a:solidFill>
+                  <a:srgbClr val="55636B"/>
+                </a:solidFill>
+                <a:latin typeface="Arial" pitchFamily="34" charset="0"/>
+                <a:ea typeface="Arial" pitchFamily="34" charset="-122"/>
+                <a:cs typeface="Arial" pitchFamily="34" charset="-120"/>
+              </a:rPr>
+              <a:t>   ¿CÓMO?</a:t>
+            </a:r>
+            <a:endParaRPr lang="en-US" sz="1200" dirty="0"/>
+          </a:p>
+        </p:txBody>
+      </p:sp>
+      <p:sp>
+        <p:nvSpPr>
+          <p:cNvPr id="5" name="Shape 3"/>
           <p:cNvSpPr/>
           <p:nvPr/>
         </p:nvSpPr>
         <p:spPr>
           <a:xfrm>
-            <a:off x="411480" y="1325880"/>
-            <a:ext cx="2201875" cy="3291840"/>
+            <a:off x="411480" y="1408176"/>
+            <a:ext cx="4486046" cy="41148"/>
+          </a:xfrm>
+          <a:prstGeom prst="rect">
+            <a:avLst/>
+          </a:prstGeom>
+          <a:solidFill>
+            <a:srgbClr val="55636B"/>
+          </a:solidFill>
+          <a:ln/>
+        </p:spPr>
+      </p:sp>
+      <p:sp>
+        <p:nvSpPr>
+          <p:cNvPr id="6" name="Text 4"/>
+          <p:cNvSpPr txBox="1"/>
+          <p:nvPr/>
+        </p:nvSpPr>
+        <p:spPr>
+          <a:xfrm>
+            <a:off x="4979822" y="1133856"/>
+            <a:ext cx="2201875" cy="256032"/>
+          </a:xfrm>
+          <a:prstGeom prst="rect">
+            <a:avLst/>
+          </a:prstGeom>
+          <a:noFill/>
+          <a:ln/>
+        </p:spPr>
+        <p:txBody>
+          <a:bodyPr wrap="square" lIns="0" tIns="0" rIns="0" bIns="0" rtlCol="0" anchor="ctr"/>
+          <a:lstStyle/>
+          <a:p>
+            <a:pPr indent="0" marL="0">
+              <a:buNone/>
+            </a:pPr>
+            <a:r>
+              <a:rPr lang="en-US" sz="1200" b="1" spc="90" kern="0" dirty="0">
+                <a:solidFill>
+                  <a:srgbClr val="C8791E"/>
+                </a:solidFill>
+                <a:latin typeface="Arial" pitchFamily="34" charset="0"/>
+                <a:ea typeface="Arial" pitchFamily="34" charset="-122"/>
+                <a:cs typeface="Arial" pitchFamily="34" charset="-120"/>
+              </a:rPr>
+              <a:t>EL CORAZÓN</a:t>
+            </a:r>
+            <a:pPr indent="0" marL="0">
+              <a:buNone/>
+            </a:pPr>
+            <a:r>
+              <a:rPr lang="en-US" sz="1200" spc="90" kern="0" dirty="0">
+                <a:solidFill>
+                  <a:srgbClr val="C8791E"/>
+                </a:solidFill>
+                <a:latin typeface="Arial" pitchFamily="34" charset="0"/>
+                <a:ea typeface="Arial" pitchFamily="34" charset="-122"/>
+                <a:cs typeface="Arial" pitchFamily="34" charset="-120"/>
+              </a:rPr>
+              <a:t>   ¿QUÉ?</a:t>
+            </a:r>
+            <a:endParaRPr lang="en-US" sz="1200" dirty="0"/>
+          </a:p>
+        </p:txBody>
+      </p:sp>
+      <p:sp>
+        <p:nvSpPr>
+          <p:cNvPr id="7" name="Shape 5"/>
+          <p:cNvSpPr/>
+          <p:nvPr/>
+        </p:nvSpPr>
+        <p:spPr>
+          <a:xfrm>
+            <a:off x="4979822" y="1408176"/>
+            <a:ext cx="2201875" cy="41148"/>
+          </a:xfrm>
+          <a:prstGeom prst="rect">
+            <a:avLst/>
+          </a:prstGeom>
+          <a:solidFill>
+            <a:srgbClr val="C8791E"/>
+          </a:solidFill>
+          <a:ln/>
+        </p:spPr>
+      </p:sp>
+      <p:sp>
+        <p:nvSpPr>
+          <p:cNvPr id="8" name="Text 6"/>
+          <p:cNvSpPr txBox="1"/>
+          <p:nvPr/>
+        </p:nvSpPr>
+        <p:spPr>
+          <a:xfrm>
+            <a:off x="7263994" y="1133856"/>
+            <a:ext cx="4486046" cy="256032"/>
+          </a:xfrm>
+          <a:prstGeom prst="rect">
+            <a:avLst/>
+          </a:prstGeom>
+          <a:noFill/>
+          <a:ln/>
+        </p:spPr>
+        <p:txBody>
+          <a:bodyPr wrap="square" lIns="0" tIns="0" rIns="0" bIns="0" rtlCol="0" anchor="ctr"/>
+          <a:lstStyle/>
+          <a:p>
+            <a:pPr indent="0" marL="0">
+              <a:buNone/>
+            </a:pPr>
+            <a:r>
+              <a:rPr lang="en-US" sz="1200" b="1" spc="90" kern="0" dirty="0">
+                <a:solidFill>
+                  <a:srgbClr val="1E5C85"/>
+                </a:solidFill>
+                <a:latin typeface="Arial" pitchFamily="34" charset="0"/>
+                <a:ea typeface="Arial" pitchFamily="34" charset="-122"/>
+                <a:cs typeface="Arial" pitchFamily="34" charset="-120"/>
+              </a:rPr>
+              <a:t>LOS CLIENTES</a:t>
+            </a:r>
+            <a:pPr indent="0" marL="0">
+              <a:buNone/>
+            </a:pPr>
+            <a:r>
+              <a:rPr lang="en-US" sz="1200" spc="90" kern="0" dirty="0">
+                <a:solidFill>
+                  <a:srgbClr val="1E5C85"/>
+                </a:solidFill>
+                <a:latin typeface="Arial" pitchFamily="34" charset="0"/>
+                <a:ea typeface="Arial" pitchFamily="34" charset="-122"/>
+                <a:cs typeface="Arial" pitchFamily="34" charset="-120"/>
+              </a:rPr>
+              <a:t>   ¿QUIÉN?</a:t>
+            </a:r>
+            <a:endParaRPr lang="en-US" sz="1200" dirty="0"/>
+          </a:p>
+        </p:txBody>
+      </p:sp>
+      <p:sp>
+        <p:nvSpPr>
+          <p:cNvPr id="9" name="Shape 7"/>
+          <p:cNvSpPr/>
+          <p:nvPr/>
+        </p:nvSpPr>
+        <p:spPr>
+          <a:xfrm>
+            <a:off x="7263994" y="1408176"/>
+            <a:ext cx="4486046" cy="41148"/>
+          </a:xfrm>
+          <a:prstGeom prst="rect">
+            <a:avLst/>
+          </a:prstGeom>
+          <a:solidFill>
+            <a:srgbClr val="1E5C85"/>
+          </a:solidFill>
+          <a:ln/>
+        </p:spPr>
+      </p:sp>
+      <p:sp>
+        <p:nvSpPr>
+          <p:cNvPr id="10" name="Text 8"/>
+          <p:cNvSpPr txBox="1"/>
+          <p:nvPr/>
+        </p:nvSpPr>
+        <p:spPr>
+          <a:xfrm>
+            <a:off x="411480" y="4636008"/>
+            <a:ext cx="11338560" cy="256032"/>
+          </a:xfrm>
+          <a:prstGeom prst="rect">
+            <a:avLst/>
+          </a:prstGeom>
+          <a:noFill/>
+          <a:ln/>
+        </p:spPr>
+        <p:txBody>
+          <a:bodyPr wrap="square" lIns="0" tIns="0" rIns="0" bIns="0" rtlCol="0" anchor="ctr"/>
+          <a:lstStyle/>
+          <a:p>
+            <a:pPr indent="0" marL="0">
+              <a:buNone/>
+            </a:pPr>
+            <a:r>
+              <a:rPr lang="en-US" sz="1200" b="1" spc="90" kern="0" dirty="0">
+                <a:solidFill>
+                  <a:srgbClr val="A33B22"/>
+                </a:solidFill>
+                <a:latin typeface="Arial" pitchFamily="34" charset="0"/>
+                <a:ea typeface="Arial" pitchFamily="34" charset="-122"/>
+                <a:cs typeface="Arial" pitchFamily="34" charset="-120"/>
+              </a:rPr>
+              <a:t>LA ECONOMÍA</a:t>
+            </a:r>
+            <a:pPr indent="0" marL="0">
+              <a:buNone/>
+            </a:pPr>
+            <a:r>
+              <a:rPr lang="en-US" sz="1200" spc="90" kern="0" dirty="0">
+                <a:solidFill>
+                  <a:srgbClr val="A33B22"/>
+                </a:solidFill>
+                <a:latin typeface="Arial" pitchFamily="34" charset="0"/>
+                <a:ea typeface="Arial" pitchFamily="34" charset="-122"/>
+                <a:cs typeface="Arial" pitchFamily="34" charset="-120"/>
+              </a:rPr>
+              <a:t>   ¿CUÁNTO?</a:t>
+            </a:r>
+            <a:endParaRPr lang="en-US" sz="1200" dirty="0"/>
+          </a:p>
+        </p:txBody>
+      </p:sp>
+      <p:sp>
+        <p:nvSpPr>
+          <p:cNvPr id="11" name="Shape 9"/>
+          <p:cNvSpPr/>
+          <p:nvPr/>
+        </p:nvSpPr>
+        <p:spPr>
+          <a:xfrm>
+            <a:off x="411480" y="4910328"/>
+            <a:ext cx="11338560" cy="41148"/>
+          </a:xfrm>
+          <a:prstGeom prst="rect">
+            <a:avLst/>
+          </a:prstGeom>
+          <a:solidFill>
+            <a:srgbClr val="A33B22"/>
+          </a:solidFill>
+          <a:ln/>
+        </p:spPr>
+      </p:sp>
+      <p:sp>
+        <p:nvSpPr>
+          <p:cNvPr id="12" name="Shape 10"/>
+          <p:cNvSpPr/>
+          <p:nvPr/>
+        </p:nvSpPr>
+        <p:spPr>
+          <a:xfrm>
+            <a:off x="411480" y="1591056"/>
+            <a:ext cx="2201875" cy="2926080"/>
           </a:xfrm>
           <a:prstGeom prst="roundRect">
             <a:avLst>
@@ -4617,13 +4332,13 @@
       </p:sp>
       <p:sp>
         <p:nvSpPr>
-          <p:cNvPr id="5" name="Text 3"/>
-          <p:cNvSpPr txBox="1"/>
-          <p:nvPr/>
-        </p:nvSpPr>
-        <p:spPr>
-          <a:xfrm>
-            <a:off x="530352" y="1408176"/>
+          <p:cNvPr id="13" name="Text 11"/>
+          <p:cNvSpPr txBox="1"/>
+          <p:nvPr/>
+        </p:nvSpPr>
+        <p:spPr>
+          <a:xfrm>
+            <a:off x="530352" y="1673352"/>
             <a:ext cx="1964131" cy="228600"/>
           </a:xfrm>
           <a:prstGeom prst="rect">
@@ -4656,14 +4371,14 @@
       </p:sp>
       <p:sp>
         <p:nvSpPr>
-          <p:cNvPr id="6" name="Text 4"/>
-          <p:cNvSpPr txBox="1"/>
-          <p:nvPr/>
-        </p:nvSpPr>
-        <p:spPr>
-          <a:xfrm>
-            <a:off x="530352" y="1655064"/>
-            <a:ext cx="1964131" cy="2871216"/>
+          <p:cNvPr id="14" name="Text 12"/>
+          <p:cNvSpPr txBox="1"/>
+          <p:nvPr/>
+        </p:nvSpPr>
+        <p:spPr>
+          <a:xfrm>
+            <a:off x="530352" y="1920240"/>
+            <a:ext cx="1964131" cy="2505456"/>
           </a:xfrm>
           <a:prstGeom prst="rect">
             <a:avLst/>
@@ -4677,12 +4392,12 @@
           <a:p>
             <a:pPr indent="0" marL="0">
               <a:lnSpc>
-                <a:spcPts val="1400"/>
+                <a:spcPts val="1500"/>
               </a:lnSpc>
               <a:buNone/>
             </a:pPr>
             <a:r>
-              <a:rPr lang="en-US" sz="950" dirty="0">
+              <a:rPr lang="en-US" sz="1000" dirty="0">
                 <a:solidFill>
                   <a:srgbClr val="1B2B34"/>
                 </a:solidFill>
@@ -4690,19 +4405,19 @@
                 <a:ea typeface="Calibri" pitchFamily="34" charset="-122"/>
                 <a:cs typeface="Calibri" pitchFamily="34" charset="-120"/>
               </a:rPr>
-              <a:t>Film impreso: un proveedor</a:t>
-            </a:r>
-            <a:endParaRPr lang="en-US" sz="950" dirty="0"/>
+              <a:t>Materia prima a granel</a:t>
+            </a:r>
+            <a:endParaRPr lang="en-US" sz="1000" dirty="0"/>
           </a:p>
           <a:p>
             <a:pPr indent="0" marL="0">
               <a:lnSpc>
-                <a:spcPts val="1400"/>
+                <a:spcPts val="1500"/>
               </a:lnSpc>
               <a:buNone/>
             </a:pPr>
             <a:r>
-              <a:rPr lang="en-US" sz="950" dirty="0">
+              <a:rPr lang="en-US" sz="1000" dirty="0">
                 <a:solidFill>
                   <a:srgbClr val="1B2B34"/>
                 </a:solidFill>
@@ -4710,19 +4425,19 @@
                 <a:ea typeface="Calibri" pitchFamily="34" charset="-122"/>
                 <a:cs typeface="Calibri" pitchFamily="34" charset="-120"/>
               </a:rPr>
-              <a:t>Materia prima a granel</a:t>
-            </a:r>
-            <a:endParaRPr lang="en-US" sz="950" dirty="0"/>
+              <a:t>Producto terminado a granel</a:t>
+            </a:r>
+            <a:endParaRPr lang="en-US" sz="1000" dirty="0"/>
           </a:p>
           <a:p>
             <a:pPr indent="0" marL="0">
               <a:lnSpc>
-                <a:spcPts val="1400"/>
+                <a:spcPts val="1500"/>
               </a:lnSpc>
               <a:buNone/>
             </a:pPr>
             <a:r>
-              <a:rPr lang="en-US" sz="950" dirty="0">
+              <a:rPr lang="en-US" sz="1000" dirty="0">
                 <a:solidFill>
                   <a:srgbClr val="1B2B34"/>
                 </a:solidFill>
@@ -4730,19 +4445,19 @@
                 <a:ea typeface="Calibri" pitchFamily="34" charset="-122"/>
                 <a:cs typeface="Calibri" pitchFamily="34" charset="-120"/>
               </a:rPr>
-              <a:t>Producto terminado a granel</a:t>
-            </a:r>
-            <a:endParaRPr lang="en-US" sz="950" dirty="0"/>
+              <a:t>Transportistas tercerizados</a:t>
+            </a:r>
+            <a:endParaRPr lang="en-US" sz="1000" dirty="0"/>
           </a:p>
           <a:p>
             <a:pPr indent="0" marL="0">
               <a:lnSpc>
-                <a:spcPts val="1400"/>
+                <a:spcPts val="1500"/>
               </a:lnSpc>
               <a:buNone/>
             </a:pPr>
             <a:r>
-              <a:rPr lang="en-US" sz="950" dirty="0">
+              <a:rPr lang="en-US" sz="1000" dirty="0">
                 <a:solidFill>
                   <a:srgbClr val="1B2B34"/>
                 </a:solidFill>
@@ -4750,66 +4465,26 @@
                 <a:ea typeface="Calibri" pitchFamily="34" charset="-122"/>
                 <a:cs typeface="Calibri" pitchFamily="34" charset="-120"/>
               </a:rPr>
-              <a:t>Los 57 distribuidores</a:t>
-            </a:r>
-            <a:endParaRPr lang="en-US" sz="950" dirty="0"/>
-          </a:p>
-          <a:p>
-            <a:pPr indent="0" marL="0">
-              <a:lnSpc>
-                <a:spcPts val="1400"/>
-              </a:lnSpc>
-              <a:buNone/>
-            </a:pPr>
-            <a:r>
-              <a:rPr lang="en-US" sz="950" dirty="0">
-                <a:solidFill>
-                  <a:srgbClr val="1B2B34"/>
-                </a:solidFill>
-                <a:latin typeface="Calibri" pitchFamily="34" charset="0"/>
-                <a:ea typeface="Calibri" pitchFamily="34" charset="-122"/>
-                <a:cs typeface="Calibri" pitchFamily="34" charset="-120"/>
-              </a:rPr>
-              <a:t>Transportistas tercerizados</a:t>
-            </a:r>
-            <a:endParaRPr lang="en-US" sz="950" dirty="0"/>
-          </a:p>
-          <a:p>
-            <a:pPr indent="0" marL="0">
-              <a:lnSpc>
-                <a:spcPts val="1400"/>
-              </a:lnSpc>
-              <a:buNone/>
-            </a:pPr>
-            <a:r>
-              <a:rPr lang="en-US" sz="950" dirty="0">
-                <a:solidFill>
-                  <a:srgbClr val="1B2B34"/>
-                </a:solidFill>
-                <a:latin typeface="Calibri" pitchFamily="34" charset="0"/>
-                <a:ea typeface="Calibri" pitchFamily="34" charset="-122"/>
-                <a:cs typeface="Calibri" pitchFamily="34" charset="-120"/>
-              </a:rPr>
               <a:t>Aiello Supermercados</a:t>
             </a:r>
-            <a:endParaRPr lang="en-US" sz="950" dirty="0"/>
-          </a:p>
-        </p:txBody>
-      </p:sp>
-      <p:sp>
-        <p:nvSpPr>
-          <p:cNvPr id="7" name="Shape 5"/>
+            <a:endParaRPr lang="en-US" sz="1000" dirty="0"/>
+          </a:p>
+        </p:txBody>
+      </p:sp>
+      <p:sp>
+        <p:nvSpPr>
+          <p:cNvPr id="15" name="Shape 13"/>
           <p:cNvSpPr/>
           <p:nvPr/>
         </p:nvSpPr>
         <p:spPr>
           <a:xfrm>
-            <a:off x="2695651" y="1325880"/>
-            <a:ext cx="2201875" cy="1604772"/>
+            <a:off x="2695651" y="1591056"/>
+            <a:ext cx="2201875" cy="1421892"/>
           </a:xfrm>
           <a:prstGeom prst="roundRect">
             <a:avLst>
-              <a:gd name="adj" fmla="val 3419"/>
+              <a:gd name="adj" fmla="val 3859"/>
             </a:avLst>
           </a:prstGeom>
           <a:solidFill>
@@ -4820,13 +4495,13 @@
       </p:sp>
       <p:sp>
         <p:nvSpPr>
-          <p:cNvPr id="8" name="Text 6"/>
-          <p:cNvSpPr txBox="1"/>
-          <p:nvPr/>
-        </p:nvSpPr>
-        <p:spPr>
-          <a:xfrm>
-            <a:off x="2814523" y="1408176"/>
+          <p:cNvPr id="16" name="Text 14"/>
+          <p:cNvSpPr txBox="1"/>
+          <p:nvPr/>
+        </p:nvSpPr>
+        <p:spPr>
+          <a:xfrm>
+            <a:off x="2814523" y="1673352"/>
             <a:ext cx="1964131" cy="228600"/>
           </a:xfrm>
           <a:prstGeom prst="rect">
@@ -4859,14 +4534,14 @@
       </p:sp>
       <p:sp>
         <p:nvSpPr>
-          <p:cNvPr id="9" name="Text 7"/>
-          <p:cNvSpPr txBox="1"/>
-          <p:nvPr/>
-        </p:nvSpPr>
-        <p:spPr>
-          <a:xfrm>
-            <a:off x="2814523" y="1655064"/>
-            <a:ext cx="1964131" cy="1184148"/>
+          <p:cNvPr id="17" name="Text 15"/>
+          <p:cNvSpPr txBox="1"/>
+          <p:nvPr/>
+        </p:nvSpPr>
+        <p:spPr>
+          <a:xfrm>
+            <a:off x="2814523" y="1920240"/>
+            <a:ext cx="1964131" cy="1001268"/>
           </a:xfrm>
           <a:prstGeom prst="rect">
             <a:avLst/>
@@ -4880,12 +4555,12 @@
           <a:p>
             <a:pPr indent="0" marL="0">
               <a:lnSpc>
-                <a:spcPts val="1400"/>
+                <a:spcPts val="1500"/>
               </a:lnSpc>
               <a:buNone/>
             </a:pPr>
             <a:r>
-              <a:rPr lang="en-US" sz="950" dirty="0">
+              <a:rPr lang="en-US" sz="1000" dirty="0">
                 <a:solidFill>
                   <a:srgbClr val="1B2B34"/>
                 </a:solidFill>
@@ -4895,17 +4570,17 @@
               </a:rPr>
               <a:t>Producción</a:t>
             </a:r>
-            <a:endParaRPr lang="en-US" sz="950" dirty="0"/>
+            <a:endParaRPr lang="en-US" sz="1000" dirty="0"/>
           </a:p>
           <a:p>
             <a:pPr indent="0" marL="0">
               <a:lnSpc>
-                <a:spcPts val="1400"/>
+                <a:spcPts val="1500"/>
               </a:lnSpc>
               <a:buNone/>
             </a:pPr>
             <a:r>
-              <a:rPr lang="en-US" sz="950" dirty="0">
+              <a:rPr lang="en-US" sz="1000" dirty="0">
                 <a:solidFill>
                   <a:srgbClr val="1B2B34"/>
                 </a:solidFill>
@@ -4915,17 +4590,17 @@
               </a:rPr>
               <a:t>Fraccionamiento y envasado</a:t>
             </a:r>
-            <a:endParaRPr lang="en-US" sz="950" dirty="0"/>
+            <a:endParaRPr lang="en-US" sz="1000" dirty="0"/>
           </a:p>
           <a:p>
             <a:pPr indent="0" marL="0">
               <a:lnSpc>
-                <a:spcPts val="1400"/>
+                <a:spcPts val="1500"/>
               </a:lnSpc>
               <a:buNone/>
             </a:pPr>
             <a:r>
-              <a:rPr lang="en-US" sz="950" dirty="0">
+              <a:rPr lang="en-US" sz="1000" dirty="0">
                 <a:solidFill>
                   <a:srgbClr val="1B2B34"/>
                 </a:solidFill>
@@ -4935,17 +4610,17 @@
               </a:rPr>
               <a:t>Distribución y logística</a:t>
             </a:r>
-            <a:endParaRPr lang="en-US" sz="950" dirty="0"/>
+            <a:endParaRPr lang="en-US" sz="1000" dirty="0"/>
           </a:p>
           <a:p>
             <a:pPr indent="0" marL="0">
               <a:lnSpc>
-                <a:spcPts val="1400"/>
+                <a:spcPts val="1500"/>
               </a:lnSpc>
               <a:buNone/>
             </a:pPr>
             <a:r>
-              <a:rPr lang="en-US" sz="950" dirty="0">
+              <a:rPr lang="en-US" sz="1000" dirty="0">
                 <a:solidFill>
                   <a:srgbClr val="1B2B34"/>
                 </a:solidFill>
@@ -4955,17 +4630,17 @@
               </a:rPr>
               <a:t>Compras</a:t>
             </a:r>
-            <a:endParaRPr lang="en-US" sz="950" dirty="0"/>
+            <a:endParaRPr lang="en-US" sz="1000" dirty="0"/>
           </a:p>
           <a:p>
             <a:pPr indent="0" marL="0">
               <a:lnSpc>
-                <a:spcPts val="1400"/>
+                <a:spcPts val="1500"/>
               </a:lnSpc>
               <a:buNone/>
             </a:pPr>
             <a:r>
-              <a:rPr lang="en-US" sz="950" dirty="0">
+              <a:rPr lang="en-US" sz="1000" dirty="0">
                 <a:solidFill>
                   <a:srgbClr val="1B2B34"/>
                 </a:solidFill>
@@ -4975,24 +4650,24 @@
               </a:rPr>
               <a:t>Administración y cobranza</a:t>
             </a:r>
-            <a:endParaRPr lang="en-US" sz="950" dirty="0"/>
-          </a:p>
-        </p:txBody>
-      </p:sp>
-      <p:sp>
-        <p:nvSpPr>
-          <p:cNvPr id="10" name="Shape 8"/>
+            <a:endParaRPr lang="en-US" sz="1000" dirty="0"/>
+          </a:p>
+        </p:txBody>
+      </p:sp>
+      <p:sp>
+        <p:nvSpPr>
+          <p:cNvPr id="18" name="Shape 16"/>
           <p:cNvSpPr/>
           <p:nvPr/>
         </p:nvSpPr>
         <p:spPr>
           <a:xfrm>
-            <a:off x="2695651" y="3012948"/>
-            <a:ext cx="2201875" cy="1604772"/>
+            <a:off x="2695651" y="3095244"/>
+            <a:ext cx="2201875" cy="1421892"/>
           </a:xfrm>
           <a:prstGeom prst="roundRect">
             <a:avLst>
-              <a:gd name="adj" fmla="val 3419"/>
+              <a:gd name="adj" fmla="val 3859"/>
             </a:avLst>
           </a:prstGeom>
           <a:solidFill>
@@ -5003,13 +4678,13 @@
       </p:sp>
       <p:sp>
         <p:nvSpPr>
-          <p:cNvPr id="11" name="Text 9"/>
-          <p:cNvSpPr txBox="1"/>
-          <p:nvPr/>
-        </p:nvSpPr>
-        <p:spPr>
-          <a:xfrm>
-            <a:off x="2814523" y="3095244"/>
+          <p:cNvPr id="19" name="Text 17"/>
+          <p:cNvSpPr txBox="1"/>
+          <p:nvPr/>
+        </p:nvSpPr>
+        <p:spPr>
+          <a:xfrm>
+            <a:off x="2814523" y="3177540"/>
             <a:ext cx="1964131" cy="228600"/>
           </a:xfrm>
           <a:prstGeom prst="rect">
@@ -5042,14 +4717,14 @@
       </p:sp>
       <p:sp>
         <p:nvSpPr>
-          <p:cNvPr id="12" name="Text 10"/>
-          <p:cNvSpPr txBox="1"/>
-          <p:nvPr/>
-        </p:nvSpPr>
-        <p:spPr>
-          <a:xfrm>
-            <a:off x="2814523" y="3342132"/>
-            <a:ext cx="1964131" cy="1184148"/>
+          <p:cNvPr id="20" name="Text 18"/>
+          <p:cNvSpPr txBox="1"/>
+          <p:nvPr/>
+        </p:nvSpPr>
+        <p:spPr>
+          <a:xfrm>
+            <a:off x="2814523" y="3424428"/>
+            <a:ext cx="1964131" cy="1001268"/>
           </a:xfrm>
           <a:prstGeom prst="rect">
             <a:avLst/>
@@ -5063,12 +4738,12 @@
           <a:p>
             <a:pPr indent="0" marL="0">
               <a:lnSpc>
-                <a:spcPts val="1400"/>
+                <a:spcPts val="1500"/>
               </a:lnSpc>
               <a:buNone/>
             </a:pPr>
             <a:r>
-              <a:rPr lang="en-US" sz="950" dirty="0">
+              <a:rPr lang="en-US" sz="1000" dirty="0">
                 <a:solidFill>
                   <a:srgbClr val="1B2B34"/>
                 </a:solidFill>
@@ -5076,19 +4751,19 @@
                 <a:ea typeface="Calibri" pitchFamily="34" charset="-122"/>
                 <a:cs typeface="Calibri" pitchFamily="34" charset="-120"/>
               </a:rPr>
-              <a:t>La red de 57 clientes</a:t>
-            </a:r>
-            <a:endParaRPr lang="en-US" sz="950" dirty="0"/>
+              <a:t>La red de +50 distribuidores</a:t>
+            </a:r>
+            <a:endParaRPr lang="en-US" sz="1000" dirty="0"/>
           </a:p>
           <a:p>
             <a:pPr indent="0" marL="0">
               <a:lnSpc>
-                <a:spcPts val="1400"/>
+                <a:spcPts val="1500"/>
               </a:lnSpc>
               <a:buNone/>
             </a:pPr>
             <a:r>
-              <a:rPr lang="en-US" sz="950" dirty="0">
+              <a:rPr lang="en-US" sz="1000" dirty="0">
                 <a:solidFill>
                   <a:srgbClr val="1B2B34"/>
                 </a:solidFill>
@@ -5098,17 +4773,17 @@
               </a:rPr>
               <a:t>Planta al límite</a:t>
             </a:r>
-            <a:endParaRPr lang="en-US" sz="950" dirty="0"/>
+            <a:endParaRPr lang="en-US" sz="1000" dirty="0"/>
           </a:p>
           <a:p>
             <a:pPr indent="0" marL="0">
               <a:lnSpc>
-                <a:spcPts val="1400"/>
+                <a:spcPts val="1500"/>
               </a:lnSpc>
               <a:buNone/>
             </a:pPr>
             <a:r>
-              <a:rPr lang="en-US" sz="950" dirty="0">
+              <a:rPr lang="en-US" sz="1000" dirty="0">
                 <a:solidFill>
                   <a:srgbClr val="1B2B34"/>
                 </a:solidFill>
@@ -5116,19 +4791,19 @@
                 <a:ea typeface="Calibri" pitchFamily="34" charset="-122"/>
                 <a:cs typeface="Calibri" pitchFamily="34" charset="-120"/>
               </a:rPr>
-              <a:t>Saber en los dueños</a:t>
-            </a:r>
-            <a:endParaRPr lang="en-US" sz="950" dirty="0"/>
+              <a:t>Marca y flota propia</a:t>
+            </a:r>
+            <a:endParaRPr lang="en-US" sz="1000" dirty="0"/>
           </a:p>
           <a:p>
             <a:pPr indent="0" marL="0">
               <a:lnSpc>
-                <a:spcPts val="1400"/>
+                <a:spcPts val="1500"/>
               </a:lnSpc>
               <a:buNone/>
             </a:pPr>
             <a:r>
-              <a:rPr lang="en-US" sz="950" dirty="0">
+              <a:rPr lang="en-US" sz="1000" dirty="0">
                 <a:solidFill>
                   <a:srgbClr val="1B2B34"/>
                 </a:solidFill>
@@ -5136,62 +4811,22 @@
                 <a:ea typeface="Calibri" pitchFamily="34" charset="-122"/>
                 <a:cs typeface="Calibri" pitchFamily="34" charset="-120"/>
               </a:rPr>
-              <a:t>RNE / RNPA</a:t>
-            </a:r>
-            <a:endParaRPr lang="en-US" sz="950" dirty="0"/>
-          </a:p>
-          <a:p>
-            <a:pPr indent="0" marL="0">
-              <a:lnSpc>
-                <a:spcPts val="1400"/>
-              </a:lnSpc>
-              <a:buNone/>
-            </a:pPr>
-            <a:r>
-              <a:rPr lang="en-US" sz="950" dirty="0">
-                <a:solidFill>
-                  <a:srgbClr val="1B2B34"/>
-                </a:solidFill>
-                <a:latin typeface="Calibri" pitchFamily="34" charset="0"/>
-                <a:ea typeface="Calibri" pitchFamily="34" charset="-122"/>
-                <a:cs typeface="Calibri" pitchFamily="34" charset="-120"/>
-              </a:rPr>
-              <a:t>Marca y flota propia</a:t>
-            </a:r>
-            <a:endParaRPr lang="en-US" sz="950" dirty="0"/>
-          </a:p>
-          <a:p>
-            <a:pPr indent="0" marL="0">
-              <a:lnSpc>
-                <a:spcPts val="1400"/>
-              </a:lnSpc>
-              <a:buNone/>
-            </a:pPr>
-            <a:r>
-              <a:rPr lang="en-US" sz="950" dirty="0">
-                <a:solidFill>
-                  <a:srgbClr val="1B2B34"/>
-                </a:solidFill>
-                <a:latin typeface="Calibri" pitchFamily="34" charset="0"/>
-                <a:ea typeface="Calibri" pitchFamily="34" charset="-122"/>
-                <a:cs typeface="Calibri" pitchFamily="34" charset="-120"/>
-              </a:rPr>
-              <a:t>Planilla inexacta</a:t>
-            </a:r>
-            <a:endParaRPr lang="en-US" sz="950" dirty="0"/>
-          </a:p>
-        </p:txBody>
-      </p:sp>
-      <p:sp>
-        <p:nvSpPr>
-          <p:cNvPr id="13" name="Shape 11"/>
+              <a:t>Planilla excel inexacta</a:t>
+            </a:r>
+            <a:endParaRPr lang="en-US" sz="1000" dirty="0"/>
+          </a:p>
+        </p:txBody>
+      </p:sp>
+      <p:sp>
+        <p:nvSpPr>
+          <p:cNvPr id="21" name="Shape 19"/>
           <p:cNvSpPr/>
           <p:nvPr/>
         </p:nvSpPr>
         <p:spPr>
           <a:xfrm>
-            <a:off x="4979822" y="1325880"/>
-            <a:ext cx="2201875" cy="3291840"/>
+            <a:off x="4979822" y="1591056"/>
+            <a:ext cx="2201875" cy="2926080"/>
           </a:xfrm>
           <a:prstGeom prst="roundRect">
             <a:avLst>
@@ -5206,13 +4841,13 @@
       </p:sp>
       <p:sp>
         <p:nvSpPr>
-          <p:cNvPr id="14" name="Text 12"/>
-          <p:cNvSpPr txBox="1"/>
-          <p:nvPr/>
-        </p:nvSpPr>
-        <p:spPr>
-          <a:xfrm>
-            <a:off x="5098694" y="1408176"/>
+          <p:cNvPr id="22" name="Text 20"/>
+          <p:cNvSpPr txBox="1"/>
+          <p:nvPr/>
+        </p:nvSpPr>
+        <p:spPr>
+          <a:xfrm>
+            <a:off x="5098694" y="1673352"/>
             <a:ext cx="1964131" cy="228600"/>
           </a:xfrm>
           <a:prstGeom prst="rect">
@@ -5245,14 +4880,14 @@
       </p:sp>
       <p:sp>
         <p:nvSpPr>
-          <p:cNvPr id="15" name="Text 13"/>
-          <p:cNvSpPr txBox="1"/>
-          <p:nvPr/>
-        </p:nvSpPr>
-        <p:spPr>
-          <a:xfrm>
-            <a:off x="5098694" y="1655064"/>
-            <a:ext cx="1964131" cy="2871216"/>
+          <p:cNvPr id="23" name="Text 21"/>
+          <p:cNvSpPr txBox="1"/>
+          <p:nvPr/>
+        </p:nvSpPr>
+        <p:spPr>
+          <a:xfrm>
+            <a:off x="5098694" y="1920240"/>
+            <a:ext cx="1964131" cy="2505456"/>
           </a:xfrm>
           <a:prstGeom prst="rect">
             <a:avLst/>
@@ -5266,12 +4901,12 @@
           <a:p>
             <a:pPr indent="0" marL="0">
               <a:lnSpc>
-                <a:spcPts val="1400"/>
+                <a:spcPts val="1500"/>
               </a:lnSpc>
               <a:buNone/>
             </a:pPr>
             <a:r>
-              <a:rPr lang="en-US" sz="950" b="1" dirty="0">
+              <a:rPr lang="en-US" sz="1000" b="1" dirty="0">
                 <a:solidFill>
                   <a:srgbClr val="C8791E"/>
                 </a:solidFill>
@@ -5281,17 +4916,17 @@
               </a:rPr>
               <a:t>Rentabilidad al que revende</a:t>
             </a:r>
-            <a:endParaRPr lang="en-US" sz="950" dirty="0"/>
+            <a:endParaRPr lang="en-US" sz="1000" dirty="0"/>
           </a:p>
           <a:p>
             <a:pPr indent="0" marL="0">
               <a:lnSpc>
-                <a:spcPts val="1400"/>
+                <a:spcPts val="1500"/>
               </a:lnSpc>
               <a:buNone/>
             </a:pPr>
             <a:r>
-              <a:rPr lang="en-US" sz="950" dirty="0">
+              <a:rPr lang="en-US" sz="1000" dirty="0">
                 <a:solidFill>
                   <a:srgbClr val="C3D0D4"/>
                 </a:solidFill>
@@ -5301,17 +4936,17 @@
               </a:rPr>
               <a:t>Logística como diferencial</a:t>
             </a:r>
-            <a:endParaRPr lang="en-US" sz="950" dirty="0"/>
+            <a:endParaRPr lang="en-US" sz="1000" dirty="0"/>
           </a:p>
           <a:p>
             <a:pPr indent="0" marL="0">
               <a:lnSpc>
-                <a:spcPts val="1400"/>
+                <a:spcPts val="1500"/>
               </a:lnSpc>
               <a:buNone/>
             </a:pPr>
             <a:r>
-              <a:rPr lang="en-US" sz="950" dirty="0">
+              <a:rPr lang="en-US" sz="1000" dirty="0">
                 <a:solidFill>
                   <a:srgbClr val="C3D0D4"/>
                 </a:solidFill>
@@ -5321,17 +4956,17 @@
               </a:rPr>
               <a:t>Precio competitivo</a:t>
             </a:r>
-            <a:endParaRPr lang="en-US" sz="950" dirty="0"/>
+            <a:endParaRPr lang="en-US" sz="1000" dirty="0"/>
           </a:p>
           <a:p>
             <a:pPr indent="0" marL="0">
               <a:lnSpc>
-                <a:spcPts val="1400"/>
+                <a:spcPts val="1500"/>
               </a:lnSpc>
               <a:buNone/>
             </a:pPr>
             <a:r>
-              <a:rPr lang="en-US" sz="950" dirty="0">
+              <a:rPr lang="en-US" sz="1000" dirty="0">
                 <a:solidFill>
                   <a:srgbClr val="C3D0D4"/>
                 </a:solidFill>
@@ -5339,19 +4974,19 @@
                 <a:ea typeface="Calibri" pitchFamily="34" charset="-122"/>
                 <a:cs typeface="Calibri" pitchFamily="34" charset="-120"/>
               </a:rPr>
-              <a:t>Portafolio en un proveedor</a:t>
-            </a:r>
-            <a:endParaRPr lang="en-US" sz="950" dirty="0"/>
+              <a:t>Varios formatos por producto</a:t>
+            </a:r>
+            <a:endParaRPr lang="en-US" sz="1000" dirty="0"/>
           </a:p>
           <a:p>
             <a:pPr indent="0" marL="0">
               <a:lnSpc>
-                <a:spcPts val="1400"/>
+                <a:spcPts val="1500"/>
               </a:lnSpc>
               <a:buNone/>
             </a:pPr>
             <a:r>
-              <a:rPr lang="en-US" sz="950" dirty="0">
+              <a:rPr lang="en-US" sz="1000" dirty="0">
                 <a:solidFill>
                   <a:srgbClr val="C3D0D4"/>
                 </a:solidFill>
@@ -5359,63 +4994,43 @@
                 <a:ea typeface="Calibri" pitchFamily="34" charset="-122"/>
                 <a:cs typeface="Calibri" pitchFamily="34" charset="-120"/>
               </a:rPr>
-              <a:t>Formatos de 1 y 2 Kg</a:t>
-            </a:r>
-            <a:endParaRPr lang="en-US" sz="950" dirty="0"/>
-          </a:p>
-          <a:p>
-            <a:pPr indent="0" marL="0">
-              <a:lnSpc>
-                <a:spcPts val="1400"/>
-              </a:lnSpc>
-              <a:buNone/>
-            </a:pPr>
-            <a:r>
-              <a:rPr lang="en-US" sz="950" dirty="0">
-                <a:solidFill>
-                  <a:srgbClr val="C3D0D4"/>
-                </a:solidFill>
-                <a:latin typeface="Calibri" pitchFamily="34" charset="0"/>
-                <a:ea typeface="Calibri" pitchFamily="34" charset="-122"/>
-                <a:cs typeface="Calibri" pitchFamily="34" charset="-120"/>
-              </a:rPr>
               <a:t>Fraccionamiento de terceros</a:t>
             </a:r>
-            <a:endParaRPr lang="en-US" sz="950" dirty="0"/>
-          </a:p>
-        </p:txBody>
-      </p:sp>
-      <p:sp>
-        <p:nvSpPr>
-          <p:cNvPr id="16" name="Shape 14"/>
+            <a:endParaRPr lang="en-US" sz="1000" dirty="0"/>
+          </a:p>
+        </p:txBody>
+      </p:sp>
+      <p:sp>
+        <p:nvSpPr>
+          <p:cNvPr id="24" name="Shape 22"/>
           <p:cNvSpPr/>
           <p:nvPr/>
         </p:nvSpPr>
         <p:spPr>
           <a:xfrm>
-            <a:off x="7263994" y="1325880"/>
-            <a:ext cx="2201875" cy="1604772"/>
+            <a:off x="7263994" y="1591056"/>
+            <a:ext cx="2201875" cy="1421892"/>
           </a:xfrm>
           <a:prstGeom prst="roundRect">
             <a:avLst>
-              <a:gd name="adj" fmla="val 3419"/>
+              <a:gd name="adj" fmla="val 3859"/>
             </a:avLst>
           </a:prstGeom>
           <a:solidFill>
-            <a:srgbClr val="EFEADC"/>
+            <a:srgbClr val="DDE8EF"/>
           </a:solidFill>
           <a:ln/>
         </p:spPr>
       </p:sp>
       <p:sp>
         <p:nvSpPr>
-          <p:cNvPr id="17" name="Text 15"/>
-          <p:cNvSpPr txBox="1"/>
-          <p:nvPr/>
-        </p:nvSpPr>
-        <p:spPr>
-          <a:xfrm>
-            <a:off x="7382866" y="1408176"/>
+          <p:cNvPr id="25" name="Text 23"/>
+          <p:cNvSpPr txBox="1"/>
+          <p:nvPr/>
+        </p:nvSpPr>
+        <p:spPr>
+          <a:xfrm>
+            <a:off x="7382866" y="1673352"/>
             <a:ext cx="1964131" cy="228600"/>
           </a:xfrm>
           <a:prstGeom prst="rect">
@@ -5434,7 +5049,7 @@
             <a:r>
               <a:rPr lang="en-US" sz="1050" b="1" spc="50" kern="0" dirty="0">
                 <a:solidFill>
-                  <a:srgbClr val="55636B"/>
+                  <a:srgbClr val="1E5C85"/>
                 </a:solidFill>
                 <a:latin typeface="Arial" pitchFamily="34" charset="0"/>
                 <a:ea typeface="Arial" pitchFamily="34" charset="-122"/>
@@ -5448,14 +5063,14 @@
       </p:sp>
       <p:sp>
         <p:nvSpPr>
-          <p:cNvPr id="18" name="Text 16"/>
-          <p:cNvSpPr txBox="1"/>
-          <p:nvPr/>
-        </p:nvSpPr>
-        <p:spPr>
-          <a:xfrm>
-            <a:off x="7382866" y="1655064"/>
-            <a:ext cx="1964131" cy="1184148"/>
+          <p:cNvPr id="26" name="Text 24"/>
+          <p:cNvSpPr txBox="1"/>
+          <p:nvPr/>
+        </p:nvSpPr>
+        <p:spPr>
+          <a:xfrm>
+            <a:off x="7382866" y="1920240"/>
+            <a:ext cx="1964131" cy="1001268"/>
           </a:xfrm>
           <a:prstGeom prst="rect">
             <a:avLst/>
@@ -5469,12 +5084,12 @@
           <a:p>
             <a:pPr indent="0" marL="0">
               <a:lnSpc>
-                <a:spcPts val="1400"/>
+                <a:spcPts val="1500"/>
               </a:lnSpc>
               <a:buNone/>
             </a:pPr>
             <a:r>
-              <a:rPr lang="en-US" sz="950" dirty="0">
+              <a:rPr lang="en-US" sz="1000" dirty="0">
                 <a:solidFill>
                   <a:srgbClr val="1B2B34"/>
                 </a:solidFill>
@@ -5484,17 +5099,17 @@
               </a:rPr>
               <a:t>La mantiene la empresa</a:t>
             </a:r>
-            <a:endParaRPr lang="en-US" sz="950" dirty="0"/>
+            <a:endParaRPr lang="en-US" sz="1000" dirty="0"/>
           </a:p>
           <a:p>
             <a:pPr indent="0" marL="0">
               <a:lnSpc>
-                <a:spcPts val="1400"/>
+                <a:spcPts val="1500"/>
               </a:lnSpc>
               <a:buNone/>
             </a:pPr>
             <a:r>
-              <a:rPr lang="en-US" sz="950" dirty="0">
+              <a:rPr lang="en-US" sz="1000" dirty="0">
                 <a:solidFill>
                   <a:srgbClr val="1B2B34"/>
                 </a:solidFill>
@@ -5504,17 +5119,17 @@
               </a:rPr>
               <a:t>Exclusividad territorial</a:t>
             </a:r>
-            <a:endParaRPr lang="en-US" sz="950" dirty="0"/>
+            <a:endParaRPr lang="en-US" sz="1000" dirty="0"/>
           </a:p>
           <a:p>
             <a:pPr indent="0" marL="0">
               <a:lnSpc>
-                <a:spcPts val="1400"/>
+                <a:spcPts val="1500"/>
               </a:lnSpc>
               <a:buNone/>
             </a:pPr>
             <a:r>
-              <a:rPr lang="en-US" sz="950" dirty="0">
+              <a:rPr lang="en-US" sz="1000" dirty="0">
                 <a:solidFill>
                   <a:srgbClr val="1B2B34"/>
                 </a:solidFill>
@@ -5522,63 +5137,43 @@
                 <a:ea typeface="Calibri" pitchFamily="34" charset="-122"/>
                 <a:cs typeface="Calibri" pitchFamily="34" charset="-120"/>
               </a:rPr>
-              <a:t>Horario acotado</a:t>
-            </a:r>
-            <a:endParaRPr lang="en-US" sz="950" dirty="0"/>
-          </a:p>
-          <a:p>
-            <a:pPr indent="0" marL="0">
-              <a:lnSpc>
-                <a:spcPts val="1400"/>
-              </a:lnSpc>
-              <a:buNone/>
-            </a:pPr>
-            <a:r>
-              <a:rPr lang="en-US" sz="950" dirty="0">
-                <a:solidFill>
-                  <a:srgbClr val="1B2B34"/>
-                </a:solidFill>
-                <a:latin typeface="Calibri" pitchFamily="34" charset="0"/>
-                <a:ea typeface="Calibri" pitchFamily="34" charset="-122"/>
-                <a:cs typeface="Calibri" pitchFamily="34" charset="-120"/>
-              </a:rPr>
               <a:t>Sin CRM</a:t>
             </a:r>
-            <a:endParaRPr lang="en-US" sz="950" dirty="0"/>
-          </a:p>
-        </p:txBody>
-      </p:sp>
-      <p:sp>
-        <p:nvSpPr>
-          <p:cNvPr id="19" name="Shape 17"/>
+            <a:endParaRPr lang="en-US" sz="1000" dirty="0"/>
+          </a:p>
+        </p:txBody>
+      </p:sp>
+      <p:sp>
+        <p:nvSpPr>
+          <p:cNvPr id="27" name="Shape 25"/>
           <p:cNvSpPr/>
           <p:nvPr/>
         </p:nvSpPr>
         <p:spPr>
           <a:xfrm>
-            <a:off x="7263994" y="3012948"/>
-            <a:ext cx="2201875" cy="1604772"/>
+            <a:off x="7263994" y="3095244"/>
+            <a:ext cx="2201875" cy="1421892"/>
           </a:xfrm>
           <a:prstGeom prst="roundRect">
             <a:avLst>
-              <a:gd name="adj" fmla="val 3419"/>
+              <a:gd name="adj" fmla="val 3859"/>
             </a:avLst>
           </a:prstGeom>
           <a:solidFill>
-            <a:srgbClr val="EFEADC"/>
+            <a:srgbClr val="DDE8EF"/>
           </a:solidFill>
           <a:ln/>
         </p:spPr>
       </p:sp>
       <p:sp>
         <p:nvSpPr>
-          <p:cNvPr id="20" name="Text 18"/>
-          <p:cNvSpPr txBox="1"/>
-          <p:nvPr/>
-        </p:nvSpPr>
-        <p:spPr>
-          <a:xfrm>
-            <a:off x="7382866" y="3095244"/>
+          <p:cNvPr id="28" name="Text 26"/>
+          <p:cNvSpPr txBox="1"/>
+          <p:nvPr/>
+        </p:nvSpPr>
+        <p:spPr>
+          <a:xfrm>
+            <a:off x="7382866" y="3177540"/>
             <a:ext cx="1964131" cy="228600"/>
           </a:xfrm>
           <a:prstGeom prst="rect">
@@ -5597,7 +5192,7 @@
             <a:r>
               <a:rPr lang="en-US" sz="1050" b="1" spc="50" kern="0" dirty="0">
                 <a:solidFill>
-                  <a:srgbClr val="55636B"/>
+                  <a:srgbClr val="1E5C85"/>
                 </a:solidFill>
                 <a:latin typeface="Arial" pitchFamily="34" charset="0"/>
                 <a:ea typeface="Arial" pitchFamily="34" charset="-122"/>
@@ -5611,14 +5206,14 @@
       </p:sp>
       <p:sp>
         <p:nvSpPr>
-          <p:cNvPr id="21" name="Text 19"/>
-          <p:cNvSpPr txBox="1"/>
-          <p:nvPr/>
-        </p:nvSpPr>
-        <p:spPr>
-          <a:xfrm>
-            <a:off x="7382866" y="3342132"/>
-            <a:ext cx="1964131" cy="1184148"/>
+          <p:cNvPr id="29" name="Text 27"/>
+          <p:cNvSpPr txBox="1"/>
+          <p:nvPr/>
+        </p:nvSpPr>
+        <p:spPr>
+          <a:xfrm>
+            <a:off x="7382866" y="3424428"/>
+            <a:ext cx="1964131" cy="1001268"/>
           </a:xfrm>
           <a:prstGeom prst="rect">
             <a:avLst/>
@@ -5632,12 +5227,12 @@
           <a:p>
             <a:pPr indent="0" marL="0">
               <a:lnSpc>
-                <a:spcPts val="1400"/>
+                <a:spcPts val="1500"/>
               </a:lnSpc>
               <a:buNone/>
             </a:pPr>
             <a:r>
-              <a:rPr lang="en-US" sz="950" dirty="0">
+              <a:rPr lang="en-US" sz="1000" dirty="0">
                 <a:solidFill>
                   <a:srgbClr val="1B2B34"/>
                 </a:solidFill>
@@ -5647,17 +5242,17 @@
               </a:rPr>
               <a:t>Flota, fletes y retiro</a:t>
             </a:r>
-            <a:endParaRPr lang="en-US" sz="950" dirty="0"/>
+            <a:endParaRPr lang="en-US" sz="1000" dirty="0"/>
           </a:p>
           <a:p>
             <a:pPr indent="0" marL="0">
               <a:lnSpc>
-                <a:spcPts val="1400"/>
+                <a:spcPts val="1500"/>
               </a:lnSpc>
               <a:buNone/>
             </a:pPr>
             <a:r>
-              <a:rPr lang="en-US" sz="950" dirty="0">
+              <a:rPr lang="en-US" sz="1000" dirty="0">
                 <a:solidFill>
                   <a:srgbClr val="1B2B34"/>
                 </a:solidFill>
@@ -5665,19 +5260,19 @@
                 <a:ea typeface="Calibri" pitchFamily="34" charset="-122"/>
                 <a:cs typeface="Calibri" pitchFamily="34" charset="-120"/>
               </a:rPr>
-              <a:t>Viajante con zona</a:t>
-            </a:r>
-            <a:endParaRPr lang="en-US" sz="950" dirty="0"/>
+              <a:t>Viajante con zona específica</a:t>
+            </a:r>
+            <a:endParaRPr lang="en-US" sz="1000" dirty="0"/>
           </a:p>
           <a:p>
             <a:pPr indent="0" marL="0">
               <a:lnSpc>
-                <a:spcPts val="1400"/>
+                <a:spcPts val="1500"/>
               </a:lnSpc>
               <a:buNone/>
             </a:pPr>
             <a:r>
-              <a:rPr lang="en-US" sz="950" dirty="0">
+              <a:rPr lang="en-US" sz="1000" dirty="0">
                 <a:solidFill>
                   <a:srgbClr val="1B2B34"/>
                 </a:solidFill>
@@ -5687,17 +5282,17 @@
               </a:rPr>
               <a:t>WhatsApp y teléfono</a:t>
             </a:r>
-            <a:endParaRPr lang="en-US" sz="950" dirty="0"/>
+            <a:endParaRPr lang="en-US" sz="1000" dirty="0"/>
           </a:p>
           <a:p>
             <a:pPr indent="0" marL="0">
               <a:lnSpc>
-                <a:spcPts val="1400"/>
+                <a:spcPts val="1500"/>
               </a:lnSpc>
               <a:buNone/>
             </a:pPr>
             <a:r>
-              <a:rPr lang="en-US" sz="950" dirty="0">
+              <a:rPr lang="en-US" sz="1000" dirty="0">
                 <a:solidFill>
                   <a:srgbClr val="1B2B34"/>
                 </a:solidFill>
@@ -5705,19 +5300,19 @@
                 <a:ea typeface="Calibri" pitchFamily="34" charset="-122"/>
                 <a:cs typeface="Calibri" pitchFamily="34" charset="-120"/>
               </a:rPr>
-              <a:t>Redes: marca, no venta</a:t>
-            </a:r>
-            <a:endParaRPr lang="en-US" sz="950" dirty="0"/>
+              <a:t>Redes: marca</a:t>
+            </a:r>
+            <a:endParaRPr lang="en-US" sz="1000" dirty="0"/>
           </a:p>
           <a:p>
             <a:pPr indent="0" marL="0">
               <a:lnSpc>
-                <a:spcPts val="1400"/>
+                <a:spcPts val="1500"/>
               </a:lnSpc>
               <a:buNone/>
             </a:pPr>
             <a:r>
-              <a:rPr lang="en-US" sz="950" dirty="0">
+              <a:rPr lang="en-US" sz="1000" dirty="0">
                 <a:solidFill>
                   <a:srgbClr val="1B2B34"/>
                 </a:solidFill>
@@ -5725,22 +5320,22 @@
                 <a:ea typeface="Calibri" pitchFamily="34" charset="-122"/>
                 <a:cs typeface="Calibri" pitchFamily="34" charset="-120"/>
               </a:rPr>
-              <a:t>Sin tienda operativa</a:t>
-            </a:r>
-            <a:endParaRPr lang="en-US" sz="950" dirty="0"/>
-          </a:p>
-        </p:txBody>
-      </p:sp>
-      <p:sp>
-        <p:nvSpPr>
-          <p:cNvPr id="22" name="Shape 20"/>
+              <a:t>Sin tienda online</a:t>
+            </a:r>
+            <a:endParaRPr lang="en-US" sz="1000" dirty="0"/>
+          </a:p>
+        </p:txBody>
+      </p:sp>
+      <p:sp>
+        <p:nvSpPr>
+          <p:cNvPr id="30" name="Shape 28"/>
           <p:cNvSpPr/>
           <p:nvPr/>
         </p:nvSpPr>
         <p:spPr>
           <a:xfrm>
-            <a:off x="9548165" y="1325880"/>
-            <a:ext cx="2201875" cy="3291840"/>
+            <a:off x="9548165" y="1591056"/>
+            <a:ext cx="2201875" cy="2926080"/>
           </a:xfrm>
           <a:prstGeom prst="roundRect">
             <a:avLst>
@@ -5748,20 +5343,20 @@
             </a:avLst>
           </a:prstGeom>
           <a:solidFill>
-            <a:srgbClr val="EFEADC"/>
+            <a:srgbClr val="DDE8EF"/>
           </a:solidFill>
           <a:ln/>
         </p:spPr>
       </p:sp>
       <p:sp>
         <p:nvSpPr>
-          <p:cNvPr id="23" name="Text 21"/>
-          <p:cNvSpPr txBox="1"/>
-          <p:nvPr/>
-        </p:nvSpPr>
-        <p:spPr>
-          <a:xfrm>
-            <a:off x="9667037" y="1408176"/>
+          <p:cNvPr id="31" name="Text 29"/>
+          <p:cNvSpPr txBox="1"/>
+          <p:nvPr/>
+        </p:nvSpPr>
+        <p:spPr>
+          <a:xfrm>
+            <a:off x="9667037" y="1673352"/>
             <a:ext cx="1964131" cy="228600"/>
           </a:xfrm>
           <a:prstGeom prst="rect">
@@ -5780,7 +5375,7 @@
             <a:r>
               <a:rPr lang="en-US" sz="1050" b="1" spc="50" kern="0" dirty="0">
                 <a:solidFill>
-                  <a:srgbClr val="55636B"/>
+                  <a:srgbClr val="1E5C85"/>
                 </a:solidFill>
                 <a:latin typeface="Arial" pitchFamily="34" charset="0"/>
                 <a:ea typeface="Arial" pitchFamily="34" charset="-122"/>
@@ -5794,14 +5389,14 @@
       </p:sp>
       <p:sp>
         <p:nvSpPr>
-          <p:cNvPr id="24" name="Text 22"/>
-          <p:cNvSpPr txBox="1"/>
-          <p:nvPr/>
-        </p:nvSpPr>
-        <p:spPr>
-          <a:xfrm>
-            <a:off x="9667037" y="1655064"/>
-            <a:ext cx="1964131" cy="2871216"/>
+          <p:cNvPr id="32" name="Text 30"/>
+          <p:cNvSpPr txBox="1"/>
+          <p:nvPr/>
+        </p:nvSpPr>
+        <p:spPr>
+          <a:xfrm>
+            <a:off x="9667037" y="1920240"/>
+            <a:ext cx="1964131" cy="2505456"/>
           </a:xfrm>
           <a:prstGeom prst="rect">
             <a:avLst/>
@@ -5815,12 +5410,12 @@
           <a:p>
             <a:pPr indent="0" marL="0">
               <a:lnSpc>
-                <a:spcPts val="1400"/>
+                <a:spcPts val="1500"/>
               </a:lnSpc>
               <a:buNone/>
             </a:pPr>
             <a:r>
-              <a:rPr lang="en-US" sz="950" dirty="0">
+              <a:rPr lang="en-US" sz="1000" dirty="0">
                 <a:solidFill>
                   <a:srgbClr val="1B2B34"/>
                 </a:solidFill>
@@ -5830,17 +5425,17 @@
               </a:rPr>
               <a:t>57 distribuidores mayoristas</a:t>
             </a:r>
-            <a:endParaRPr lang="en-US" sz="950" dirty="0"/>
+            <a:endParaRPr lang="en-US" sz="1000" dirty="0"/>
           </a:p>
           <a:p>
             <a:pPr indent="0" marL="0">
               <a:lnSpc>
-                <a:spcPts val="1400"/>
+                <a:spcPts val="1500"/>
               </a:lnSpc>
               <a:buNone/>
             </a:pPr>
             <a:r>
-              <a:rPr lang="en-US" sz="950" dirty="0">
+              <a:rPr lang="en-US" sz="1000" dirty="0">
                 <a:solidFill>
                   <a:srgbClr val="1B2B34"/>
                 </a:solidFill>
@@ -5850,17 +5445,17 @@
               </a:rPr>
               <a:t>7 provincias, con exclusividad</a:t>
             </a:r>
-            <a:endParaRPr lang="en-US" sz="950" dirty="0"/>
+            <a:endParaRPr lang="en-US" sz="1000" dirty="0"/>
           </a:p>
           <a:p>
             <a:pPr indent="0" marL="0">
               <a:lnSpc>
-                <a:spcPts val="1400"/>
+                <a:spcPts val="1500"/>
               </a:lnSpc>
               <a:buNone/>
             </a:pPr>
             <a:r>
-              <a:rPr lang="en-US" sz="950" dirty="0">
+              <a:rPr lang="en-US" sz="1000" dirty="0">
                 <a:solidFill>
                   <a:srgbClr val="1B2B34"/>
                 </a:solidFill>
@@ -5870,17 +5465,17 @@
               </a:rPr>
               <a:t>Aiello, única cadena, San Luis</a:t>
             </a:r>
-            <a:endParaRPr lang="en-US" sz="950" dirty="0"/>
+            <a:endParaRPr lang="en-US" sz="1000" dirty="0"/>
           </a:p>
           <a:p>
             <a:pPr indent="0" marL="0">
               <a:lnSpc>
-                <a:spcPts val="1400"/>
+                <a:spcPts val="1500"/>
               </a:lnSpc>
               <a:buNone/>
             </a:pPr>
             <a:r>
-              <a:rPr lang="en-US" sz="950" dirty="0">
+              <a:rPr lang="en-US" sz="1000" dirty="0">
                 <a:solidFill>
                   <a:srgbClr val="1B2B34"/>
                 </a:solidFill>
@@ -5890,44 +5485,24 @@
               </a:rPr>
               <a:t>Nunca al consumidor final</a:t>
             </a:r>
-            <a:endParaRPr lang="en-US" sz="950" dirty="0"/>
-          </a:p>
-          <a:p>
-            <a:pPr indent="0" marL="0">
-              <a:lnSpc>
-                <a:spcPts val="1400"/>
-              </a:lnSpc>
-              <a:buNone/>
-            </a:pPr>
-            <a:r>
-              <a:rPr lang="en-US" sz="950" b="1" dirty="0">
-                <a:solidFill>
-                  <a:srgbClr val="55636B"/>
-                </a:solidFill>
-                <a:latin typeface="Calibri" pitchFamily="34" charset="0"/>
-                <a:ea typeface="Calibri" pitchFamily="34" charset="-122"/>
-                <a:cs typeface="Calibri" pitchFamily="34" charset="-120"/>
-              </a:rPr>
-              <a:t>61% de la red en Patagonia. Mendoza, apenas el 10%.</a:t>
-            </a:r>
-            <a:endParaRPr lang="en-US" sz="950" dirty="0"/>
-          </a:p>
-        </p:txBody>
-      </p:sp>
-      <p:sp>
-        <p:nvSpPr>
-          <p:cNvPr id="25" name="Shape 23"/>
+            <a:endParaRPr lang="en-US" sz="1000" dirty="0"/>
+          </a:p>
+        </p:txBody>
+      </p:sp>
+      <p:sp>
+        <p:nvSpPr>
+          <p:cNvPr id="33" name="Shape 31"/>
           <p:cNvSpPr/>
           <p:nvPr/>
         </p:nvSpPr>
         <p:spPr>
           <a:xfrm>
-            <a:off x="411480" y="4700016"/>
-            <a:ext cx="6770218" cy="1234440"/>
+            <a:off x="411480" y="5020056"/>
+            <a:ext cx="6770218" cy="1097280"/>
           </a:xfrm>
           <a:prstGeom prst="roundRect">
             <a:avLst>
-              <a:gd name="adj" fmla="val 4444"/>
+              <a:gd name="adj" fmla="val 5000"/>
             </a:avLst>
           </a:prstGeom>
           <a:solidFill>
@@ -5938,13 +5513,13 @@
       </p:sp>
       <p:sp>
         <p:nvSpPr>
-          <p:cNvPr id="26" name="Text 24"/>
-          <p:cNvSpPr txBox="1"/>
-          <p:nvPr/>
-        </p:nvSpPr>
-        <p:spPr>
-          <a:xfrm>
-            <a:off x="530352" y="4782312"/>
+          <p:cNvPr id="34" name="Text 32"/>
+          <p:cNvSpPr txBox="1"/>
+          <p:nvPr/>
+        </p:nvSpPr>
+        <p:spPr>
+          <a:xfrm>
+            <a:off x="530352" y="5102352"/>
             <a:ext cx="6532474" cy="228600"/>
           </a:xfrm>
           <a:prstGeom prst="rect">
@@ -5977,14 +5552,14 @@
       </p:sp>
       <p:sp>
         <p:nvSpPr>
-          <p:cNvPr id="27" name="Text 25"/>
-          <p:cNvSpPr txBox="1"/>
-          <p:nvPr/>
-        </p:nvSpPr>
-        <p:spPr>
-          <a:xfrm>
-            <a:off x="530352" y="5029200"/>
-            <a:ext cx="6532474" cy="813816"/>
+          <p:cNvPr id="35" name="Text 33"/>
+          <p:cNvSpPr txBox="1"/>
+          <p:nvPr/>
+        </p:nvSpPr>
+        <p:spPr>
+          <a:xfrm>
+            <a:off x="530352" y="5349240"/>
+            <a:ext cx="6532474" cy="676656"/>
           </a:xfrm>
           <a:prstGeom prst="rect">
             <a:avLst/>
@@ -5998,12 +5573,12 @@
           <a:p>
             <a:pPr indent="0" marL="0">
               <a:lnSpc>
-                <a:spcPts val="1400"/>
+                <a:spcPts val="1500"/>
               </a:lnSpc>
               <a:buNone/>
             </a:pPr>
             <a:r>
-              <a:rPr lang="en-US" sz="950" dirty="0">
+              <a:rPr lang="en-US" sz="1000" dirty="0">
                 <a:solidFill>
                   <a:srgbClr val="1B2B34"/>
                 </a:solidFill>
@@ -6011,46 +5586,26 @@
                 <a:ea typeface="Calibri" pitchFamily="34" charset="-122"/>
                 <a:cs typeface="Calibri" pitchFamily="34" charset="-120"/>
               </a:rPr>
-              <a:t>Materia prima · packaging y film (+25 formatos) · mano de obra · logística y flete · energía · costo financiero</a:t>
-            </a:r>
-            <a:endParaRPr lang="en-US" sz="950" dirty="0"/>
-          </a:p>
-          <a:p>
-            <a:pPr indent="0" marL="0">
-              <a:lnSpc>
-                <a:spcPts val="1400"/>
-              </a:lnSpc>
-              <a:buNone/>
-            </a:pPr>
-            <a:r>
-              <a:rPr lang="en-US" sz="950" b="1" dirty="0">
-                <a:solidFill>
-                  <a:srgbClr val="A33B22"/>
-                </a:solidFill>
-                <a:latin typeface="Calibri" pitchFamily="34" charset="0"/>
-                <a:ea typeface="Calibri" pitchFamily="34" charset="-122"/>
-                <a:cs typeface="Calibri" pitchFamily="34" charset="-120"/>
-              </a:rPr>
-              <a:t>Ningún costo está asignado por producto. Se fija precio sobre una base que se sabe equivocada.</a:t>
-            </a:r>
-            <a:endParaRPr lang="en-US" sz="950" dirty="0"/>
-          </a:p>
-        </p:txBody>
-      </p:sp>
-      <p:sp>
-        <p:nvSpPr>
-          <p:cNvPr id="28" name="Shape 26"/>
+              <a:t>Materia prima · packaging y film (+25 formatos) · mano de obra · logística y flete</a:t>
+            </a:r>
+            <a:endParaRPr lang="en-US" sz="1000" dirty="0"/>
+          </a:p>
+        </p:txBody>
+      </p:sp>
+      <p:sp>
+        <p:nvSpPr>
+          <p:cNvPr id="36" name="Shape 34"/>
           <p:cNvSpPr/>
           <p:nvPr/>
         </p:nvSpPr>
         <p:spPr>
           <a:xfrm>
-            <a:off x="7263994" y="4700016"/>
-            <a:ext cx="4486046" cy="1234440"/>
+            <a:off x="7263994" y="5020056"/>
+            <a:ext cx="4486046" cy="1097280"/>
           </a:xfrm>
           <a:prstGeom prst="roundRect">
             <a:avLst>
-              <a:gd name="adj" fmla="val 4444"/>
+              <a:gd name="adj" fmla="val 5000"/>
             </a:avLst>
           </a:prstGeom>
           <a:solidFill>
@@ -6061,13 +5616,13 @@
       </p:sp>
       <p:sp>
         <p:nvSpPr>
-          <p:cNvPr id="29" name="Text 27"/>
-          <p:cNvSpPr txBox="1"/>
-          <p:nvPr/>
-        </p:nvSpPr>
-        <p:spPr>
-          <a:xfrm>
-            <a:off x="7382866" y="4782312"/>
+          <p:cNvPr id="37" name="Text 35"/>
+          <p:cNvSpPr txBox="1"/>
+          <p:nvPr/>
+        </p:nvSpPr>
+        <p:spPr>
+          <a:xfrm>
+            <a:off x="7382866" y="5102352"/>
             <a:ext cx="4248302" cy="228600"/>
           </a:xfrm>
           <a:prstGeom prst="rect">
@@ -6100,14 +5655,14 @@
       </p:sp>
       <p:sp>
         <p:nvSpPr>
-          <p:cNvPr id="30" name="Text 28"/>
-          <p:cNvSpPr txBox="1"/>
-          <p:nvPr/>
-        </p:nvSpPr>
-        <p:spPr>
-          <a:xfrm>
-            <a:off x="7382866" y="5029200"/>
-            <a:ext cx="4248302" cy="813816"/>
+          <p:cNvPr id="38" name="Text 36"/>
+          <p:cNvSpPr txBox="1"/>
+          <p:nvPr/>
+        </p:nvSpPr>
+        <p:spPr>
+          <a:xfrm>
+            <a:off x="7382866" y="5349240"/>
+            <a:ext cx="4248302" cy="676656"/>
           </a:xfrm>
           <a:prstGeom prst="rect">
             <a:avLst/>
@@ -6121,12 +5676,12 @@
           <a:p>
             <a:pPr indent="0" marL="0">
               <a:lnSpc>
-                <a:spcPts val="1400"/>
+                <a:spcPts val="1500"/>
               </a:lnSpc>
               <a:buNone/>
             </a:pPr>
             <a:r>
-              <a:rPr lang="en-US" sz="950" dirty="0">
+              <a:rPr lang="en-US" sz="1000" dirty="0">
                 <a:solidFill>
                   <a:srgbClr val="1B2B34"/>
                 </a:solidFill>
@@ -6136,27 +5691,7 @@
               </a:rPr>
               <a:t>Venta mayorista · Aiello · producto fraccionado</a:t>
             </a:r>
-            <a:endParaRPr lang="en-US" sz="950" dirty="0"/>
-          </a:p>
-          <a:p>
-            <a:pPr indent="0" marL="0">
-              <a:lnSpc>
-                <a:spcPts val="1400"/>
-              </a:lnSpc>
-              <a:buNone/>
-            </a:pPr>
-            <a:r>
-              <a:rPr lang="en-US" sz="950" b="1" dirty="0">
-                <a:solidFill>
-                  <a:srgbClr val="2F6B5E"/>
-                </a:solidFill>
-                <a:latin typeface="Calibri" pitchFamily="34" charset="0"/>
-                <a:ea typeface="Calibri" pitchFamily="34" charset="-122"/>
-                <a:cs typeface="Calibri" pitchFamily="34" charset="-120"/>
-              </a:rPr>
-              <a:t>Contado, cuenta corriente a 30 días y cheques diferidos</a:t>
-            </a:r>
-            <a:endParaRPr lang="en-US" sz="950" dirty="0"/>
+            <a:endParaRPr lang="en-US" sz="1000" dirty="0"/>
           </a:p>
         </p:txBody>
       </p:sp>
@@ -6225,7 +5760,7 @@
                 <a:ea typeface="Arial" pitchFamily="34" charset="-122"/>
                 <a:cs typeface="Arial" pitchFamily="34" charset="-120"/>
               </a:rPr>
-              <a:t>LO QUE MUESTRA EL CANVAS</a:t>
+              <a:t>MADUREZ DIGITAL</a:t>
             </a:r>
             <a:endParaRPr lang="en-US" sz="3400" dirty="0"/>
           </a:p>
@@ -6239,8 +5774,8 @@
         </p:nvSpPr>
         <p:spPr>
           <a:xfrm>
-            <a:off x="594360" y="1188720"/>
-            <a:ext cx="10972800" cy="914400"/>
+            <a:off x="594360" y="1042416"/>
+            <a:ext cx="10972800" cy="347472"/>
           </a:xfrm>
           <a:prstGeom prst="rect">
             <a:avLst/>
@@ -6253,40 +5788,154 @@
           <a:lstStyle/>
           <a:p>
             <a:pPr indent="0" marL="0">
-              <a:lnSpc>
-                <a:spcPts val="3200"/>
-              </a:lnSpc>
-              <a:buNone/>
-            </a:pPr>
-            <a:r>
-              <a:rPr lang="en-US" sz="2400" b="1" dirty="0">
-                <a:solidFill>
-                  <a:srgbClr val="1B2B34"/>
+              <a:buNone/>
+            </a:pPr>
+            <a:r>
+              <a:rPr lang="en-US" sz="1500" i="1" dirty="0">
+                <a:solidFill>
+                  <a:srgbClr val="55636B"/>
+                </a:solidFill>
+                <a:latin typeface="Calibri" pitchFamily="34" charset="0"/>
+                <a:ea typeface="Calibri" pitchFamily="34" charset="-122"/>
+                <a:cs typeface="Calibri" pitchFamily="34" charset="-120"/>
+              </a:rPr>
+              <a:t>El modelo de la cátedra: 28 preguntas sobre 7 dimensiones, escala de 1 a 5</a:t>
+            </a:r>
+            <a:endParaRPr lang="en-US" sz="1500" dirty="0"/>
+          </a:p>
+        </p:txBody>
+      </p:sp>
+      <p:sp>
+        <p:nvSpPr>
+          <p:cNvPr id="4" name="Text 2"/>
+          <p:cNvSpPr txBox="1"/>
+          <p:nvPr/>
+        </p:nvSpPr>
+        <p:spPr>
+          <a:xfrm>
+            <a:off x="594360" y="1691640"/>
+            <a:ext cx="3017520" cy="1371600"/>
+          </a:xfrm>
+          <a:prstGeom prst="rect">
+            <a:avLst/>
+          </a:prstGeom>
+          <a:noFill/>
+          <a:ln/>
+        </p:spPr>
+        <p:txBody>
+          <a:bodyPr wrap="square" lIns="0" tIns="0" rIns="0" bIns="0" rtlCol="0" anchor="ctr"/>
+          <a:lstStyle/>
+          <a:p>
+            <a:pPr indent="0" marL="0">
+              <a:buNone/>
+            </a:pPr>
+            <a:r>
+              <a:rPr lang="en-US" sz="8800" b="1" dirty="0">
+                <a:solidFill>
+                  <a:srgbClr val="A33B22"/>
                 </a:solidFill>
                 <a:latin typeface="Arial" pitchFamily="34" charset="0"/>
                 <a:ea typeface="Arial" pitchFamily="34" charset="-122"/>
                 <a:cs typeface="Arial" pitchFamily="34" charset="-120"/>
               </a:rPr>
-              <a:t>No le vende sabor al consumidor: le vende rentabilidad al canal. Es liderazgo en costos, no diferenciación.</a:t>
-            </a:r>
-            <a:endParaRPr lang="en-US" sz="2400" dirty="0"/>
-          </a:p>
-        </p:txBody>
-      </p:sp>
-      <p:sp>
-        <p:nvSpPr>
-          <p:cNvPr id="4" name="Shape 2"/>
+              <a:t>1.79</a:t>
+            </a:r>
+            <a:endParaRPr lang="en-US" sz="8800" dirty="0"/>
+          </a:p>
+        </p:txBody>
+      </p:sp>
+      <p:sp>
+        <p:nvSpPr>
+          <p:cNvPr id="5" name="Text 3"/>
+          <p:cNvSpPr txBox="1"/>
+          <p:nvPr/>
+        </p:nvSpPr>
+        <p:spPr>
+          <a:xfrm>
+            <a:off x="594360" y="3108960"/>
+            <a:ext cx="3017520" cy="411480"/>
+          </a:xfrm>
+          <a:prstGeom prst="rect">
+            <a:avLst/>
+          </a:prstGeom>
+          <a:noFill/>
+          <a:ln/>
+        </p:spPr>
+        <p:txBody>
+          <a:bodyPr wrap="square" lIns="0" tIns="0" rIns="0" bIns="0" rtlCol="0" anchor="ctr"/>
+          <a:lstStyle/>
+          <a:p>
+            <a:pPr indent="0" marL="0">
+              <a:buNone/>
+            </a:pPr>
+            <a:r>
+              <a:rPr lang="en-US" sz="2200" b="1" dirty="0">
+                <a:solidFill>
+                  <a:srgbClr val="1B2B34"/>
+                </a:solidFill>
+                <a:latin typeface="Arial" pitchFamily="34" charset="0"/>
+                <a:ea typeface="Arial" pitchFamily="34" charset="-122"/>
+                <a:cs typeface="Arial" pitchFamily="34" charset="-120"/>
+              </a:rPr>
+              <a:t>Nivel Inicial</a:t>
+            </a:r>
+            <a:endParaRPr lang="en-US" sz="2200" dirty="0"/>
+          </a:p>
+        </p:txBody>
+      </p:sp>
+      <p:sp>
+        <p:nvSpPr>
+          <p:cNvPr id="6" name="Text 4"/>
+          <p:cNvSpPr txBox="1"/>
+          <p:nvPr/>
+        </p:nvSpPr>
+        <p:spPr>
+          <a:xfrm>
+            <a:off x="594360" y="3547872"/>
+            <a:ext cx="3017520" cy="320040"/>
+          </a:xfrm>
+          <a:prstGeom prst="rect">
+            <a:avLst/>
+          </a:prstGeom>
+          <a:noFill/>
+          <a:ln/>
+        </p:spPr>
+        <p:txBody>
+          <a:bodyPr wrap="square" lIns="0" tIns="0" rIns="0" bIns="0" rtlCol="0" anchor="ctr"/>
+          <a:lstStyle/>
+          <a:p>
+            <a:pPr indent="0" marL="0">
+              <a:buNone/>
+            </a:pPr>
+            <a:r>
+              <a:rPr lang="en-US" sz="1300" dirty="0">
+                <a:solidFill>
+                  <a:srgbClr val="55636B"/>
+                </a:solidFill>
+                <a:latin typeface="Calibri" pitchFamily="34" charset="0"/>
+                <a:ea typeface="Calibri" pitchFamily="34" charset="-122"/>
+                <a:cs typeface="Calibri" pitchFamily="34" charset="-120"/>
+              </a:rPr>
+              <a:t>50 puntos sobre 28 preguntas</a:t>
+            </a:r>
+            <a:endParaRPr lang="en-US" sz="1300" dirty="0"/>
+          </a:p>
+        </p:txBody>
+      </p:sp>
+      <p:sp>
+        <p:nvSpPr>
+          <p:cNvPr id="7" name="Shape 5"/>
           <p:cNvSpPr/>
           <p:nvPr/>
         </p:nvSpPr>
         <p:spPr>
           <a:xfrm>
-            <a:off x="594360" y="2286000"/>
-            <a:ext cx="3444240" cy="2377440"/>
+            <a:off x="594360" y="4069080"/>
+            <a:ext cx="3017520" cy="1920240"/>
           </a:xfrm>
           <a:prstGeom prst="roundRect">
             <a:avLst>
-              <a:gd name="adj" fmla="val 3077"/>
+              <a:gd name="adj" fmla="val 3810"/>
             </a:avLst>
           </a:prstGeom>
           <a:solidFill>
@@ -6297,14 +5946,76 @@
       </p:sp>
       <p:sp>
         <p:nvSpPr>
-          <p:cNvPr id="5" name="Text 3"/>
-          <p:cNvSpPr txBox="1"/>
-          <p:nvPr/>
-        </p:nvSpPr>
-        <p:spPr>
-          <a:xfrm>
-            <a:off x="850392" y="2523744"/>
-            <a:ext cx="2932176" cy="310896"/>
+          <p:cNvPr id="8" name="Text 6"/>
+          <p:cNvSpPr txBox="1"/>
+          <p:nvPr/>
+        </p:nvSpPr>
+        <p:spPr>
+          <a:xfrm>
+            <a:off x="850392" y="4306824"/>
+            <a:ext cx="2505456" cy="1499616"/>
+          </a:xfrm>
+          <a:prstGeom prst="rect">
+            <a:avLst/>
+          </a:prstGeom>
+          <a:noFill/>
+          <a:ln/>
+        </p:spPr>
+        <p:txBody>
+          <a:bodyPr wrap="square" lIns="0" tIns="0" rIns="0" bIns="0" rtlCol="0" anchor="t"/>
+          <a:lstStyle/>
+          <a:p>
+            <a:pPr indent="0" marL="0">
+              <a:buNone/>
+            </a:pPr>
+            <a:r>
+              <a:rPr lang="en-US" sz="1500" dirty="0">
+                <a:solidFill>
+                  <a:srgbClr val="1B2B34"/>
+                </a:solidFill>
+                <a:latin typeface="Calibri" pitchFamily="34" charset="0"/>
+                <a:ea typeface="Calibri" pitchFamily="34" charset="-122"/>
+                <a:cs typeface="Calibri" pitchFamily="34" charset="-120"/>
+              </a:rPr>
+              <a:t>Las dos dimensiones más bajas no son sobre herramientas: son sobre decidir y controlar.</a:t>
+            </a:r>
+            <a:endParaRPr lang="en-US" sz="1500" dirty="0"/>
+          </a:p>
+        </p:txBody>
+      </p:sp>
+      <p:sp>
+        <p:nvSpPr>
+          <p:cNvPr id="9" name="Shape 7"/>
+          <p:cNvSpPr/>
+          <p:nvPr/>
+        </p:nvSpPr>
+        <p:spPr>
+          <a:xfrm>
+            <a:off x="7159752" y="1691640"/>
+            <a:ext cx="0" cy="3931920"/>
+          </a:xfrm>
+          <a:prstGeom prst="line">
+            <a:avLst/>
+          </a:prstGeom>
+          <a:noFill/>
+          <a:ln w="12700">
+            <a:solidFill>
+              <a:srgbClr val="E2DCCC"/>
+            </a:solidFill>
+            <a:prstDash val="solid"/>
+          </a:ln>
+        </p:spPr>
+      </p:sp>
+      <p:sp>
+        <p:nvSpPr>
+          <p:cNvPr id="10" name="Text 8"/>
+          <p:cNvSpPr txBox="1"/>
+          <p:nvPr/>
+        </p:nvSpPr>
+        <p:spPr>
+          <a:xfrm>
+            <a:off x="6976872" y="5641848"/>
+            <a:ext cx="365760" cy="228600"/>
           </a:xfrm>
           <a:prstGeom prst="rect">
             <a:avLst/>
@@ -6316,19 +6027,365 @@
           <a:bodyPr wrap="square" lIns="0" tIns="0" rIns="0" bIns="0" rtlCol="0" anchor="ctr"/>
           <a:lstStyle/>
           <a:p>
-            <a:pPr indent="0" marL="0">
-              <a:buNone/>
-            </a:pPr>
-            <a:r>
-              <a:rPr lang="en-US" sz="1300" b="1" spc="80" kern="0" dirty="0">
-                <a:solidFill>
-                  <a:srgbClr val="A33B22"/>
+            <a:pPr algn="ctr" indent="0" marL="0">
+              <a:buNone/>
+            </a:pPr>
+            <a:r>
+              <a:rPr lang="en-US" sz="1000" dirty="0">
+                <a:solidFill>
+                  <a:srgbClr val="8FA3AB"/>
+                </a:solidFill>
+                <a:latin typeface="Calibri" pitchFamily="34" charset="0"/>
+                <a:ea typeface="Calibri" pitchFamily="34" charset="-122"/>
+                <a:cs typeface="Calibri" pitchFamily="34" charset="-120"/>
+              </a:rPr>
+              <a:t>1</a:t>
+            </a:r>
+            <a:endParaRPr lang="en-US" sz="1000" dirty="0"/>
+          </a:p>
+        </p:txBody>
+      </p:sp>
+      <p:sp>
+        <p:nvSpPr>
+          <p:cNvPr id="11" name="Shape 9"/>
+          <p:cNvSpPr/>
+          <p:nvPr/>
+        </p:nvSpPr>
+        <p:spPr>
+          <a:xfrm>
+            <a:off x="8101584" y="1691640"/>
+            <a:ext cx="0" cy="3931920"/>
+          </a:xfrm>
+          <a:prstGeom prst="line">
+            <a:avLst/>
+          </a:prstGeom>
+          <a:noFill/>
+          <a:ln w="12700">
+            <a:solidFill>
+              <a:srgbClr val="E2DCCC"/>
+            </a:solidFill>
+            <a:prstDash val="solid"/>
+          </a:ln>
+        </p:spPr>
+      </p:sp>
+      <p:sp>
+        <p:nvSpPr>
+          <p:cNvPr id="12" name="Text 10"/>
+          <p:cNvSpPr txBox="1"/>
+          <p:nvPr/>
+        </p:nvSpPr>
+        <p:spPr>
+          <a:xfrm>
+            <a:off x="7918704" y="5641848"/>
+            <a:ext cx="365760" cy="228600"/>
+          </a:xfrm>
+          <a:prstGeom prst="rect">
+            <a:avLst/>
+          </a:prstGeom>
+          <a:noFill/>
+          <a:ln/>
+        </p:spPr>
+        <p:txBody>
+          <a:bodyPr wrap="square" lIns="0" tIns="0" rIns="0" bIns="0" rtlCol="0" anchor="ctr"/>
+          <a:lstStyle/>
+          <a:p>
+            <a:pPr algn="ctr" indent="0" marL="0">
+              <a:buNone/>
+            </a:pPr>
+            <a:r>
+              <a:rPr lang="en-US" sz="1000" dirty="0">
+                <a:solidFill>
+                  <a:srgbClr val="8FA3AB"/>
+                </a:solidFill>
+                <a:latin typeface="Calibri" pitchFamily="34" charset="0"/>
+                <a:ea typeface="Calibri" pitchFamily="34" charset="-122"/>
+                <a:cs typeface="Calibri" pitchFamily="34" charset="-120"/>
+              </a:rPr>
+              <a:t>2</a:t>
+            </a:r>
+            <a:endParaRPr lang="en-US" sz="1000" dirty="0"/>
+          </a:p>
+        </p:txBody>
+      </p:sp>
+      <p:sp>
+        <p:nvSpPr>
+          <p:cNvPr id="13" name="Shape 11"/>
+          <p:cNvSpPr/>
+          <p:nvPr/>
+        </p:nvSpPr>
+        <p:spPr>
+          <a:xfrm>
+            <a:off x="9043416" y="1691640"/>
+            <a:ext cx="0" cy="3931920"/>
+          </a:xfrm>
+          <a:prstGeom prst="line">
+            <a:avLst/>
+          </a:prstGeom>
+          <a:noFill/>
+          <a:ln w="12700">
+            <a:solidFill>
+              <a:srgbClr val="E2DCCC"/>
+            </a:solidFill>
+            <a:prstDash val="solid"/>
+          </a:ln>
+        </p:spPr>
+      </p:sp>
+      <p:sp>
+        <p:nvSpPr>
+          <p:cNvPr id="14" name="Text 12"/>
+          <p:cNvSpPr txBox="1"/>
+          <p:nvPr/>
+        </p:nvSpPr>
+        <p:spPr>
+          <a:xfrm>
+            <a:off x="8860536" y="5641848"/>
+            <a:ext cx="365760" cy="228600"/>
+          </a:xfrm>
+          <a:prstGeom prst="rect">
+            <a:avLst/>
+          </a:prstGeom>
+          <a:noFill/>
+          <a:ln/>
+        </p:spPr>
+        <p:txBody>
+          <a:bodyPr wrap="square" lIns="0" tIns="0" rIns="0" bIns="0" rtlCol="0" anchor="ctr"/>
+          <a:lstStyle/>
+          <a:p>
+            <a:pPr algn="ctr" indent="0" marL="0">
+              <a:buNone/>
+            </a:pPr>
+            <a:r>
+              <a:rPr lang="en-US" sz="1000" dirty="0">
+                <a:solidFill>
+                  <a:srgbClr val="8FA3AB"/>
+                </a:solidFill>
+                <a:latin typeface="Calibri" pitchFamily="34" charset="0"/>
+                <a:ea typeface="Calibri" pitchFamily="34" charset="-122"/>
+                <a:cs typeface="Calibri" pitchFamily="34" charset="-120"/>
+              </a:rPr>
+              <a:t>3</a:t>
+            </a:r>
+            <a:endParaRPr lang="en-US" sz="1000" dirty="0"/>
+          </a:p>
+        </p:txBody>
+      </p:sp>
+      <p:sp>
+        <p:nvSpPr>
+          <p:cNvPr id="15" name="Shape 13"/>
+          <p:cNvSpPr/>
+          <p:nvPr/>
+        </p:nvSpPr>
+        <p:spPr>
+          <a:xfrm>
+            <a:off x="9985248" y="1691640"/>
+            <a:ext cx="0" cy="3931920"/>
+          </a:xfrm>
+          <a:prstGeom prst="line">
+            <a:avLst/>
+          </a:prstGeom>
+          <a:noFill/>
+          <a:ln w="12700">
+            <a:solidFill>
+              <a:srgbClr val="E2DCCC"/>
+            </a:solidFill>
+            <a:prstDash val="solid"/>
+          </a:ln>
+        </p:spPr>
+      </p:sp>
+      <p:sp>
+        <p:nvSpPr>
+          <p:cNvPr id="16" name="Text 14"/>
+          <p:cNvSpPr txBox="1"/>
+          <p:nvPr/>
+        </p:nvSpPr>
+        <p:spPr>
+          <a:xfrm>
+            <a:off x="9802368" y="5641848"/>
+            <a:ext cx="365760" cy="228600"/>
+          </a:xfrm>
+          <a:prstGeom prst="rect">
+            <a:avLst/>
+          </a:prstGeom>
+          <a:noFill/>
+          <a:ln/>
+        </p:spPr>
+        <p:txBody>
+          <a:bodyPr wrap="square" lIns="0" tIns="0" rIns="0" bIns="0" rtlCol="0" anchor="ctr"/>
+          <a:lstStyle/>
+          <a:p>
+            <a:pPr algn="ctr" indent="0" marL="0">
+              <a:buNone/>
+            </a:pPr>
+            <a:r>
+              <a:rPr lang="en-US" sz="1000" dirty="0">
+                <a:solidFill>
+                  <a:srgbClr val="8FA3AB"/>
+                </a:solidFill>
+                <a:latin typeface="Calibri" pitchFamily="34" charset="0"/>
+                <a:ea typeface="Calibri" pitchFamily="34" charset="-122"/>
+                <a:cs typeface="Calibri" pitchFamily="34" charset="-120"/>
+              </a:rPr>
+              <a:t>4</a:t>
+            </a:r>
+            <a:endParaRPr lang="en-US" sz="1000" dirty="0"/>
+          </a:p>
+        </p:txBody>
+      </p:sp>
+      <p:sp>
+        <p:nvSpPr>
+          <p:cNvPr id="17" name="Shape 15"/>
+          <p:cNvSpPr/>
+          <p:nvPr/>
+        </p:nvSpPr>
+        <p:spPr>
+          <a:xfrm>
+            <a:off x="10927080" y="1691640"/>
+            <a:ext cx="0" cy="3931920"/>
+          </a:xfrm>
+          <a:prstGeom prst="line">
+            <a:avLst/>
+          </a:prstGeom>
+          <a:noFill/>
+          <a:ln w="12700">
+            <a:solidFill>
+              <a:srgbClr val="E2DCCC"/>
+            </a:solidFill>
+            <a:prstDash val="solid"/>
+          </a:ln>
+        </p:spPr>
+      </p:sp>
+      <p:sp>
+        <p:nvSpPr>
+          <p:cNvPr id="18" name="Text 16"/>
+          <p:cNvSpPr txBox="1"/>
+          <p:nvPr/>
+        </p:nvSpPr>
+        <p:spPr>
+          <a:xfrm>
+            <a:off x="10744200" y="5641848"/>
+            <a:ext cx="365760" cy="228600"/>
+          </a:xfrm>
+          <a:prstGeom prst="rect">
+            <a:avLst/>
+          </a:prstGeom>
+          <a:noFill/>
+          <a:ln/>
+        </p:spPr>
+        <p:txBody>
+          <a:bodyPr wrap="square" lIns="0" tIns="0" rIns="0" bIns="0" rtlCol="0" anchor="ctr"/>
+          <a:lstStyle/>
+          <a:p>
+            <a:pPr algn="ctr" indent="0" marL="0">
+              <a:buNone/>
+            </a:pPr>
+            <a:r>
+              <a:rPr lang="en-US" sz="1000" dirty="0">
+                <a:solidFill>
+                  <a:srgbClr val="8FA3AB"/>
+                </a:solidFill>
+                <a:latin typeface="Calibri" pitchFamily="34" charset="0"/>
+                <a:ea typeface="Calibri" pitchFamily="34" charset="-122"/>
+                <a:cs typeface="Calibri" pitchFamily="34" charset="-120"/>
+              </a:rPr>
+              <a:t>5</a:t>
+            </a:r>
+            <a:endParaRPr lang="en-US" sz="1000" dirty="0"/>
+          </a:p>
+        </p:txBody>
+      </p:sp>
+      <p:sp>
+        <p:nvSpPr>
+          <p:cNvPr id="19" name="Text 17"/>
+          <p:cNvSpPr txBox="1"/>
+          <p:nvPr/>
+        </p:nvSpPr>
+        <p:spPr>
+          <a:xfrm>
+            <a:off x="4114800" y="1691640"/>
+            <a:ext cx="1993392" cy="561703"/>
+          </a:xfrm>
+          <a:prstGeom prst="rect">
+            <a:avLst/>
+          </a:prstGeom>
+          <a:noFill/>
+          <a:ln/>
+        </p:spPr>
+        <p:txBody>
+          <a:bodyPr wrap="square" lIns="0" tIns="0" rIns="0" bIns="0" rtlCol="0" anchor="ctr"/>
+          <a:lstStyle/>
+          <a:p>
+            <a:pPr algn="r" indent="0" marL="0">
+              <a:buNone/>
+            </a:pPr>
+            <a:r>
+              <a:rPr lang="en-US" sz="1300" dirty="0">
+                <a:solidFill>
+                  <a:srgbClr val="1B2B34"/>
+                </a:solidFill>
+                <a:latin typeface="Calibri" pitchFamily="34" charset="0"/>
+                <a:ea typeface="Calibri" pitchFamily="34" charset="-122"/>
+                <a:cs typeface="Calibri" pitchFamily="34" charset="-120"/>
+              </a:rPr>
+              <a:t>Procesos y Operaciones</a:t>
+            </a:r>
+            <a:endParaRPr lang="en-US" sz="1300" dirty="0"/>
+          </a:p>
+        </p:txBody>
+      </p:sp>
+      <p:sp>
+        <p:nvSpPr>
+          <p:cNvPr id="20" name="Shape 18"/>
+          <p:cNvSpPr/>
+          <p:nvPr/>
+        </p:nvSpPr>
+        <p:spPr>
+          <a:xfrm>
+            <a:off x="6217920" y="1844475"/>
+            <a:ext cx="2354580" cy="256032"/>
+          </a:xfrm>
+          <a:prstGeom prst="rect">
+            <a:avLst/>
+          </a:prstGeom>
+          <a:solidFill>
+            <a:srgbClr val="2F6B5E"/>
+          </a:solidFill>
+          <a:ln/>
+        </p:spPr>
+      </p:sp>
+      <p:sp>
+        <p:nvSpPr>
+          <p:cNvPr id="21" name="Text 19"/>
+          <p:cNvSpPr txBox="1"/>
+          <p:nvPr/>
+        </p:nvSpPr>
+        <p:spPr>
+          <a:xfrm>
+            <a:off x="8663940" y="1691640"/>
+            <a:ext cx="594360" cy="561703"/>
+          </a:xfrm>
+          <a:prstGeom prst="rect">
+            <a:avLst/>
+          </a:prstGeom>
+          <a:noFill/>
+          <a:ln/>
+        </p:spPr>
+        <p:txBody>
+          <a:bodyPr wrap="square" lIns="0" tIns="0" rIns="0" bIns="0" rtlCol="0" anchor="ctr"/>
+          <a:lstStyle/>
+          <a:p>
+            <a:pPr indent="0" marL="0">
+              <a:buNone/>
+            </a:pPr>
+            <a:r>
+              <a:rPr lang="en-US" sz="1300" b="1" dirty="0">
+                <a:solidFill>
+                  <a:srgbClr val="1B2B34"/>
                 </a:solidFill>
                 <a:latin typeface="Arial" pitchFamily="34" charset="0"/>
                 <a:ea typeface="Arial" pitchFamily="34" charset="-122"/>
                 <a:cs typeface="Arial" pitchFamily="34" charset="-120"/>
               </a:rPr>
-              <a:t>COMPITE POR PRECIO</a:t>
+              <a:t>2.50</a:t>
             </a:r>
             <a:endParaRPr lang="en-US" sz="1300" dirty="0"/>
           </a:p>
@@ -6336,30 +6393,30 @@
       </p:sp>
       <p:sp>
         <p:nvSpPr>
-          <p:cNvPr id="6" name="Text 4"/>
-          <p:cNvSpPr txBox="1"/>
-          <p:nvPr/>
-        </p:nvSpPr>
-        <p:spPr>
-          <a:xfrm>
-            <a:off x="850392" y="2926080"/>
-            <a:ext cx="2932176" cy="1554480"/>
-          </a:xfrm>
-          <a:prstGeom prst="rect">
-            <a:avLst/>
-          </a:prstGeom>
-          <a:noFill/>
-          <a:ln/>
-        </p:spPr>
-        <p:txBody>
-          <a:bodyPr wrap="square" lIns="0" tIns="0" rIns="0" bIns="0" rtlCol="0" anchor="t"/>
-          <a:lstStyle/>
-          <a:p>
-            <a:pPr indent="0" marL="0">
-              <a:buNone/>
-            </a:pPr>
-            <a:r>
-              <a:rPr lang="en-US" sz="1500" dirty="0">
+          <p:cNvPr id="22" name="Text 20"/>
+          <p:cNvSpPr txBox="1"/>
+          <p:nvPr/>
+        </p:nvSpPr>
+        <p:spPr>
+          <a:xfrm>
+            <a:off x="4114800" y="2253343"/>
+            <a:ext cx="1993392" cy="561703"/>
+          </a:xfrm>
+          <a:prstGeom prst="rect">
+            <a:avLst/>
+          </a:prstGeom>
+          <a:noFill/>
+          <a:ln/>
+        </p:spPr>
+        <p:txBody>
+          <a:bodyPr wrap="square" lIns="0" tIns="0" rIns="0" bIns="0" rtlCol="0" anchor="ctr"/>
+          <a:lstStyle/>
+          <a:p>
+            <a:pPr algn="r" indent="0" marL="0">
+              <a:buNone/>
+            </a:pPr>
+            <a:r>
+              <a:rPr lang="en-US" sz="1300" dirty="0">
                 <a:solidFill>
                   <a:srgbClr val="1B2B34"/>
                 </a:solidFill>
@@ -6367,44 +6424,42 @@
                 <a:ea typeface="Calibri" pitchFamily="34" charset="-122"/>
                 <a:cs typeface="Calibri" pitchFamily="34" charset="-120"/>
               </a:rPr>
-              <a:t>Y ningún costo está asignado por producto. La única ventaja que declara se apoya en una planilla que la empresa sabe equivocada.</a:t>
-            </a:r>
-            <a:endParaRPr lang="en-US" sz="1500" dirty="0"/>
-          </a:p>
-        </p:txBody>
-      </p:sp>
-      <p:sp>
-        <p:nvSpPr>
-          <p:cNvPr id="7" name="Shape 5"/>
+              <a:t>Tecnología y Datos</a:t>
+            </a:r>
+            <a:endParaRPr lang="en-US" sz="1300" dirty="0"/>
+          </a:p>
+        </p:txBody>
+      </p:sp>
+      <p:sp>
+        <p:nvSpPr>
+          <p:cNvPr id="23" name="Shape 21"/>
           <p:cNvSpPr/>
           <p:nvPr/>
         </p:nvSpPr>
         <p:spPr>
           <a:xfrm>
-            <a:off x="4358640" y="2286000"/>
-            <a:ext cx="3444240" cy="2377440"/>
-          </a:xfrm>
-          <a:prstGeom prst="roundRect">
-            <a:avLst>
-              <a:gd name="adj" fmla="val 3077"/>
-            </a:avLst>
+            <a:off x="6217920" y="2406178"/>
+            <a:ext cx="2119122" cy="256032"/>
+          </a:xfrm>
+          <a:prstGeom prst="rect">
+            <a:avLst/>
           </a:prstGeom>
           <a:solidFill>
-            <a:srgbClr val="EFEADC"/>
+            <a:srgbClr val="2F6B5E"/>
           </a:solidFill>
           <a:ln/>
         </p:spPr>
       </p:sp>
       <p:sp>
         <p:nvSpPr>
-          <p:cNvPr id="8" name="Text 6"/>
-          <p:cNvSpPr txBox="1"/>
-          <p:nvPr/>
-        </p:nvSpPr>
-        <p:spPr>
-          <a:xfrm>
-            <a:off x="4614672" y="2523744"/>
-            <a:ext cx="2932176" cy="310896"/>
+          <p:cNvPr id="24" name="Text 22"/>
+          <p:cNvSpPr txBox="1"/>
+          <p:nvPr/>
+        </p:nvSpPr>
+        <p:spPr>
+          <a:xfrm>
+            <a:off x="8428482" y="2253343"/>
+            <a:ext cx="594360" cy="561703"/>
           </a:xfrm>
           <a:prstGeom prst="rect">
             <a:avLst/>
@@ -6420,7 +6475,7 @@
               <a:buNone/>
             </a:pPr>
             <a:r>
-              <a:rPr lang="en-US" sz="1300" b="1" spc="80" kern="0" dirty="0">
+              <a:rPr lang="en-US" sz="1300" b="1" dirty="0">
                 <a:solidFill>
                   <a:srgbClr val="1B2B34"/>
                 </a:solidFill>
@@ -6428,7 +6483,7 @@
                 <a:ea typeface="Arial" pitchFamily="34" charset="-122"/>
                 <a:cs typeface="Arial" pitchFamily="34" charset="-120"/>
               </a:rPr>
-              <a:t>EL MEJOR ACTIVO, SIN SISTEMA</a:t>
+              <a:t>2.25</a:t>
             </a:r>
             <a:endParaRPr lang="en-US" sz="1300" dirty="0"/>
           </a:p>
@@ -6436,30 +6491,30 @@
       </p:sp>
       <p:sp>
         <p:nvSpPr>
-          <p:cNvPr id="9" name="Text 7"/>
-          <p:cNvSpPr txBox="1"/>
-          <p:nvPr/>
-        </p:nvSpPr>
-        <p:spPr>
-          <a:xfrm>
-            <a:off x="4614672" y="2926080"/>
-            <a:ext cx="2932176" cy="1554480"/>
-          </a:xfrm>
-          <a:prstGeom prst="rect">
-            <a:avLst/>
-          </a:prstGeom>
-          <a:noFill/>
-          <a:ln/>
-        </p:spPr>
-        <p:txBody>
-          <a:bodyPr wrap="square" lIns="0" tIns="0" rIns="0" bIns="0" rtlCol="0" anchor="t"/>
-          <a:lstStyle/>
-          <a:p>
-            <a:pPr indent="0" marL="0">
-              <a:buNone/>
-            </a:pPr>
-            <a:r>
-              <a:rPr lang="en-US" sz="1500" dirty="0">
+          <p:cNvPr id="25" name="Text 23"/>
+          <p:cNvSpPr txBox="1"/>
+          <p:nvPr/>
+        </p:nvSpPr>
+        <p:spPr>
+          <a:xfrm>
+            <a:off x="4114800" y="2815046"/>
+            <a:ext cx="1993392" cy="561703"/>
+          </a:xfrm>
+          <a:prstGeom prst="rect">
+            <a:avLst/>
+          </a:prstGeom>
+          <a:noFill/>
+          <a:ln/>
+        </p:spPr>
+        <p:txBody>
+          <a:bodyPr wrap="square" lIns="0" tIns="0" rIns="0" bIns="0" rtlCol="0" anchor="ctr"/>
+          <a:lstStyle/>
+          <a:p>
+            <a:pPr algn="r" indent="0" marL="0">
+              <a:buNone/>
+            </a:pPr>
+            <a:r>
+              <a:rPr lang="en-US" sz="1300" dirty="0">
                 <a:solidFill>
                   <a:srgbClr val="1B2B34"/>
                 </a:solidFill>
@@ -6467,44 +6522,42 @@
                 <a:ea typeface="Calibri" pitchFamily="34" charset="-122"/>
                 <a:cs typeface="Calibri" pitchFamily="34" charset="-120"/>
               </a:rPr>
-              <a:t>La red de 57 distribuidores no tiene CRM, no se mide cuánto pesa cada uno y la lista que publican tiene duplicados.</a:t>
-            </a:r>
-            <a:endParaRPr lang="en-US" sz="1500" dirty="0"/>
-          </a:p>
-        </p:txBody>
-      </p:sp>
-      <p:sp>
-        <p:nvSpPr>
-          <p:cNvPr id="10" name="Shape 8"/>
+              <a:t>Clientes y Canales</a:t>
+            </a:r>
+            <a:endParaRPr lang="en-US" sz="1300" dirty="0"/>
+          </a:p>
+        </p:txBody>
+      </p:sp>
+      <p:sp>
+        <p:nvSpPr>
+          <p:cNvPr id="26" name="Shape 24"/>
           <p:cNvSpPr/>
           <p:nvPr/>
         </p:nvSpPr>
         <p:spPr>
           <a:xfrm>
-            <a:off x="8122920" y="2286000"/>
-            <a:ext cx="3444240" cy="2377440"/>
-          </a:xfrm>
-          <a:prstGeom prst="roundRect">
-            <a:avLst>
-              <a:gd name="adj" fmla="val 3077"/>
-            </a:avLst>
+            <a:off x="6217920" y="2967881"/>
+            <a:ext cx="1883664" cy="256032"/>
+          </a:xfrm>
+          <a:prstGeom prst="rect">
+            <a:avLst/>
           </a:prstGeom>
           <a:solidFill>
-            <a:srgbClr val="EFEADC"/>
+            <a:srgbClr val="2F6B5E"/>
           </a:solidFill>
           <a:ln/>
         </p:spPr>
       </p:sp>
       <p:sp>
         <p:nvSpPr>
-          <p:cNvPr id="11" name="Text 9"/>
-          <p:cNvSpPr txBox="1"/>
-          <p:nvPr/>
-        </p:nvSpPr>
-        <p:spPr>
-          <a:xfrm>
-            <a:off x="8378952" y="2523744"/>
-            <a:ext cx="2932176" cy="310896"/>
+          <p:cNvPr id="27" name="Text 25"/>
+          <p:cNvSpPr txBox="1"/>
+          <p:nvPr/>
+        </p:nvSpPr>
+        <p:spPr>
+          <a:xfrm>
+            <a:off x="8193024" y="2815046"/>
+            <a:ext cx="594360" cy="561703"/>
           </a:xfrm>
           <a:prstGeom prst="rect">
             <a:avLst/>
@@ -6520,7 +6573,7 @@
               <a:buNone/>
             </a:pPr>
             <a:r>
-              <a:rPr lang="en-US" sz="1300" b="1" spc="80" kern="0" dirty="0">
+              <a:rPr lang="en-US" sz="1300" b="1" dirty="0">
                 <a:solidFill>
                   <a:srgbClr val="1B2B34"/>
                 </a:solidFill>
@@ -6528,7 +6581,7 @@
                 <a:ea typeface="Arial" pitchFamily="34" charset="-122"/>
                 <a:cs typeface="Arial" pitchFamily="34" charset="-120"/>
               </a:rPr>
-              <a:t>TODO PASA POR LOS DUEÑOS</a:t>
+              <a:t>2.00</a:t>
             </a:r>
             <a:endParaRPr lang="en-US" sz="1300" dirty="0"/>
           </a:p>
@@ -6536,30 +6589,30 @@
       </p:sp>
       <p:sp>
         <p:nvSpPr>
-          <p:cNvPr id="12" name="Text 10"/>
-          <p:cNvSpPr txBox="1"/>
-          <p:nvPr/>
-        </p:nvSpPr>
-        <p:spPr>
-          <a:xfrm>
-            <a:off x="8378952" y="2926080"/>
-            <a:ext cx="2932176" cy="1554480"/>
-          </a:xfrm>
-          <a:prstGeom prst="rect">
-            <a:avLst/>
-          </a:prstGeom>
-          <a:noFill/>
-          <a:ln/>
-        </p:spPr>
-        <p:txBody>
-          <a:bodyPr wrap="square" lIns="0" tIns="0" rIns="0" bIns="0" rtlCol="0" anchor="t"/>
-          <a:lstStyle/>
-          <a:p>
-            <a:pPr indent="0" marL="0">
-              <a:buNone/>
-            </a:pPr>
-            <a:r>
-              <a:rPr lang="en-US" sz="1500" dirty="0">
+          <p:cNvPr id="28" name="Text 26"/>
+          <p:cNvSpPr txBox="1"/>
+          <p:nvPr/>
+        </p:nvSpPr>
+        <p:spPr>
+          <a:xfrm>
+            <a:off x="4114800" y="3376749"/>
+            <a:ext cx="1993392" cy="561703"/>
+          </a:xfrm>
+          <a:prstGeom prst="rect">
+            <a:avLst/>
+          </a:prstGeom>
+          <a:noFill/>
+          <a:ln/>
+        </p:spPr>
+        <p:txBody>
+          <a:bodyPr wrap="square" lIns="0" tIns="0" rIns="0" bIns="0" rtlCol="0" anchor="ctr"/>
+          <a:lstStyle/>
+          <a:p>
+            <a:pPr algn="r" indent="0" marL="0">
+              <a:buNone/>
+            </a:pPr>
+            <a:r>
+              <a:rPr lang="en-US" sz="1300" dirty="0">
                 <a:solidFill>
                   <a:srgbClr val="1B2B34"/>
                 </a:solidFill>
@@ -6567,22 +6620,42 @@
                 <a:ea typeface="Calibri" pitchFamily="34" charset="-122"/>
                 <a:cs typeface="Calibri" pitchFamily="34" charset="-120"/>
               </a:rPr>
-              <a:t>Recetas, costos y la relación con cada distribuidor no están escritos en ningún lado ni viven en ningún sistema.</a:t>
-            </a:r>
-            <a:endParaRPr lang="en-US" sz="1500" dirty="0"/>
-          </a:p>
-        </p:txBody>
-      </p:sp>
-      <p:sp>
-        <p:nvSpPr>
-          <p:cNvPr id="13" name="Text 11"/>
-          <p:cNvSpPr txBox="1"/>
-          <p:nvPr/>
-        </p:nvSpPr>
-        <p:spPr>
-          <a:xfrm>
-            <a:off x="594360" y="4892040"/>
-            <a:ext cx="10972800" cy="457200"/>
+              <a:t>Liderazgo y Cultura</a:t>
+            </a:r>
+            <a:endParaRPr lang="en-US" sz="1300" dirty="0"/>
+          </a:p>
+        </p:txBody>
+      </p:sp>
+      <p:sp>
+        <p:nvSpPr>
+          <p:cNvPr id="29" name="Shape 27"/>
+          <p:cNvSpPr/>
+          <p:nvPr/>
+        </p:nvSpPr>
+        <p:spPr>
+          <a:xfrm>
+            <a:off x="6217920" y="3529584"/>
+            <a:ext cx="1412748" cy="256032"/>
+          </a:xfrm>
+          <a:prstGeom prst="rect">
+            <a:avLst/>
+          </a:prstGeom>
+          <a:solidFill>
+            <a:srgbClr val="C8791E"/>
+          </a:solidFill>
+          <a:ln/>
+        </p:spPr>
+      </p:sp>
+      <p:sp>
+        <p:nvSpPr>
+          <p:cNvPr id="30" name="Text 28"/>
+          <p:cNvSpPr txBox="1"/>
+          <p:nvPr/>
+        </p:nvSpPr>
+        <p:spPr>
+          <a:xfrm>
+            <a:off x="7722108" y="3376749"/>
+            <a:ext cx="594360" cy="561703"/>
           </a:xfrm>
           <a:prstGeom prst="rect">
             <a:avLst/>
@@ -6598,23 +6671,317 @@
               <a:buNone/>
             </a:pPr>
             <a:r>
-              <a:rPr lang="en-US" sz="1700" i="1" dirty="0">
-                <a:solidFill>
-                  <a:srgbClr val="55636B"/>
-                </a:solidFill>
-                <a:latin typeface="Calibri" pitchFamily="34" charset="0"/>
-                <a:ea typeface="Calibri" pitchFamily="34" charset="-122"/>
-                <a:cs typeface="Calibri" pitchFamily="34" charset="-120"/>
-              </a:rPr>
-              <a:t>Ninguno de los tres se ve desde afuera, porque el canal está conforme.</a:t>
-            </a:r>
-            <a:endParaRPr lang="en-US" sz="1700" dirty="0"/>
-          </a:p>
-        </p:txBody>
-      </p:sp>
-      <p:sp>
-        <p:nvSpPr>
-          <p:cNvPr id="14" name="Text 12"/>
+              <a:rPr lang="en-US" sz="1300" b="1" dirty="0">
+                <a:solidFill>
+                  <a:srgbClr val="1B2B34"/>
+                </a:solidFill>
+                <a:latin typeface="Arial" pitchFamily="34" charset="0"/>
+                <a:ea typeface="Arial" pitchFamily="34" charset="-122"/>
+                <a:cs typeface="Arial" pitchFamily="34" charset="-120"/>
+              </a:rPr>
+              <a:t>1.50</a:t>
+            </a:r>
+            <a:endParaRPr lang="en-US" sz="1300" dirty="0"/>
+          </a:p>
+        </p:txBody>
+      </p:sp>
+      <p:sp>
+        <p:nvSpPr>
+          <p:cNvPr id="31" name="Text 29"/>
+          <p:cNvSpPr txBox="1"/>
+          <p:nvPr/>
+        </p:nvSpPr>
+        <p:spPr>
+          <a:xfrm>
+            <a:off x="4114800" y="3938451"/>
+            <a:ext cx="1993392" cy="561703"/>
+          </a:xfrm>
+          <a:prstGeom prst="rect">
+            <a:avLst/>
+          </a:prstGeom>
+          <a:noFill/>
+          <a:ln/>
+        </p:spPr>
+        <p:txBody>
+          <a:bodyPr wrap="square" lIns="0" tIns="0" rIns="0" bIns="0" rtlCol="0" anchor="ctr"/>
+          <a:lstStyle/>
+          <a:p>
+            <a:pPr algn="r" indent="0" marL="0">
+              <a:buNone/>
+            </a:pPr>
+            <a:r>
+              <a:rPr lang="en-US" sz="1300" dirty="0">
+                <a:solidFill>
+                  <a:srgbClr val="1B2B34"/>
+                </a:solidFill>
+                <a:latin typeface="Calibri" pitchFamily="34" charset="0"/>
+                <a:ea typeface="Calibri" pitchFamily="34" charset="-122"/>
+                <a:cs typeface="Calibri" pitchFamily="34" charset="-120"/>
+              </a:rPr>
+              <a:t>Personas y Habilidades</a:t>
+            </a:r>
+            <a:endParaRPr lang="en-US" sz="1300" dirty="0"/>
+          </a:p>
+        </p:txBody>
+      </p:sp>
+      <p:sp>
+        <p:nvSpPr>
+          <p:cNvPr id="32" name="Shape 30"/>
+          <p:cNvSpPr/>
+          <p:nvPr/>
+        </p:nvSpPr>
+        <p:spPr>
+          <a:xfrm>
+            <a:off x="6217920" y="4091287"/>
+            <a:ext cx="1412748" cy="256032"/>
+          </a:xfrm>
+          <a:prstGeom prst="rect">
+            <a:avLst/>
+          </a:prstGeom>
+          <a:solidFill>
+            <a:srgbClr val="C8791E"/>
+          </a:solidFill>
+          <a:ln/>
+        </p:spPr>
+      </p:sp>
+      <p:sp>
+        <p:nvSpPr>
+          <p:cNvPr id="33" name="Text 31"/>
+          <p:cNvSpPr txBox="1"/>
+          <p:nvPr/>
+        </p:nvSpPr>
+        <p:spPr>
+          <a:xfrm>
+            <a:off x="7722108" y="3938451"/>
+            <a:ext cx="594360" cy="561703"/>
+          </a:xfrm>
+          <a:prstGeom prst="rect">
+            <a:avLst/>
+          </a:prstGeom>
+          <a:noFill/>
+          <a:ln/>
+        </p:spPr>
+        <p:txBody>
+          <a:bodyPr wrap="square" lIns="0" tIns="0" rIns="0" bIns="0" rtlCol="0" anchor="ctr"/>
+          <a:lstStyle/>
+          <a:p>
+            <a:pPr indent="0" marL="0">
+              <a:buNone/>
+            </a:pPr>
+            <a:r>
+              <a:rPr lang="en-US" sz="1300" b="1" dirty="0">
+                <a:solidFill>
+                  <a:srgbClr val="1B2B34"/>
+                </a:solidFill>
+                <a:latin typeface="Arial" pitchFamily="34" charset="0"/>
+                <a:ea typeface="Arial" pitchFamily="34" charset="-122"/>
+                <a:cs typeface="Arial" pitchFamily="34" charset="-120"/>
+              </a:rPr>
+              <a:t>1.50</a:t>
+            </a:r>
+            <a:endParaRPr lang="en-US" sz="1300" dirty="0"/>
+          </a:p>
+        </p:txBody>
+      </p:sp>
+      <p:sp>
+        <p:nvSpPr>
+          <p:cNvPr id="34" name="Text 32"/>
+          <p:cNvSpPr txBox="1"/>
+          <p:nvPr/>
+        </p:nvSpPr>
+        <p:spPr>
+          <a:xfrm>
+            <a:off x="4114800" y="4500154"/>
+            <a:ext cx="1993392" cy="561703"/>
+          </a:xfrm>
+          <a:prstGeom prst="rect">
+            <a:avLst/>
+          </a:prstGeom>
+          <a:noFill/>
+          <a:ln/>
+        </p:spPr>
+        <p:txBody>
+          <a:bodyPr wrap="square" lIns="0" tIns="0" rIns="0" bIns="0" rtlCol="0" anchor="ctr"/>
+          <a:lstStyle/>
+          <a:p>
+            <a:pPr algn="r" indent="0" marL="0">
+              <a:buNone/>
+            </a:pPr>
+            <a:r>
+              <a:rPr lang="en-US" sz="1300" dirty="0">
+                <a:solidFill>
+                  <a:srgbClr val="1B2B34"/>
+                </a:solidFill>
+                <a:latin typeface="Calibri" pitchFamily="34" charset="0"/>
+                <a:ea typeface="Calibri" pitchFamily="34" charset="-122"/>
+                <a:cs typeface="Calibri" pitchFamily="34" charset="-120"/>
+              </a:rPr>
+              <a:t>Gobierno</a:t>
+            </a:r>
+            <a:endParaRPr lang="en-US" sz="1300" dirty="0"/>
+          </a:p>
+        </p:txBody>
+      </p:sp>
+      <p:sp>
+        <p:nvSpPr>
+          <p:cNvPr id="35" name="Shape 33"/>
+          <p:cNvSpPr/>
+          <p:nvPr/>
+        </p:nvSpPr>
+        <p:spPr>
+          <a:xfrm>
+            <a:off x="6217920" y="4652990"/>
+            <a:ext cx="1412748" cy="256032"/>
+          </a:xfrm>
+          <a:prstGeom prst="rect">
+            <a:avLst/>
+          </a:prstGeom>
+          <a:solidFill>
+            <a:srgbClr val="A33B22"/>
+          </a:solidFill>
+          <a:ln/>
+        </p:spPr>
+      </p:sp>
+      <p:sp>
+        <p:nvSpPr>
+          <p:cNvPr id="36" name="Text 34"/>
+          <p:cNvSpPr txBox="1"/>
+          <p:nvPr/>
+        </p:nvSpPr>
+        <p:spPr>
+          <a:xfrm>
+            <a:off x="7722108" y="4500154"/>
+            <a:ext cx="594360" cy="561703"/>
+          </a:xfrm>
+          <a:prstGeom prst="rect">
+            <a:avLst/>
+          </a:prstGeom>
+          <a:noFill/>
+          <a:ln/>
+        </p:spPr>
+        <p:txBody>
+          <a:bodyPr wrap="square" lIns="0" tIns="0" rIns="0" bIns="0" rtlCol="0" anchor="ctr"/>
+          <a:lstStyle/>
+          <a:p>
+            <a:pPr indent="0" marL="0">
+              <a:buNone/>
+            </a:pPr>
+            <a:r>
+              <a:rPr lang="en-US" sz="1300" b="1" dirty="0">
+                <a:solidFill>
+                  <a:srgbClr val="1B2B34"/>
+                </a:solidFill>
+                <a:latin typeface="Arial" pitchFamily="34" charset="0"/>
+                <a:ea typeface="Arial" pitchFamily="34" charset="-122"/>
+                <a:cs typeface="Arial" pitchFamily="34" charset="-120"/>
+              </a:rPr>
+              <a:t>1.50</a:t>
+            </a:r>
+            <a:endParaRPr lang="en-US" sz="1300" dirty="0"/>
+          </a:p>
+        </p:txBody>
+      </p:sp>
+      <p:sp>
+        <p:nvSpPr>
+          <p:cNvPr id="37" name="Text 35"/>
+          <p:cNvSpPr txBox="1"/>
+          <p:nvPr/>
+        </p:nvSpPr>
+        <p:spPr>
+          <a:xfrm>
+            <a:off x="4114800" y="5061857"/>
+            <a:ext cx="1993392" cy="561703"/>
+          </a:xfrm>
+          <a:prstGeom prst="rect">
+            <a:avLst/>
+          </a:prstGeom>
+          <a:noFill/>
+          <a:ln/>
+        </p:spPr>
+        <p:txBody>
+          <a:bodyPr wrap="square" lIns="0" tIns="0" rIns="0" bIns="0" rtlCol="0" anchor="ctr"/>
+          <a:lstStyle/>
+          <a:p>
+            <a:pPr algn="r" indent="0" marL="0">
+              <a:buNone/>
+            </a:pPr>
+            <a:r>
+              <a:rPr lang="en-US" sz="1300" dirty="0">
+                <a:solidFill>
+                  <a:srgbClr val="1B2B34"/>
+                </a:solidFill>
+                <a:latin typeface="Calibri" pitchFamily="34" charset="0"/>
+                <a:ea typeface="Calibri" pitchFamily="34" charset="-122"/>
+                <a:cs typeface="Calibri" pitchFamily="34" charset="-120"/>
+              </a:rPr>
+              <a:t>Estrategia</a:t>
+            </a:r>
+            <a:endParaRPr lang="en-US" sz="1300" dirty="0"/>
+          </a:p>
+        </p:txBody>
+      </p:sp>
+      <p:sp>
+        <p:nvSpPr>
+          <p:cNvPr id="38" name="Shape 36"/>
+          <p:cNvSpPr/>
+          <p:nvPr/>
+        </p:nvSpPr>
+        <p:spPr>
+          <a:xfrm>
+            <a:off x="6217920" y="5214693"/>
+            <a:ext cx="1177290" cy="256032"/>
+          </a:xfrm>
+          <a:prstGeom prst="rect">
+            <a:avLst/>
+          </a:prstGeom>
+          <a:solidFill>
+            <a:srgbClr val="A33B22"/>
+          </a:solidFill>
+          <a:ln/>
+        </p:spPr>
+      </p:sp>
+      <p:sp>
+        <p:nvSpPr>
+          <p:cNvPr id="39" name="Text 37"/>
+          <p:cNvSpPr txBox="1"/>
+          <p:nvPr/>
+        </p:nvSpPr>
+        <p:spPr>
+          <a:xfrm>
+            <a:off x="7486650" y="5061857"/>
+            <a:ext cx="594360" cy="561703"/>
+          </a:xfrm>
+          <a:prstGeom prst="rect">
+            <a:avLst/>
+          </a:prstGeom>
+          <a:noFill/>
+          <a:ln/>
+        </p:spPr>
+        <p:txBody>
+          <a:bodyPr wrap="square" lIns="0" tIns="0" rIns="0" bIns="0" rtlCol="0" anchor="ctr"/>
+          <a:lstStyle/>
+          <a:p>
+            <a:pPr indent="0" marL="0">
+              <a:buNone/>
+            </a:pPr>
+            <a:r>
+              <a:rPr lang="en-US" sz="1300" b="1" dirty="0">
+                <a:solidFill>
+                  <a:srgbClr val="1B2B34"/>
+                </a:solidFill>
+                <a:latin typeface="Arial" pitchFamily="34" charset="0"/>
+                <a:ea typeface="Arial" pitchFamily="34" charset="-122"/>
+                <a:cs typeface="Arial" pitchFamily="34" charset="-120"/>
+              </a:rPr>
+              <a:t>1.25</a:t>
+            </a:r>
+            <a:endParaRPr lang="en-US" sz="1300" dirty="0"/>
+          </a:p>
+        </p:txBody>
+      </p:sp>
+      <p:sp>
+        <p:nvSpPr>
+          <p:cNvPr id="40" name="Text 38"/>
           <p:cNvSpPr txBox="1"/>
           <p:nvPr/>
         </p:nvSpPr>
@@ -6662,1329 +7029,6 @@
 <file path=ppt/slides/slide8.xml><?xml version="1.0" encoding="utf-8"?>
 <p:sld xmlns:a="http://schemas.openxmlformats.org/drawingml/2006/main" xmlns:r="http://schemas.openxmlformats.org/officeDocument/2006/relationships" xmlns:p="http://schemas.openxmlformats.org/presentationml/2006/main">
   <p:cSld name="Slide 8">
-    <p:bg>
-      <p:bgPr>
-        <a:solidFill>
-          <a:srgbClr val="F7F4EC"/>
-        </a:solidFill>
-      </p:bgPr>
-    </p:bg>
-    <p:spTree>
-      <p:nvGrpSpPr>
-        <p:cNvPr id="1" name=""/>
-        <p:cNvGrpSpPr/>
-        <p:nvPr/>
-      </p:nvGrpSpPr>
-      <p:grpSpPr>
-        <a:xfrm>
-          <a:off x="0" y="0"/>
-          <a:ext cx="0" cy="0"/>
-          <a:chOff x="0" y="0"/>
-          <a:chExt cx="0" cy="0"/>
-        </a:xfrm>
-      </p:grpSpPr>
-      <p:sp>
-        <p:nvSpPr>
-          <p:cNvPr id="2" name="Text 0"/>
-          <p:cNvSpPr txBox="1"/>
-          <p:nvPr/>
-        </p:nvSpPr>
-        <p:spPr>
-          <a:xfrm>
-            <a:off x="594360" y="457200"/>
-            <a:ext cx="10972800" cy="566928"/>
-          </a:xfrm>
-          <a:prstGeom prst="rect">
-            <a:avLst/>
-          </a:prstGeom>
-          <a:noFill/>
-          <a:ln/>
-        </p:spPr>
-        <p:txBody>
-          <a:bodyPr wrap="square" lIns="0" tIns="0" rIns="0" bIns="0" rtlCol="0" anchor="ctr"/>
-          <a:lstStyle/>
-          <a:p>
-            <a:pPr indent="0" marL="0">
-              <a:buNone/>
-            </a:pPr>
-            <a:r>
-              <a:rPr lang="en-US" sz="3400" b="1" spc="120" kern="0" dirty="0">
-                <a:solidFill>
-                  <a:srgbClr val="1B2B34"/>
-                </a:solidFill>
-                <a:latin typeface="Arial" pitchFamily="34" charset="0"/>
-                <a:ea typeface="Arial" pitchFamily="34" charset="-122"/>
-                <a:cs typeface="Arial" pitchFamily="34" charset="-120"/>
-              </a:rPr>
-              <a:t>MADUREZ DIGITAL</a:t>
-            </a:r>
-            <a:endParaRPr lang="en-US" sz="3400" dirty="0"/>
-          </a:p>
-        </p:txBody>
-      </p:sp>
-      <p:sp>
-        <p:nvSpPr>
-          <p:cNvPr id="3" name="Text 1"/>
-          <p:cNvSpPr txBox="1"/>
-          <p:nvPr/>
-        </p:nvSpPr>
-        <p:spPr>
-          <a:xfrm>
-            <a:off x="594360" y="1042416"/>
-            <a:ext cx="10972800" cy="347472"/>
-          </a:xfrm>
-          <a:prstGeom prst="rect">
-            <a:avLst/>
-          </a:prstGeom>
-          <a:noFill/>
-          <a:ln/>
-        </p:spPr>
-        <p:txBody>
-          <a:bodyPr wrap="square" lIns="0" tIns="0" rIns="0" bIns="0" rtlCol="0" anchor="ctr"/>
-          <a:lstStyle/>
-          <a:p>
-            <a:pPr indent="0" marL="0">
-              <a:buNone/>
-            </a:pPr>
-            <a:r>
-              <a:rPr lang="en-US" sz="1500" i="1" dirty="0">
-                <a:solidFill>
-                  <a:srgbClr val="55636B"/>
-                </a:solidFill>
-                <a:latin typeface="Calibri" pitchFamily="34" charset="0"/>
-                <a:ea typeface="Calibri" pitchFamily="34" charset="-122"/>
-                <a:cs typeface="Calibri" pitchFamily="34" charset="-120"/>
-              </a:rPr>
-              <a:t>El modelo de la cátedra: 28 preguntas sobre 7 dimensiones, escala de 1 a 5</a:t>
-            </a:r>
-            <a:endParaRPr lang="en-US" sz="1500" dirty="0"/>
-          </a:p>
-        </p:txBody>
-      </p:sp>
-      <p:sp>
-        <p:nvSpPr>
-          <p:cNvPr id="4" name="Text 2"/>
-          <p:cNvSpPr txBox="1"/>
-          <p:nvPr/>
-        </p:nvSpPr>
-        <p:spPr>
-          <a:xfrm>
-            <a:off x="594360" y="1691640"/>
-            <a:ext cx="3017520" cy="1371600"/>
-          </a:xfrm>
-          <a:prstGeom prst="rect">
-            <a:avLst/>
-          </a:prstGeom>
-          <a:noFill/>
-          <a:ln/>
-        </p:spPr>
-        <p:txBody>
-          <a:bodyPr wrap="square" lIns="0" tIns="0" rIns="0" bIns="0" rtlCol="0" anchor="ctr"/>
-          <a:lstStyle/>
-          <a:p>
-            <a:pPr indent="0" marL="0">
-              <a:buNone/>
-            </a:pPr>
-            <a:r>
-              <a:rPr lang="en-US" sz="8800" b="1" dirty="0">
-                <a:solidFill>
-                  <a:srgbClr val="A33B22"/>
-                </a:solidFill>
-                <a:latin typeface="Arial" pitchFamily="34" charset="0"/>
-                <a:ea typeface="Arial" pitchFamily="34" charset="-122"/>
-                <a:cs typeface="Arial" pitchFamily="34" charset="-120"/>
-              </a:rPr>
-              <a:t>1.79</a:t>
-            </a:r>
-            <a:endParaRPr lang="en-US" sz="8800" dirty="0"/>
-          </a:p>
-        </p:txBody>
-      </p:sp>
-      <p:sp>
-        <p:nvSpPr>
-          <p:cNvPr id="5" name="Text 3"/>
-          <p:cNvSpPr txBox="1"/>
-          <p:nvPr/>
-        </p:nvSpPr>
-        <p:spPr>
-          <a:xfrm>
-            <a:off x="594360" y="3108960"/>
-            <a:ext cx="3017520" cy="411480"/>
-          </a:xfrm>
-          <a:prstGeom prst="rect">
-            <a:avLst/>
-          </a:prstGeom>
-          <a:noFill/>
-          <a:ln/>
-        </p:spPr>
-        <p:txBody>
-          <a:bodyPr wrap="square" lIns="0" tIns="0" rIns="0" bIns="0" rtlCol="0" anchor="ctr"/>
-          <a:lstStyle/>
-          <a:p>
-            <a:pPr indent="0" marL="0">
-              <a:buNone/>
-            </a:pPr>
-            <a:r>
-              <a:rPr lang="en-US" sz="2200" b="1" dirty="0">
-                <a:solidFill>
-                  <a:srgbClr val="1B2B34"/>
-                </a:solidFill>
-                <a:latin typeface="Arial" pitchFamily="34" charset="0"/>
-                <a:ea typeface="Arial" pitchFamily="34" charset="-122"/>
-                <a:cs typeface="Arial" pitchFamily="34" charset="-120"/>
-              </a:rPr>
-              <a:t>Nivel Inicial</a:t>
-            </a:r>
-            <a:endParaRPr lang="en-US" sz="2200" dirty="0"/>
-          </a:p>
-        </p:txBody>
-      </p:sp>
-      <p:sp>
-        <p:nvSpPr>
-          <p:cNvPr id="6" name="Text 4"/>
-          <p:cNvSpPr txBox="1"/>
-          <p:nvPr/>
-        </p:nvSpPr>
-        <p:spPr>
-          <a:xfrm>
-            <a:off x="594360" y="3547872"/>
-            <a:ext cx="3017520" cy="320040"/>
-          </a:xfrm>
-          <a:prstGeom prst="rect">
-            <a:avLst/>
-          </a:prstGeom>
-          <a:noFill/>
-          <a:ln/>
-        </p:spPr>
-        <p:txBody>
-          <a:bodyPr wrap="square" lIns="0" tIns="0" rIns="0" bIns="0" rtlCol="0" anchor="ctr"/>
-          <a:lstStyle/>
-          <a:p>
-            <a:pPr indent="0" marL="0">
-              <a:buNone/>
-            </a:pPr>
-            <a:r>
-              <a:rPr lang="en-US" sz="1300" dirty="0">
-                <a:solidFill>
-                  <a:srgbClr val="55636B"/>
-                </a:solidFill>
-                <a:latin typeface="Calibri" pitchFamily="34" charset="0"/>
-                <a:ea typeface="Calibri" pitchFamily="34" charset="-122"/>
-                <a:cs typeface="Calibri" pitchFamily="34" charset="-120"/>
-              </a:rPr>
-              <a:t>50 puntos sobre 28 preguntas</a:t>
-            </a:r>
-            <a:endParaRPr lang="en-US" sz="1300" dirty="0"/>
-          </a:p>
-        </p:txBody>
-      </p:sp>
-      <p:sp>
-        <p:nvSpPr>
-          <p:cNvPr id="7" name="Shape 5"/>
-          <p:cNvSpPr/>
-          <p:nvPr/>
-        </p:nvSpPr>
-        <p:spPr>
-          <a:xfrm>
-            <a:off x="594360" y="4069080"/>
-            <a:ext cx="3017520" cy="1920240"/>
-          </a:xfrm>
-          <a:prstGeom prst="roundRect">
-            <a:avLst>
-              <a:gd name="adj" fmla="val 3810"/>
-            </a:avLst>
-          </a:prstGeom>
-          <a:solidFill>
-            <a:srgbClr val="F3DFD9"/>
-          </a:solidFill>
-          <a:ln/>
-        </p:spPr>
-      </p:sp>
-      <p:sp>
-        <p:nvSpPr>
-          <p:cNvPr id="8" name="Text 6"/>
-          <p:cNvSpPr txBox="1"/>
-          <p:nvPr/>
-        </p:nvSpPr>
-        <p:spPr>
-          <a:xfrm>
-            <a:off x="850392" y="4306824"/>
-            <a:ext cx="2505456" cy="1499616"/>
-          </a:xfrm>
-          <a:prstGeom prst="rect">
-            <a:avLst/>
-          </a:prstGeom>
-          <a:noFill/>
-          <a:ln/>
-        </p:spPr>
-        <p:txBody>
-          <a:bodyPr wrap="square" lIns="0" tIns="0" rIns="0" bIns="0" rtlCol="0" anchor="t"/>
-          <a:lstStyle/>
-          <a:p>
-            <a:pPr indent="0" marL="0">
-              <a:buNone/>
-            </a:pPr>
-            <a:r>
-              <a:rPr lang="en-US" sz="1500" dirty="0">
-                <a:solidFill>
-                  <a:srgbClr val="1B2B34"/>
-                </a:solidFill>
-                <a:latin typeface="Calibri" pitchFamily="34" charset="0"/>
-                <a:ea typeface="Calibri" pitchFamily="34" charset="-122"/>
-                <a:cs typeface="Calibri" pitchFamily="34" charset="-120"/>
-              </a:rPr>
-              <a:t>Las dos dimensiones más bajas no son sobre herramientas: son sobre decidir y controlar.</a:t>
-            </a:r>
-            <a:endParaRPr lang="en-US" sz="1500" dirty="0"/>
-          </a:p>
-        </p:txBody>
-      </p:sp>
-      <p:sp>
-        <p:nvSpPr>
-          <p:cNvPr id="9" name="Shape 7"/>
-          <p:cNvSpPr/>
-          <p:nvPr/>
-        </p:nvSpPr>
-        <p:spPr>
-          <a:xfrm>
-            <a:off x="7159752" y="1691640"/>
-            <a:ext cx="0" cy="3931920"/>
-          </a:xfrm>
-          <a:prstGeom prst="line">
-            <a:avLst/>
-          </a:prstGeom>
-          <a:noFill/>
-          <a:ln w="12700">
-            <a:solidFill>
-              <a:srgbClr val="E2DCCC"/>
-            </a:solidFill>
-            <a:prstDash val="solid"/>
-          </a:ln>
-        </p:spPr>
-      </p:sp>
-      <p:sp>
-        <p:nvSpPr>
-          <p:cNvPr id="10" name="Text 8"/>
-          <p:cNvSpPr txBox="1"/>
-          <p:nvPr/>
-        </p:nvSpPr>
-        <p:spPr>
-          <a:xfrm>
-            <a:off x="6976872" y="5641848"/>
-            <a:ext cx="365760" cy="228600"/>
-          </a:xfrm>
-          <a:prstGeom prst="rect">
-            <a:avLst/>
-          </a:prstGeom>
-          <a:noFill/>
-          <a:ln/>
-        </p:spPr>
-        <p:txBody>
-          <a:bodyPr wrap="square" lIns="0" tIns="0" rIns="0" bIns="0" rtlCol="0" anchor="ctr"/>
-          <a:lstStyle/>
-          <a:p>
-            <a:pPr algn="ctr" indent="0" marL="0">
-              <a:buNone/>
-            </a:pPr>
-            <a:r>
-              <a:rPr lang="en-US" sz="1000" dirty="0">
-                <a:solidFill>
-                  <a:srgbClr val="8FA3AB"/>
-                </a:solidFill>
-                <a:latin typeface="Calibri" pitchFamily="34" charset="0"/>
-                <a:ea typeface="Calibri" pitchFamily="34" charset="-122"/>
-                <a:cs typeface="Calibri" pitchFamily="34" charset="-120"/>
-              </a:rPr>
-              <a:t>1</a:t>
-            </a:r>
-            <a:endParaRPr lang="en-US" sz="1000" dirty="0"/>
-          </a:p>
-        </p:txBody>
-      </p:sp>
-      <p:sp>
-        <p:nvSpPr>
-          <p:cNvPr id="11" name="Shape 9"/>
-          <p:cNvSpPr/>
-          <p:nvPr/>
-        </p:nvSpPr>
-        <p:spPr>
-          <a:xfrm>
-            <a:off x="8101584" y="1691640"/>
-            <a:ext cx="0" cy="3931920"/>
-          </a:xfrm>
-          <a:prstGeom prst="line">
-            <a:avLst/>
-          </a:prstGeom>
-          <a:noFill/>
-          <a:ln w="12700">
-            <a:solidFill>
-              <a:srgbClr val="E2DCCC"/>
-            </a:solidFill>
-            <a:prstDash val="solid"/>
-          </a:ln>
-        </p:spPr>
-      </p:sp>
-      <p:sp>
-        <p:nvSpPr>
-          <p:cNvPr id="12" name="Text 10"/>
-          <p:cNvSpPr txBox="1"/>
-          <p:nvPr/>
-        </p:nvSpPr>
-        <p:spPr>
-          <a:xfrm>
-            <a:off x="7918704" y="5641848"/>
-            <a:ext cx="365760" cy="228600"/>
-          </a:xfrm>
-          <a:prstGeom prst="rect">
-            <a:avLst/>
-          </a:prstGeom>
-          <a:noFill/>
-          <a:ln/>
-        </p:spPr>
-        <p:txBody>
-          <a:bodyPr wrap="square" lIns="0" tIns="0" rIns="0" bIns="0" rtlCol="0" anchor="ctr"/>
-          <a:lstStyle/>
-          <a:p>
-            <a:pPr algn="ctr" indent="0" marL="0">
-              <a:buNone/>
-            </a:pPr>
-            <a:r>
-              <a:rPr lang="en-US" sz="1000" dirty="0">
-                <a:solidFill>
-                  <a:srgbClr val="8FA3AB"/>
-                </a:solidFill>
-                <a:latin typeface="Calibri" pitchFamily="34" charset="0"/>
-                <a:ea typeface="Calibri" pitchFamily="34" charset="-122"/>
-                <a:cs typeface="Calibri" pitchFamily="34" charset="-120"/>
-              </a:rPr>
-              <a:t>2</a:t>
-            </a:r>
-            <a:endParaRPr lang="en-US" sz="1000" dirty="0"/>
-          </a:p>
-        </p:txBody>
-      </p:sp>
-      <p:sp>
-        <p:nvSpPr>
-          <p:cNvPr id="13" name="Shape 11"/>
-          <p:cNvSpPr/>
-          <p:nvPr/>
-        </p:nvSpPr>
-        <p:spPr>
-          <a:xfrm>
-            <a:off x="9043416" y="1691640"/>
-            <a:ext cx="0" cy="3931920"/>
-          </a:xfrm>
-          <a:prstGeom prst="line">
-            <a:avLst/>
-          </a:prstGeom>
-          <a:noFill/>
-          <a:ln w="12700">
-            <a:solidFill>
-              <a:srgbClr val="E2DCCC"/>
-            </a:solidFill>
-            <a:prstDash val="solid"/>
-          </a:ln>
-        </p:spPr>
-      </p:sp>
-      <p:sp>
-        <p:nvSpPr>
-          <p:cNvPr id="14" name="Text 12"/>
-          <p:cNvSpPr txBox="1"/>
-          <p:nvPr/>
-        </p:nvSpPr>
-        <p:spPr>
-          <a:xfrm>
-            <a:off x="8860536" y="5641848"/>
-            <a:ext cx="365760" cy="228600"/>
-          </a:xfrm>
-          <a:prstGeom prst="rect">
-            <a:avLst/>
-          </a:prstGeom>
-          <a:noFill/>
-          <a:ln/>
-        </p:spPr>
-        <p:txBody>
-          <a:bodyPr wrap="square" lIns="0" tIns="0" rIns="0" bIns="0" rtlCol="0" anchor="ctr"/>
-          <a:lstStyle/>
-          <a:p>
-            <a:pPr algn="ctr" indent="0" marL="0">
-              <a:buNone/>
-            </a:pPr>
-            <a:r>
-              <a:rPr lang="en-US" sz="1000" dirty="0">
-                <a:solidFill>
-                  <a:srgbClr val="8FA3AB"/>
-                </a:solidFill>
-                <a:latin typeface="Calibri" pitchFamily="34" charset="0"/>
-                <a:ea typeface="Calibri" pitchFamily="34" charset="-122"/>
-                <a:cs typeface="Calibri" pitchFamily="34" charset="-120"/>
-              </a:rPr>
-              <a:t>3</a:t>
-            </a:r>
-            <a:endParaRPr lang="en-US" sz="1000" dirty="0"/>
-          </a:p>
-        </p:txBody>
-      </p:sp>
-      <p:sp>
-        <p:nvSpPr>
-          <p:cNvPr id="15" name="Shape 13"/>
-          <p:cNvSpPr/>
-          <p:nvPr/>
-        </p:nvSpPr>
-        <p:spPr>
-          <a:xfrm>
-            <a:off x="9985248" y="1691640"/>
-            <a:ext cx="0" cy="3931920"/>
-          </a:xfrm>
-          <a:prstGeom prst="line">
-            <a:avLst/>
-          </a:prstGeom>
-          <a:noFill/>
-          <a:ln w="12700">
-            <a:solidFill>
-              <a:srgbClr val="E2DCCC"/>
-            </a:solidFill>
-            <a:prstDash val="solid"/>
-          </a:ln>
-        </p:spPr>
-      </p:sp>
-      <p:sp>
-        <p:nvSpPr>
-          <p:cNvPr id="16" name="Text 14"/>
-          <p:cNvSpPr txBox="1"/>
-          <p:nvPr/>
-        </p:nvSpPr>
-        <p:spPr>
-          <a:xfrm>
-            <a:off x="9802368" y="5641848"/>
-            <a:ext cx="365760" cy="228600"/>
-          </a:xfrm>
-          <a:prstGeom prst="rect">
-            <a:avLst/>
-          </a:prstGeom>
-          <a:noFill/>
-          <a:ln/>
-        </p:spPr>
-        <p:txBody>
-          <a:bodyPr wrap="square" lIns="0" tIns="0" rIns="0" bIns="0" rtlCol="0" anchor="ctr"/>
-          <a:lstStyle/>
-          <a:p>
-            <a:pPr algn="ctr" indent="0" marL="0">
-              <a:buNone/>
-            </a:pPr>
-            <a:r>
-              <a:rPr lang="en-US" sz="1000" dirty="0">
-                <a:solidFill>
-                  <a:srgbClr val="8FA3AB"/>
-                </a:solidFill>
-                <a:latin typeface="Calibri" pitchFamily="34" charset="0"/>
-                <a:ea typeface="Calibri" pitchFamily="34" charset="-122"/>
-                <a:cs typeface="Calibri" pitchFamily="34" charset="-120"/>
-              </a:rPr>
-              <a:t>4</a:t>
-            </a:r>
-            <a:endParaRPr lang="en-US" sz="1000" dirty="0"/>
-          </a:p>
-        </p:txBody>
-      </p:sp>
-      <p:sp>
-        <p:nvSpPr>
-          <p:cNvPr id="17" name="Shape 15"/>
-          <p:cNvSpPr/>
-          <p:nvPr/>
-        </p:nvSpPr>
-        <p:spPr>
-          <a:xfrm>
-            <a:off x="10927080" y="1691640"/>
-            <a:ext cx="0" cy="3931920"/>
-          </a:xfrm>
-          <a:prstGeom prst="line">
-            <a:avLst/>
-          </a:prstGeom>
-          <a:noFill/>
-          <a:ln w="12700">
-            <a:solidFill>
-              <a:srgbClr val="E2DCCC"/>
-            </a:solidFill>
-            <a:prstDash val="solid"/>
-          </a:ln>
-        </p:spPr>
-      </p:sp>
-      <p:sp>
-        <p:nvSpPr>
-          <p:cNvPr id="18" name="Text 16"/>
-          <p:cNvSpPr txBox="1"/>
-          <p:nvPr/>
-        </p:nvSpPr>
-        <p:spPr>
-          <a:xfrm>
-            <a:off x="10744200" y="5641848"/>
-            <a:ext cx="365760" cy="228600"/>
-          </a:xfrm>
-          <a:prstGeom prst="rect">
-            <a:avLst/>
-          </a:prstGeom>
-          <a:noFill/>
-          <a:ln/>
-        </p:spPr>
-        <p:txBody>
-          <a:bodyPr wrap="square" lIns="0" tIns="0" rIns="0" bIns="0" rtlCol="0" anchor="ctr"/>
-          <a:lstStyle/>
-          <a:p>
-            <a:pPr algn="ctr" indent="0" marL="0">
-              <a:buNone/>
-            </a:pPr>
-            <a:r>
-              <a:rPr lang="en-US" sz="1000" dirty="0">
-                <a:solidFill>
-                  <a:srgbClr val="8FA3AB"/>
-                </a:solidFill>
-                <a:latin typeface="Calibri" pitchFamily="34" charset="0"/>
-                <a:ea typeface="Calibri" pitchFamily="34" charset="-122"/>
-                <a:cs typeface="Calibri" pitchFamily="34" charset="-120"/>
-              </a:rPr>
-              <a:t>5</a:t>
-            </a:r>
-            <a:endParaRPr lang="en-US" sz="1000" dirty="0"/>
-          </a:p>
-        </p:txBody>
-      </p:sp>
-      <p:sp>
-        <p:nvSpPr>
-          <p:cNvPr id="19" name="Text 17"/>
-          <p:cNvSpPr txBox="1"/>
-          <p:nvPr/>
-        </p:nvSpPr>
-        <p:spPr>
-          <a:xfrm>
-            <a:off x="4114800" y="1691640"/>
-            <a:ext cx="1993392" cy="561703"/>
-          </a:xfrm>
-          <a:prstGeom prst="rect">
-            <a:avLst/>
-          </a:prstGeom>
-          <a:noFill/>
-          <a:ln/>
-        </p:spPr>
-        <p:txBody>
-          <a:bodyPr wrap="square" lIns="0" tIns="0" rIns="0" bIns="0" rtlCol="0" anchor="ctr"/>
-          <a:lstStyle/>
-          <a:p>
-            <a:pPr algn="r" indent="0" marL="0">
-              <a:buNone/>
-            </a:pPr>
-            <a:r>
-              <a:rPr lang="en-US" sz="1300" dirty="0">
-                <a:solidFill>
-                  <a:srgbClr val="1B2B34"/>
-                </a:solidFill>
-                <a:latin typeface="Calibri" pitchFamily="34" charset="0"/>
-                <a:ea typeface="Calibri" pitchFamily="34" charset="-122"/>
-                <a:cs typeface="Calibri" pitchFamily="34" charset="-120"/>
-              </a:rPr>
-              <a:t>Procesos y Operaciones</a:t>
-            </a:r>
-            <a:endParaRPr lang="en-US" sz="1300" dirty="0"/>
-          </a:p>
-        </p:txBody>
-      </p:sp>
-      <p:sp>
-        <p:nvSpPr>
-          <p:cNvPr id="20" name="Shape 18"/>
-          <p:cNvSpPr/>
-          <p:nvPr/>
-        </p:nvSpPr>
-        <p:spPr>
-          <a:xfrm>
-            <a:off x="6217920" y="1844475"/>
-            <a:ext cx="2354580" cy="256032"/>
-          </a:xfrm>
-          <a:prstGeom prst="rect">
-            <a:avLst/>
-          </a:prstGeom>
-          <a:solidFill>
-            <a:srgbClr val="2F6B5E"/>
-          </a:solidFill>
-          <a:ln/>
-        </p:spPr>
-      </p:sp>
-      <p:sp>
-        <p:nvSpPr>
-          <p:cNvPr id="21" name="Text 19"/>
-          <p:cNvSpPr txBox="1"/>
-          <p:nvPr/>
-        </p:nvSpPr>
-        <p:spPr>
-          <a:xfrm>
-            <a:off x="8663940" y="1691640"/>
-            <a:ext cx="594360" cy="561703"/>
-          </a:xfrm>
-          <a:prstGeom prst="rect">
-            <a:avLst/>
-          </a:prstGeom>
-          <a:noFill/>
-          <a:ln/>
-        </p:spPr>
-        <p:txBody>
-          <a:bodyPr wrap="square" lIns="0" tIns="0" rIns="0" bIns="0" rtlCol="0" anchor="ctr"/>
-          <a:lstStyle/>
-          <a:p>
-            <a:pPr indent="0" marL="0">
-              <a:buNone/>
-            </a:pPr>
-            <a:r>
-              <a:rPr lang="en-US" sz="1300" b="1" dirty="0">
-                <a:solidFill>
-                  <a:srgbClr val="1B2B34"/>
-                </a:solidFill>
-                <a:latin typeface="Arial" pitchFamily="34" charset="0"/>
-                <a:ea typeface="Arial" pitchFamily="34" charset="-122"/>
-                <a:cs typeface="Arial" pitchFamily="34" charset="-120"/>
-              </a:rPr>
-              <a:t>2.50</a:t>
-            </a:r>
-            <a:endParaRPr lang="en-US" sz="1300" dirty="0"/>
-          </a:p>
-        </p:txBody>
-      </p:sp>
-      <p:sp>
-        <p:nvSpPr>
-          <p:cNvPr id="22" name="Text 20"/>
-          <p:cNvSpPr txBox="1"/>
-          <p:nvPr/>
-        </p:nvSpPr>
-        <p:spPr>
-          <a:xfrm>
-            <a:off x="4114800" y="2253343"/>
-            <a:ext cx="1993392" cy="561703"/>
-          </a:xfrm>
-          <a:prstGeom prst="rect">
-            <a:avLst/>
-          </a:prstGeom>
-          <a:noFill/>
-          <a:ln/>
-        </p:spPr>
-        <p:txBody>
-          <a:bodyPr wrap="square" lIns="0" tIns="0" rIns="0" bIns="0" rtlCol="0" anchor="ctr"/>
-          <a:lstStyle/>
-          <a:p>
-            <a:pPr algn="r" indent="0" marL="0">
-              <a:buNone/>
-            </a:pPr>
-            <a:r>
-              <a:rPr lang="en-US" sz="1300" dirty="0">
-                <a:solidFill>
-                  <a:srgbClr val="1B2B34"/>
-                </a:solidFill>
-                <a:latin typeface="Calibri" pitchFamily="34" charset="0"/>
-                <a:ea typeface="Calibri" pitchFamily="34" charset="-122"/>
-                <a:cs typeface="Calibri" pitchFamily="34" charset="-120"/>
-              </a:rPr>
-              <a:t>Tecnología y Datos</a:t>
-            </a:r>
-            <a:endParaRPr lang="en-US" sz="1300" dirty="0"/>
-          </a:p>
-        </p:txBody>
-      </p:sp>
-      <p:sp>
-        <p:nvSpPr>
-          <p:cNvPr id="23" name="Shape 21"/>
-          <p:cNvSpPr/>
-          <p:nvPr/>
-        </p:nvSpPr>
-        <p:spPr>
-          <a:xfrm>
-            <a:off x="6217920" y="2406178"/>
-            <a:ext cx="2119122" cy="256032"/>
-          </a:xfrm>
-          <a:prstGeom prst="rect">
-            <a:avLst/>
-          </a:prstGeom>
-          <a:solidFill>
-            <a:srgbClr val="2F6B5E"/>
-          </a:solidFill>
-          <a:ln/>
-        </p:spPr>
-      </p:sp>
-      <p:sp>
-        <p:nvSpPr>
-          <p:cNvPr id="24" name="Text 22"/>
-          <p:cNvSpPr txBox="1"/>
-          <p:nvPr/>
-        </p:nvSpPr>
-        <p:spPr>
-          <a:xfrm>
-            <a:off x="8428482" y="2253343"/>
-            <a:ext cx="594360" cy="561703"/>
-          </a:xfrm>
-          <a:prstGeom prst="rect">
-            <a:avLst/>
-          </a:prstGeom>
-          <a:noFill/>
-          <a:ln/>
-        </p:spPr>
-        <p:txBody>
-          <a:bodyPr wrap="square" lIns="0" tIns="0" rIns="0" bIns="0" rtlCol="0" anchor="ctr"/>
-          <a:lstStyle/>
-          <a:p>
-            <a:pPr indent="0" marL="0">
-              <a:buNone/>
-            </a:pPr>
-            <a:r>
-              <a:rPr lang="en-US" sz="1300" b="1" dirty="0">
-                <a:solidFill>
-                  <a:srgbClr val="1B2B34"/>
-                </a:solidFill>
-                <a:latin typeface="Arial" pitchFamily="34" charset="0"/>
-                <a:ea typeface="Arial" pitchFamily="34" charset="-122"/>
-                <a:cs typeface="Arial" pitchFamily="34" charset="-120"/>
-              </a:rPr>
-              <a:t>2.25</a:t>
-            </a:r>
-            <a:endParaRPr lang="en-US" sz="1300" dirty="0"/>
-          </a:p>
-        </p:txBody>
-      </p:sp>
-      <p:sp>
-        <p:nvSpPr>
-          <p:cNvPr id="25" name="Text 23"/>
-          <p:cNvSpPr txBox="1"/>
-          <p:nvPr/>
-        </p:nvSpPr>
-        <p:spPr>
-          <a:xfrm>
-            <a:off x="4114800" y="2815046"/>
-            <a:ext cx="1993392" cy="561703"/>
-          </a:xfrm>
-          <a:prstGeom prst="rect">
-            <a:avLst/>
-          </a:prstGeom>
-          <a:noFill/>
-          <a:ln/>
-        </p:spPr>
-        <p:txBody>
-          <a:bodyPr wrap="square" lIns="0" tIns="0" rIns="0" bIns="0" rtlCol="0" anchor="ctr"/>
-          <a:lstStyle/>
-          <a:p>
-            <a:pPr algn="r" indent="0" marL="0">
-              <a:buNone/>
-            </a:pPr>
-            <a:r>
-              <a:rPr lang="en-US" sz="1300" dirty="0">
-                <a:solidFill>
-                  <a:srgbClr val="1B2B34"/>
-                </a:solidFill>
-                <a:latin typeface="Calibri" pitchFamily="34" charset="0"/>
-                <a:ea typeface="Calibri" pitchFamily="34" charset="-122"/>
-                <a:cs typeface="Calibri" pitchFamily="34" charset="-120"/>
-              </a:rPr>
-              <a:t>Clientes y Canales</a:t>
-            </a:r>
-            <a:endParaRPr lang="en-US" sz="1300" dirty="0"/>
-          </a:p>
-        </p:txBody>
-      </p:sp>
-      <p:sp>
-        <p:nvSpPr>
-          <p:cNvPr id="26" name="Shape 24"/>
-          <p:cNvSpPr/>
-          <p:nvPr/>
-        </p:nvSpPr>
-        <p:spPr>
-          <a:xfrm>
-            <a:off x="6217920" y="2967881"/>
-            <a:ext cx="1883664" cy="256032"/>
-          </a:xfrm>
-          <a:prstGeom prst="rect">
-            <a:avLst/>
-          </a:prstGeom>
-          <a:solidFill>
-            <a:srgbClr val="2F6B5E"/>
-          </a:solidFill>
-          <a:ln/>
-        </p:spPr>
-      </p:sp>
-      <p:sp>
-        <p:nvSpPr>
-          <p:cNvPr id="27" name="Text 25"/>
-          <p:cNvSpPr txBox="1"/>
-          <p:nvPr/>
-        </p:nvSpPr>
-        <p:spPr>
-          <a:xfrm>
-            <a:off x="8193024" y="2815046"/>
-            <a:ext cx="594360" cy="561703"/>
-          </a:xfrm>
-          <a:prstGeom prst="rect">
-            <a:avLst/>
-          </a:prstGeom>
-          <a:noFill/>
-          <a:ln/>
-        </p:spPr>
-        <p:txBody>
-          <a:bodyPr wrap="square" lIns="0" tIns="0" rIns="0" bIns="0" rtlCol="0" anchor="ctr"/>
-          <a:lstStyle/>
-          <a:p>
-            <a:pPr indent="0" marL="0">
-              <a:buNone/>
-            </a:pPr>
-            <a:r>
-              <a:rPr lang="en-US" sz="1300" b="1" dirty="0">
-                <a:solidFill>
-                  <a:srgbClr val="1B2B34"/>
-                </a:solidFill>
-                <a:latin typeface="Arial" pitchFamily="34" charset="0"/>
-                <a:ea typeface="Arial" pitchFamily="34" charset="-122"/>
-                <a:cs typeface="Arial" pitchFamily="34" charset="-120"/>
-              </a:rPr>
-              <a:t>2.00</a:t>
-            </a:r>
-            <a:endParaRPr lang="en-US" sz="1300" dirty="0"/>
-          </a:p>
-        </p:txBody>
-      </p:sp>
-      <p:sp>
-        <p:nvSpPr>
-          <p:cNvPr id="28" name="Text 26"/>
-          <p:cNvSpPr txBox="1"/>
-          <p:nvPr/>
-        </p:nvSpPr>
-        <p:spPr>
-          <a:xfrm>
-            <a:off x="4114800" y="3376749"/>
-            <a:ext cx="1993392" cy="561703"/>
-          </a:xfrm>
-          <a:prstGeom prst="rect">
-            <a:avLst/>
-          </a:prstGeom>
-          <a:noFill/>
-          <a:ln/>
-        </p:spPr>
-        <p:txBody>
-          <a:bodyPr wrap="square" lIns="0" tIns="0" rIns="0" bIns="0" rtlCol="0" anchor="ctr"/>
-          <a:lstStyle/>
-          <a:p>
-            <a:pPr algn="r" indent="0" marL="0">
-              <a:buNone/>
-            </a:pPr>
-            <a:r>
-              <a:rPr lang="en-US" sz="1300" dirty="0">
-                <a:solidFill>
-                  <a:srgbClr val="1B2B34"/>
-                </a:solidFill>
-                <a:latin typeface="Calibri" pitchFamily="34" charset="0"/>
-                <a:ea typeface="Calibri" pitchFamily="34" charset="-122"/>
-                <a:cs typeface="Calibri" pitchFamily="34" charset="-120"/>
-              </a:rPr>
-              <a:t>Liderazgo y Cultura</a:t>
-            </a:r>
-            <a:endParaRPr lang="en-US" sz="1300" dirty="0"/>
-          </a:p>
-        </p:txBody>
-      </p:sp>
-      <p:sp>
-        <p:nvSpPr>
-          <p:cNvPr id="29" name="Shape 27"/>
-          <p:cNvSpPr/>
-          <p:nvPr/>
-        </p:nvSpPr>
-        <p:spPr>
-          <a:xfrm>
-            <a:off x="6217920" y="3529584"/>
-            <a:ext cx="1412748" cy="256032"/>
-          </a:xfrm>
-          <a:prstGeom prst="rect">
-            <a:avLst/>
-          </a:prstGeom>
-          <a:solidFill>
-            <a:srgbClr val="C8791E"/>
-          </a:solidFill>
-          <a:ln/>
-        </p:spPr>
-      </p:sp>
-      <p:sp>
-        <p:nvSpPr>
-          <p:cNvPr id="30" name="Text 28"/>
-          <p:cNvSpPr txBox="1"/>
-          <p:nvPr/>
-        </p:nvSpPr>
-        <p:spPr>
-          <a:xfrm>
-            <a:off x="7722108" y="3376749"/>
-            <a:ext cx="594360" cy="561703"/>
-          </a:xfrm>
-          <a:prstGeom prst="rect">
-            <a:avLst/>
-          </a:prstGeom>
-          <a:noFill/>
-          <a:ln/>
-        </p:spPr>
-        <p:txBody>
-          <a:bodyPr wrap="square" lIns="0" tIns="0" rIns="0" bIns="0" rtlCol="0" anchor="ctr"/>
-          <a:lstStyle/>
-          <a:p>
-            <a:pPr indent="0" marL="0">
-              <a:buNone/>
-            </a:pPr>
-            <a:r>
-              <a:rPr lang="en-US" sz="1300" b="1" dirty="0">
-                <a:solidFill>
-                  <a:srgbClr val="1B2B34"/>
-                </a:solidFill>
-                <a:latin typeface="Arial" pitchFamily="34" charset="0"/>
-                <a:ea typeface="Arial" pitchFamily="34" charset="-122"/>
-                <a:cs typeface="Arial" pitchFamily="34" charset="-120"/>
-              </a:rPr>
-              <a:t>1.50</a:t>
-            </a:r>
-            <a:endParaRPr lang="en-US" sz="1300" dirty="0"/>
-          </a:p>
-        </p:txBody>
-      </p:sp>
-      <p:sp>
-        <p:nvSpPr>
-          <p:cNvPr id="31" name="Text 29"/>
-          <p:cNvSpPr txBox="1"/>
-          <p:nvPr/>
-        </p:nvSpPr>
-        <p:spPr>
-          <a:xfrm>
-            <a:off x="4114800" y="3938451"/>
-            <a:ext cx="1993392" cy="561703"/>
-          </a:xfrm>
-          <a:prstGeom prst="rect">
-            <a:avLst/>
-          </a:prstGeom>
-          <a:noFill/>
-          <a:ln/>
-        </p:spPr>
-        <p:txBody>
-          <a:bodyPr wrap="square" lIns="0" tIns="0" rIns="0" bIns="0" rtlCol="0" anchor="ctr"/>
-          <a:lstStyle/>
-          <a:p>
-            <a:pPr algn="r" indent="0" marL="0">
-              <a:buNone/>
-            </a:pPr>
-            <a:r>
-              <a:rPr lang="en-US" sz="1300" dirty="0">
-                <a:solidFill>
-                  <a:srgbClr val="1B2B34"/>
-                </a:solidFill>
-                <a:latin typeface="Calibri" pitchFamily="34" charset="0"/>
-                <a:ea typeface="Calibri" pitchFamily="34" charset="-122"/>
-                <a:cs typeface="Calibri" pitchFamily="34" charset="-120"/>
-              </a:rPr>
-              <a:t>Personas y Habilidades</a:t>
-            </a:r>
-            <a:endParaRPr lang="en-US" sz="1300" dirty="0"/>
-          </a:p>
-        </p:txBody>
-      </p:sp>
-      <p:sp>
-        <p:nvSpPr>
-          <p:cNvPr id="32" name="Shape 30"/>
-          <p:cNvSpPr/>
-          <p:nvPr/>
-        </p:nvSpPr>
-        <p:spPr>
-          <a:xfrm>
-            <a:off x="6217920" y="4091287"/>
-            <a:ext cx="1412748" cy="256032"/>
-          </a:xfrm>
-          <a:prstGeom prst="rect">
-            <a:avLst/>
-          </a:prstGeom>
-          <a:solidFill>
-            <a:srgbClr val="C8791E"/>
-          </a:solidFill>
-          <a:ln/>
-        </p:spPr>
-      </p:sp>
-      <p:sp>
-        <p:nvSpPr>
-          <p:cNvPr id="33" name="Text 31"/>
-          <p:cNvSpPr txBox="1"/>
-          <p:nvPr/>
-        </p:nvSpPr>
-        <p:spPr>
-          <a:xfrm>
-            <a:off x="7722108" y="3938451"/>
-            <a:ext cx="594360" cy="561703"/>
-          </a:xfrm>
-          <a:prstGeom prst="rect">
-            <a:avLst/>
-          </a:prstGeom>
-          <a:noFill/>
-          <a:ln/>
-        </p:spPr>
-        <p:txBody>
-          <a:bodyPr wrap="square" lIns="0" tIns="0" rIns="0" bIns="0" rtlCol="0" anchor="ctr"/>
-          <a:lstStyle/>
-          <a:p>
-            <a:pPr indent="0" marL="0">
-              <a:buNone/>
-            </a:pPr>
-            <a:r>
-              <a:rPr lang="en-US" sz="1300" b="1" dirty="0">
-                <a:solidFill>
-                  <a:srgbClr val="1B2B34"/>
-                </a:solidFill>
-                <a:latin typeface="Arial" pitchFamily="34" charset="0"/>
-                <a:ea typeface="Arial" pitchFamily="34" charset="-122"/>
-                <a:cs typeface="Arial" pitchFamily="34" charset="-120"/>
-              </a:rPr>
-              <a:t>1.50</a:t>
-            </a:r>
-            <a:endParaRPr lang="en-US" sz="1300" dirty="0"/>
-          </a:p>
-        </p:txBody>
-      </p:sp>
-      <p:sp>
-        <p:nvSpPr>
-          <p:cNvPr id="34" name="Text 32"/>
-          <p:cNvSpPr txBox="1"/>
-          <p:nvPr/>
-        </p:nvSpPr>
-        <p:spPr>
-          <a:xfrm>
-            <a:off x="4114800" y="4500154"/>
-            <a:ext cx="1993392" cy="561703"/>
-          </a:xfrm>
-          <a:prstGeom prst="rect">
-            <a:avLst/>
-          </a:prstGeom>
-          <a:noFill/>
-          <a:ln/>
-        </p:spPr>
-        <p:txBody>
-          <a:bodyPr wrap="square" lIns="0" tIns="0" rIns="0" bIns="0" rtlCol="0" anchor="ctr"/>
-          <a:lstStyle/>
-          <a:p>
-            <a:pPr algn="r" indent="0" marL="0">
-              <a:buNone/>
-            </a:pPr>
-            <a:r>
-              <a:rPr lang="en-US" sz="1300" dirty="0">
-                <a:solidFill>
-                  <a:srgbClr val="1B2B34"/>
-                </a:solidFill>
-                <a:latin typeface="Calibri" pitchFamily="34" charset="0"/>
-                <a:ea typeface="Calibri" pitchFamily="34" charset="-122"/>
-                <a:cs typeface="Calibri" pitchFamily="34" charset="-120"/>
-              </a:rPr>
-              <a:t>Gobierno</a:t>
-            </a:r>
-            <a:endParaRPr lang="en-US" sz="1300" dirty="0"/>
-          </a:p>
-        </p:txBody>
-      </p:sp>
-      <p:sp>
-        <p:nvSpPr>
-          <p:cNvPr id="35" name="Shape 33"/>
-          <p:cNvSpPr/>
-          <p:nvPr/>
-        </p:nvSpPr>
-        <p:spPr>
-          <a:xfrm>
-            <a:off x="6217920" y="4652990"/>
-            <a:ext cx="1412748" cy="256032"/>
-          </a:xfrm>
-          <a:prstGeom prst="rect">
-            <a:avLst/>
-          </a:prstGeom>
-          <a:solidFill>
-            <a:srgbClr val="A33B22"/>
-          </a:solidFill>
-          <a:ln/>
-        </p:spPr>
-      </p:sp>
-      <p:sp>
-        <p:nvSpPr>
-          <p:cNvPr id="36" name="Text 34"/>
-          <p:cNvSpPr txBox="1"/>
-          <p:nvPr/>
-        </p:nvSpPr>
-        <p:spPr>
-          <a:xfrm>
-            <a:off x="7722108" y="4500154"/>
-            <a:ext cx="594360" cy="561703"/>
-          </a:xfrm>
-          <a:prstGeom prst="rect">
-            <a:avLst/>
-          </a:prstGeom>
-          <a:noFill/>
-          <a:ln/>
-        </p:spPr>
-        <p:txBody>
-          <a:bodyPr wrap="square" lIns="0" tIns="0" rIns="0" bIns="0" rtlCol="0" anchor="ctr"/>
-          <a:lstStyle/>
-          <a:p>
-            <a:pPr indent="0" marL="0">
-              <a:buNone/>
-            </a:pPr>
-            <a:r>
-              <a:rPr lang="en-US" sz="1300" b="1" dirty="0">
-                <a:solidFill>
-                  <a:srgbClr val="1B2B34"/>
-                </a:solidFill>
-                <a:latin typeface="Arial" pitchFamily="34" charset="0"/>
-                <a:ea typeface="Arial" pitchFamily="34" charset="-122"/>
-                <a:cs typeface="Arial" pitchFamily="34" charset="-120"/>
-              </a:rPr>
-              <a:t>1.50</a:t>
-            </a:r>
-            <a:endParaRPr lang="en-US" sz="1300" dirty="0"/>
-          </a:p>
-        </p:txBody>
-      </p:sp>
-      <p:sp>
-        <p:nvSpPr>
-          <p:cNvPr id="37" name="Text 35"/>
-          <p:cNvSpPr txBox="1"/>
-          <p:nvPr/>
-        </p:nvSpPr>
-        <p:spPr>
-          <a:xfrm>
-            <a:off x="4114800" y="5061857"/>
-            <a:ext cx="1993392" cy="561703"/>
-          </a:xfrm>
-          <a:prstGeom prst="rect">
-            <a:avLst/>
-          </a:prstGeom>
-          <a:noFill/>
-          <a:ln/>
-        </p:spPr>
-        <p:txBody>
-          <a:bodyPr wrap="square" lIns="0" tIns="0" rIns="0" bIns="0" rtlCol="0" anchor="ctr"/>
-          <a:lstStyle/>
-          <a:p>
-            <a:pPr algn="r" indent="0" marL="0">
-              <a:buNone/>
-            </a:pPr>
-            <a:r>
-              <a:rPr lang="en-US" sz="1300" dirty="0">
-                <a:solidFill>
-                  <a:srgbClr val="1B2B34"/>
-                </a:solidFill>
-                <a:latin typeface="Calibri" pitchFamily="34" charset="0"/>
-                <a:ea typeface="Calibri" pitchFamily="34" charset="-122"/>
-                <a:cs typeface="Calibri" pitchFamily="34" charset="-120"/>
-              </a:rPr>
-              <a:t>Estrategia</a:t>
-            </a:r>
-            <a:endParaRPr lang="en-US" sz="1300" dirty="0"/>
-          </a:p>
-        </p:txBody>
-      </p:sp>
-      <p:sp>
-        <p:nvSpPr>
-          <p:cNvPr id="38" name="Shape 36"/>
-          <p:cNvSpPr/>
-          <p:nvPr/>
-        </p:nvSpPr>
-        <p:spPr>
-          <a:xfrm>
-            <a:off x="6217920" y="5214693"/>
-            <a:ext cx="1177290" cy="256032"/>
-          </a:xfrm>
-          <a:prstGeom prst="rect">
-            <a:avLst/>
-          </a:prstGeom>
-          <a:solidFill>
-            <a:srgbClr val="A33B22"/>
-          </a:solidFill>
-          <a:ln/>
-        </p:spPr>
-      </p:sp>
-      <p:sp>
-        <p:nvSpPr>
-          <p:cNvPr id="39" name="Text 37"/>
-          <p:cNvSpPr txBox="1"/>
-          <p:nvPr/>
-        </p:nvSpPr>
-        <p:spPr>
-          <a:xfrm>
-            <a:off x="7486650" y="5061857"/>
-            <a:ext cx="594360" cy="561703"/>
-          </a:xfrm>
-          <a:prstGeom prst="rect">
-            <a:avLst/>
-          </a:prstGeom>
-          <a:noFill/>
-          <a:ln/>
-        </p:spPr>
-        <p:txBody>
-          <a:bodyPr wrap="square" lIns="0" tIns="0" rIns="0" bIns="0" rtlCol="0" anchor="ctr"/>
-          <a:lstStyle/>
-          <a:p>
-            <a:pPr indent="0" marL="0">
-              <a:buNone/>
-            </a:pPr>
-            <a:r>
-              <a:rPr lang="en-US" sz="1300" b="1" dirty="0">
-                <a:solidFill>
-                  <a:srgbClr val="1B2B34"/>
-                </a:solidFill>
-                <a:latin typeface="Arial" pitchFamily="34" charset="0"/>
-                <a:ea typeface="Arial" pitchFamily="34" charset="-122"/>
-                <a:cs typeface="Arial" pitchFamily="34" charset="-120"/>
-              </a:rPr>
-              <a:t>1.25</a:t>
-            </a:r>
-            <a:endParaRPr lang="en-US" sz="1300" dirty="0"/>
-          </a:p>
-        </p:txBody>
-      </p:sp>
-      <p:sp>
-        <p:nvSpPr>
-          <p:cNvPr id="40" name="Text 38"/>
-          <p:cNvSpPr txBox="1"/>
-          <p:nvPr/>
-        </p:nvSpPr>
-        <p:spPr>
-          <a:xfrm>
-            <a:off x="594360" y="6263640"/>
-            <a:ext cx="10972800" cy="274320"/>
-          </a:xfrm>
-          <a:prstGeom prst="rect">
-            <a:avLst/>
-          </a:prstGeom>
-          <a:noFill/>
-          <a:ln/>
-        </p:spPr>
-        <p:txBody>
-          <a:bodyPr wrap="square" lIns="0" tIns="0" rIns="0" bIns="0" rtlCol="0" anchor="ctr"/>
-          <a:lstStyle/>
-          <a:p>
-            <a:pPr algn="r" indent="0" marL="0">
-              <a:buNone/>
-            </a:pPr>
-            <a:r>
-              <a:rPr lang="en-US" sz="1000" dirty="0">
-                <a:solidFill>
-                  <a:srgbClr val="8FA3AB"/>
-                </a:solidFill>
-                <a:latin typeface="Calibri" pitchFamily="34" charset="0"/>
-                <a:ea typeface="Calibri" pitchFamily="34" charset="-122"/>
-                <a:cs typeface="Calibri" pitchFamily="34" charset="-120"/>
-              </a:rPr>
-              <a:t>Dulxelitos · Gestión Gerencial · UTN FRSR</a:t>
-            </a:r>
-            <a:endParaRPr lang="en-US" sz="1000" dirty="0"/>
-          </a:p>
-        </p:txBody>
-      </p:sp>
-    </p:spTree>
-  </p:cSld>
-  <p:clrMapOvr>
-    <a:masterClrMapping/>
-  </p:clrMapOvr>
-</p:sld>
-</file>
-
-<file path=ppt/slides/slide9.xml><?xml version="1.0" encoding="utf-8"?>
-<p:sld xmlns:a="http://schemas.openxmlformats.org/drawingml/2006/main" xmlns:r="http://schemas.openxmlformats.org/officeDocument/2006/relationships" xmlns:p="http://schemas.openxmlformats.org/presentationml/2006/main">
-  <p:cSld name="Slide 9">
     <p:bg>
       <p:bgPr>
         <a:solidFill>
@@ -8115,12 +7159,12 @@
         </p:nvSpPr>
         <p:spPr>
           <a:xfrm>
-            <a:off x="594360" y="2331720"/>
-            <a:ext cx="3444240" cy="2743200"/>
+            <a:off x="594360" y="2514600"/>
+            <a:ext cx="3444240" cy="2926080"/>
           </a:xfrm>
           <a:prstGeom prst="roundRect">
             <a:avLst>
-              <a:gd name="adj" fmla="val 3333"/>
+              <a:gd name="adj" fmla="val 3125"/>
             </a:avLst>
           </a:prstGeom>
           <a:solidFill>
@@ -8137,7 +7181,7 @@
         </p:nvSpPr>
         <p:spPr>
           <a:xfrm>
-            <a:off x="886968" y="2578608"/>
+            <a:off x="886968" y="2788920"/>
             <a:ext cx="548640" cy="548640"/>
           </a:xfrm>
           <a:prstGeom prst="ellipse">
@@ -8157,7 +7201,7 @@
         </p:nvSpPr>
         <p:spPr>
           <a:xfrm>
-            <a:off x="886968" y="2578608"/>
+            <a:off x="886968" y="2788920"/>
             <a:ext cx="548640" cy="548640"/>
           </a:xfrm>
           <a:prstGeom prst="rect">
@@ -8196,8 +7240,8 @@
         </p:nvSpPr>
         <p:spPr>
           <a:xfrm>
-            <a:off x="886968" y="3273552"/>
-            <a:ext cx="2859024" cy="777240"/>
+            <a:off x="886968" y="3520440"/>
+            <a:ext cx="2859024" cy="822960"/>
           </a:xfrm>
           <a:prstGeom prst="rect">
             <a:avLst/>
@@ -8235,7 +7279,7 @@
         </p:nvSpPr>
         <p:spPr>
           <a:xfrm>
-            <a:off x="886968" y="4041648"/>
+            <a:off x="886968" y="4343400"/>
             <a:ext cx="2859024" cy="960120"/>
           </a:xfrm>
           <a:prstGeom prst="rect">
@@ -8274,12 +7318,12 @@
         </p:nvSpPr>
         <p:spPr>
           <a:xfrm>
-            <a:off x="4358640" y="2331720"/>
-            <a:ext cx="3444240" cy="2743200"/>
+            <a:off x="4358640" y="2514600"/>
+            <a:ext cx="3444240" cy="2926080"/>
           </a:xfrm>
           <a:prstGeom prst="roundRect">
             <a:avLst>
-              <a:gd name="adj" fmla="val 3333"/>
+              <a:gd name="adj" fmla="val 3125"/>
             </a:avLst>
           </a:prstGeom>
           <a:solidFill>
@@ -8296,7 +7340,7 @@
         </p:nvSpPr>
         <p:spPr>
           <a:xfrm>
-            <a:off x="4651248" y="2578608"/>
+            <a:off x="4651248" y="2788920"/>
             <a:ext cx="548640" cy="548640"/>
           </a:xfrm>
           <a:prstGeom prst="ellipse">
@@ -8316,7 +7360,7 @@
         </p:nvSpPr>
         <p:spPr>
           <a:xfrm>
-            <a:off x="4651248" y="2578608"/>
+            <a:off x="4651248" y="2788920"/>
             <a:ext cx="548640" cy="548640"/>
           </a:xfrm>
           <a:prstGeom prst="rect">
@@ -8355,8 +7399,8 @@
         </p:nvSpPr>
         <p:spPr>
           <a:xfrm>
-            <a:off x="4651248" y="3273552"/>
-            <a:ext cx="2859024" cy="777240"/>
+            <a:off x="4651248" y="3520440"/>
+            <a:ext cx="2859024" cy="822960"/>
           </a:xfrm>
           <a:prstGeom prst="rect">
             <a:avLst/>
@@ -8394,7 +7438,7 @@
         </p:nvSpPr>
         <p:spPr>
           <a:xfrm>
-            <a:off x="4651248" y="4041648"/>
+            <a:off x="4651248" y="4343400"/>
             <a:ext cx="2859024" cy="960120"/>
           </a:xfrm>
           <a:prstGeom prst="rect">
@@ -8433,12 +7477,12 @@
         </p:nvSpPr>
         <p:spPr>
           <a:xfrm>
-            <a:off x="8122920" y="2331720"/>
-            <a:ext cx="3444240" cy="2743200"/>
+            <a:off x="8122920" y="2514600"/>
+            <a:ext cx="3444240" cy="2926080"/>
           </a:xfrm>
           <a:prstGeom prst="roundRect">
             <a:avLst>
-              <a:gd name="adj" fmla="val 3333"/>
+              <a:gd name="adj" fmla="val 3125"/>
             </a:avLst>
           </a:prstGeom>
           <a:solidFill>
@@ -8455,7 +7499,7 @@
         </p:nvSpPr>
         <p:spPr>
           <a:xfrm>
-            <a:off x="8415528" y="2578608"/>
+            <a:off x="8415528" y="2788920"/>
             <a:ext cx="548640" cy="548640"/>
           </a:xfrm>
           <a:prstGeom prst="ellipse">
@@ -8475,7 +7519,7 @@
         </p:nvSpPr>
         <p:spPr>
           <a:xfrm>
-            <a:off x="8415528" y="2578608"/>
+            <a:off x="8415528" y="2788920"/>
             <a:ext cx="548640" cy="548640"/>
           </a:xfrm>
           <a:prstGeom prst="rect">
@@ -8514,8 +7558,8 @@
         </p:nvSpPr>
         <p:spPr>
           <a:xfrm>
-            <a:off x="8415528" y="3273552"/>
-            <a:ext cx="2859024" cy="777240"/>
+            <a:off x="8415528" y="3520440"/>
+            <a:ext cx="2859024" cy="822960"/>
           </a:xfrm>
           <a:prstGeom prst="rect">
             <a:avLst/>
@@ -8553,7 +7597,7 @@
         </p:nvSpPr>
         <p:spPr>
           <a:xfrm>
-            <a:off x="8415528" y="4041648"/>
+            <a:off x="8415528" y="4343400"/>
             <a:ext cx="2859024" cy="960120"/>
           </a:xfrm>
           <a:prstGeom prst="rect">
@@ -8578,7 +7622,7 @@
                 <a:ea typeface="Calibri" pitchFamily="34" charset="-122"/>
                 <a:cs typeface="Calibri" pitchFamily="34" charset="-120"/>
               </a:rPr>
-              <a:t>57 distribuidores construidos en 53 años, sin CRM, sin medición de cartera y con la lista pública duplicada.</a:t>
+              <a:t>+50 distribuidores establecidos, sin CRM y sin medición de cartera.</a:t>
             </a:r>
             <a:endParaRPr lang="en-US" sz="1300" dirty="0"/>
           </a:p>
@@ -8587,45 +7631,6 @@
       <p:sp>
         <p:nvSpPr>
           <p:cNvPr id="19" name="Text 17"/>
-          <p:cNvSpPr txBox="1"/>
-          <p:nvPr/>
-        </p:nvSpPr>
-        <p:spPr>
-          <a:xfrm>
-            <a:off x="594360" y="5257800"/>
-            <a:ext cx="10972800" cy="548640"/>
-          </a:xfrm>
-          <a:prstGeom prst="rect">
-            <a:avLst/>
-          </a:prstGeom>
-          <a:noFill/>
-          <a:ln/>
-        </p:spPr>
-        <p:txBody>
-          <a:bodyPr wrap="square" lIns="0" tIns="0" rIns="0" bIns="0" rtlCol="0" anchor="ctr"/>
-          <a:lstStyle/>
-          <a:p>
-            <a:pPr indent="0" marL="0">
-              <a:buNone/>
-            </a:pPr>
-            <a:r>
-              <a:rPr lang="en-US" sz="1900" dirty="0">
-                <a:solidFill>
-                  <a:srgbClr val="F7F4EC"/>
-                </a:solidFill>
-                <a:latin typeface="Calibri" pitchFamily="34" charset="0"/>
-                <a:ea typeface="Calibri" pitchFamily="34" charset="-122"/>
-                <a:cs typeface="Calibri" pitchFamily="34" charset="-120"/>
-              </a:rPr>
-              <a:t>El problema no está en el canal. El canal está conforme. Está puertas adentro.</a:t>
-            </a:r>
-            <a:endParaRPr lang="en-US" sz="1900" dirty="0"/>
-          </a:p>
-        </p:txBody>
-      </p:sp>
-      <p:sp>
-        <p:nvSpPr>
-          <p:cNvPr id="20" name="Text 18"/>
           <p:cNvSpPr txBox="1"/>
           <p:nvPr/>
         </p:nvSpPr>
